--- a/assets/lessons/lectures/digital-signal-processing/sampling-2018.pptx
+++ b/assets/lessons/lectures/digital-signal-processing/sampling-2018.pptx
@@ -22,7 +22,7 @@
     <p:sldId id="256" r:id="rId10"/>
     <p:sldId id="260" r:id="rId11"/>
   </p:sldIdLst>
-  <p:sldSz cx="9144000" cy="6858000" type="screen4x3"/>
+  <p:sldSz cx="9144000" cy="7543800"/>
   <p:notesSz cx="7315200" cy="9601200"/>
   <p:defaultTextStyle>
     <a:defPPr>
@@ -136,6 +136,185 @@
     </p:ext>
   </p:extLst>
 </p:presentation>
+</file>
+
+<file path=ppt/customXml/item1.xml><?xml version="1.0" encoding="utf-8"?>
+<ct:contentTypeSchema xmlns:ct="http://schemas.microsoft.com/office/2006/metadata/contentType" xmlns:ma="http://schemas.microsoft.com/office/2006/metadata/properties/metaAttributes" ct:_="" ma:_="" ma:contentTypeName="Document" ma:contentTypeID="0x01010016C36F108F9F92488C988DDF36346911" ma:contentTypeVersion="5" ma:contentTypeDescription="Create a new document." ma:contentTypeScope="" ma:versionID="c417924321fef32731141cd966ef6f94">
+  <xsd:schema xmlns:xsd="http://www.w3.org/2001/XMLSchema" xmlns:xs="http://www.w3.org/2001/XMLSchema" xmlns:p="http://schemas.microsoft.com/office/2006/metadata/properties" xmlns:ns2="1bb24863-89de-455f-aabf-4424925aa312" targetNamespace="http://schemas.microsoft.com/office/2006/metadata/properties" ma:root="true" ma:fieldsID="a7d3b2212d350eb904df17fc79fef4f4" ns2:_="">
+    <xsd:import namespace="1bb24863-89de-455f-aabf-4424925aa312"/>
+    <xsd:element name="properties">
+      <xsd:complexType>
+        <xsd:sequence>
+          <xsd:element name="documentManagement">
+            <xsd:complexType>
+              <xsd:all>
+                <xsd:element ref="ns2:MediaServiceMetadata" minOccurs="0"/>
+                <xsd:element ref="ns2:MediaServiceFastMetadata" minOccurs="0"/>
+                <xsd:element ref="ns2:MediaServiceAutoTags" minOccurs="0"/>
+                <xsd:element ref="ns2:MediaServiceOCR" minOccurs="0"/>
+                <xsd:element ref="ns2:MediaServiceDateTaken" minOccurs="0"/>
+              </xsd:all>
+            </xsd:complexType>
+          </xsd:element>
+        </xsd:sequence>
+      </xsd:complexType>
+    </xsd:element>
+  </xsd:schema>
+  <xsd:schema xmlns:xsd="http://www.w3.org/2001/XMLSchema" xmlns:xs="http://www.w3.org/2001/XMLSchema" xmlns:dms="http://schemas.microsoft.com/office/2006/documentManagement/types" xmlns:pc="http://schemas.microsoft.com/office/infopath/2007/PartnerControls" targetNamespace="1bb24863-89de-455f-aabf-4424925aa312" elementFormDefault="qualified">
+    <xsd:import namespace="http://schemas.microsoft.com/office/2006/documentManagement/types"/>
+    <xsd:import namespace="http://schemas.microsoft.com/office/infopath/2007/PartnerControls"/>
+    <xsd:element name="MediaServiceMetadata" ma:index="8" nillable="true" ma:displayName="MediaServiceMetadata" ma:hidden="true" ma:internalName="MediaServiceMetadata" ma:readOnly="true">
+      <xsd:simpleType>
+        <xsd:restriction base="dms:Note"/>
+      </xsd:simpleType>
+    </xsd:element>
+    <xsd:element name="MediaServiceFastMetadata" ma:index="9" nillable="true" ma:displayName="MediaServiceFastMetadata" ma:hidden="true" ma:internalName="MediaServiceFastMetadata" ma:readOnly="true">
+      <xsd:simpleType>
+        <xsd:restriction base="dms:Note"/>
+      </xsd:simpleType>
+    </xsd:element>
+    <xsd:element name="MediaServiceAutoTags" ma:index="10" nillable="true" ma:displayName="MediaServiceAutoTags" ma:internalName="MediaServiceAutoTags" ma:readOnly="true">
+      <xsd:simpleType>
+        <xsd:restriction base="dms:Text"/>
+      </xsd:simpleType>
+    </xsd:element>
+    <xsd:element name="MediaServiceOCR" ma:index="11" nillable="true" ma:displayName="MediaServiceOCR" ma:internalName="MediaServiceOCR" ma:readOnly="true">
+      <xsd:simpleType>
+        <xsd:restriction base="dms:Note">
+          <xsd:maxLength value="255"/>
+        </xsd:restriction>
+      </xsd:simpleType>
+    </xsd:element>
+    <xsd:element name="MediaServiceDateTaken" ma:index="12" nillable="true" ma:displayName="MediaServiceDateTaken" ma:hidden="true" ma:internalName="MediaServiceDateTaken" ma:readOnly="true">
+      <xsd:simpleType>
+        <xsd:restriction base="dms:Text"/>
+      </xsd:simpleType>
+    </xsd:element>
+  </xsd:schema>
+  <xsd:schema xmlns="http://schemas.openxmlformats.org/package/2006/metadata/core-properties" xmlns:xsd="http://www.w3.org/2001/XMLSchema" xmlns:xsi="http://www.w3.org/2001/XMLSchema-instance" xmlns:dc="http://purl.org/dc/elements/1.1/" xmlns:dcterms="http://purl.org/dc/terms/" xmlns:odoc="http://schemas.microsoft.com/internal/obd" targetNamespace="http://schemas.openxmlformats.org/package/2006/metadata/core-properties" elementFormDefault="qualified" attributeFormDefault="unqualified" blockDefault="#all">
+    <xsd:import namespace="http://purl.org/dc/elements/1.1/" schemaLocation="http://dublincore.org/schemas/xmls/qdc/2003/04/02/dc.xsd"/>
+    <xsd:import namespace="http://purl.org/dc/terms/" schemaLocation="http://dublincore.org/schemas/xmls/qdc/2003/04/02/dcterms.xsd"/>
+    <xsd:element name="coreProperties" type="CT_coreProperties"/>
+    <xsd:complexType name="CT_coreProperties">
+      <xsd:all>
+        <xsd:element ref="dc:creator" minOccurs="0" maxOccurs="1"/>
+        <xsd:element ref="dcterms:created" minOccurs="0" maxOccurs="1"/>
+        <xsd:element ref="dc:identifier" minOccurs="0" maxOccurs="1"/>
+        <xsd:element name="contentType" minOccurs="0" maxOccurs="1" type="xsd:string" ma:index="0" ma:displayName="Content Type"/>
+        <xsd:element ref="dc:title" minOccurs="0" maxOccurs="1" ma:index="4" ma:displayName="Title"/>
+        <xsd:element ref="dc:subject" minOccurs="0" maxOccurs="1"/>
+        <xsd:element ref="dc:description" minOccurs="0" maxOccurs="1"/>
+        <xsd:element name="keywords" minOccurs="0" maxOccurs="1" type="xsd:string"/>
+        <xsd:element ref="dc:language" minOccurs="0" maxOccurs="1"/>
+        <xsd:element name="category" minOccurs="0" maxOccurs="1" type="xsd:string"/>
+        <xsd:element name="version" minOccurs="0" maxOccurs="1" type="xsd:string"/>
+        <xsd:element name="revision" minOccurs="0" maxOccurs="1" type="xsd:string">
+          <xsd:annotation>
+            <xsd:documentation>
+                        This value indicates the number of saves or revisions. The application is responsible for updating this value after each revision.
+                    </xsd:documentation>
+          </xsd:annotation>
+        </xsd:element>
+        <xsd:element name="lastModifiedBy" minOccurs="0" maxOccurs="1" type="xsd:string"/>
+        <xsd:element ref="dcterms:modified" minOccurs="0" maxOccurs="1"/>
+        <xsd:element name="contentStatus" minOccurs="0" maxOccurs="1" type="xsd:string"/>
+      </xsd:all>
+    </xsd:complexType>
+  </xsd:schema>
+  <xs:schema xmlns:pc="http://schemas.microsoft.com/office/infopath/2007/PartnerControls" xmlns:xs="http://www.w3.org/2001/XMLSchema" targetNamespace="http://schemas.microsoft.com/office/infopath/2007/PartnerControls" elementFormDefault="qualified" attributeFormDefault="unqualified">
+    <xs:element name="Person">
+      <xs:complexType>
+        <xs:sequence>
+          <xs:element ref="pc:DisplayName" minOccurs="0"/>
+          <xs:element ref="pc:AccountId" minOccurs="0"/>
+          <xs:element ref="pc:AccountType" minOccurs="0"/>
+        </xs:sequence>
+      </xs:complexType>
+    </xs:element>
+    <xs:element name="DisplayName" type="xs:string"/>
+    <xs:element name="AccountId" type="xs:string"/>
+    <xs:element name="AccountType" type="xs:string"/>
+    <xs:element name="BDCAssociatedEntity">
+      <xs:complexType>
+        <xs:sequence>
+          <xs:element ref="pc:BDCEntity" minOccurs="0" maxOccurs="unbounded"/>
+        </xs:sequence>
+        <xs:attribute ref="pc:EntityNamespace"/>
+        <xs:attribute ref="pc:EntityName"/>
+        <xs:attribute ref="pc:SystemInstanceName"/>
+        <xs:attribute ref="pc:AssociationName"/>
+      </xs:complexType>
+    </xs:element>
+    <xs:attribute name="EntityNamespace" type="xs:string"/>
+    <xs:attribute name="EntityName" type="xs:string"/>
+    <xs:attribute name="SystemInstanceName" type="xs:string"/>
+    <xs:attribute name="AssociationName" type="xs:string"/>
+    <xs:element name="BDCEntity">
+      <xs:complexType>
+        <xs:sequence>
+          <xs:element ref="pc:EntityDisplayName" minOccurs="0"/>
+          <xs:element ref="pc:EntityInstanceReference" minOccurs="0"/>
+          <xs:element ref="pc:EntityId1" minOccurs="0"/>
+          <xs:element ref="pc:EntityId2" minOccurs="0"/>
+          <xs:element ref="pc:EntityId3" minOccurs="0"/>
+          <xs:element ref="pc:EntityId4" minOccurs="0"/>
+          <xs:element ref="pc:EntityId5" minOccurs="0"/>
+        </xs:sequence>
+      </xs:complexType>
+    </xs:element>
+    <xs:element name="EntityDisplayName" type="xs:string"/>
+    <xs:element name="EntityInstanceReference" type="xs:string"/>
+    <xs:element name="EntityId1" type="xs:string"/>
+    <xs:element name="EntityId2" type="xs:string"/>
+    <xs:element name="EntityId3" type="xs:string"/>
+    <xs:element name="EntityId4" type="xs:string"/>
+    <xs:element name="EntityId5" type="xs:string"/>
+    <xs:element name="Terms">
+      <xs:complexType>
+        <xs:sequence>
+          <xs:element ref="pc:TermInfo" minOccurs="0" maxOccurs="unbounded"/>
+        </xs:sequence>
+      </xs:complexType>
+    </xs:element>
+    <xs:element name="TermInfo">
+      <xs:complexType>
+        <xs:sequence>
+          <xs:element ref="pc:TermName" minOccurs="0"/>
+          <xs:element ref="pc:TermId" minOccurs="0"/>
+        </xs:sequence>
+      </xs:complexType>
+    </xs:element>
+    <xs:element name="TermName" type="xs:string"/>
+    <xs:element name="TermId" type="xs:string"/>
+  </xs:schema>
+</ct:contentTypeSchema>
+</file>
+
+<file path=ppt/customXml/item2.xml><?xml version="1.0" encoding="utf-8"?>
+<?mso-contentType ?>
+<FormTemplates xmlns="http://schemas.microsoft.com/sharepoint/v3/contenttype/forms">
+  <Display>DocumentLibraryForm</Display>
+  <Edit>DocumentLibraryForm</Edit>
+  <New>DocumentLibraryForm</New>
+</FormTemplates>
+</file>
+
+<file path=ppt/customXml/item3.xml><?xml version="1.0" encoding="utf-8"?>
+<p:properties xmlns:p="http://schemas.microsoft.com/office/2006/metadata/properties" xmlns:xsi="http://www.w3.org/2001/XMLSchema-instance" xmlns:pc="http://schemas.microsoft.com/office/infopath/2007/PartnerControls">
+  <documentManagement/>
+</p:properties>
+</file>
+
+<file path=ppt/customXml/itemProps1.xml><?xml version="1.0" encoding="utf-8"?>
+<ds:datastoreItem xmlns:ds="http://schemas.openxmlformats.org/officeDocument/2006/customXml" ds:itemID="{05919B30-49AC-47DE-A348-34F7E817606E}"/>
+</file>
+
+<file path=ppt/customXml/itemProps2.xml><?xml version="1.0" encoding="utf-8"?>
+<ds:datastoreItem xmlns:ds="http://schemas.openxmlformats.org/officeDocument/2006/customXml" ds:itemID="{A217FCB8-3C21-47EA-BD28-F986766CF26D}"/>
+</file>
+
+<file path=ppt/customXml/itemProps3.xml><?xml version="1.0" encoding="utf-8"?>
+<ds:datastoreItem xmlns:ds="http://schemas.openxmlformats.org/officeDocument/2006/customXml" ds:itemID="{8DCA140A-81BB-40DD-957A-904D2F637921}"/>
 </file>
 
 <file path=ppt/handoutMasters/handoutMaster1.xml><?xml version="1.0" encoding="utf-8"?>
@@ -857,7 +1036,7 @@
         </p:nvSpPr>
         <p:spPr>
           <a:xfrm>
-            <a:off x="685800" y="2130425"/>
+            <a:off x="685800" y="2473325"/>
             <a:ext cx="7772400" cy="1470025"/>
           </a:xfrm>
         </p:spPr>
@@ -884,7 +1063,7 @@
         </p:nvSpPr>
         <p:spPr>
           <a:xfrm>
-            <a:off x="1371600" y="3886200"/>
+            <a:off x="1371600" y="4229100"/>
             <a:ext cx="6400800" cy="1752600"/>
           </a:xfrm>
         </p:spPr>
@@ -1034,30 +1213,6 @@
           </a:p>
         </p:txBody>
       </p:sp>
-      <p:sp>
-        <p:nvSpPr>
-          <p:cNvPr id="6" name="Slide Number Placeholder 5"/>
-          <p:cNvSpPr>
-            <a:spLocks noGrp="1"/>
-          </p:cNvSpPr>
-          <p:nvPr>
-            <p:ph type="sldNum" sz="quarter" idx="12"/>
-          </p:nvPr>
-        </p:nvSpPr>
-        <p:spPr/>
-        <p:txBody>
-          <a:bodyPr/>
-          <a:lstStyle/>
-          <a:p>
-            <a:fld id="{B6F15528-21DE-4FAA-801E-634DDDAF4B2B}" type="slidenum">
-              <a:rPr lang="en-US" smtClean="0"/>
-              <a:pPr/>
-              <a:t>‹#›</a:t>
-            </a:fld>
-            <a:endParaRPr lang="en-US"/>
-          </a:p>
-        </p:txBody>
-      </p:sp>
     </p:spTree>
   </p:cSld>
   <p:clrMapOvr>
@@ -1200,30 +1355,6 @@
           </a:p>
         </p:txBody>
       </p:sp>
-      <p:sp>
-        <p:nvSpPr>
-          <p:cNvPr id="6" name="Slide Number Placeholder 5"/>
-          <p:cNvSpPr>
-            <a:spLocks noGrp="1"/>
-          </p:cNvSpPr>
-          <p:nvPr>
-            <p:ph type="sldNum" sz="quarter" idx="12"/>
-          </p:nvPr>
-        </p:nvSpPr>
-        <p:spPr/>
-        <p:txBody>
-          <a:bodyPr/>
-          <a:lstStyle/>
-          <a:p>
-            <a:fld id="{B6F15528-21DE-4FAA-801E-634DDDAF4B2B}" type="slidenum">
-              <a:rPr lang="en-US" smtClean="0"/>
-              <a:pPr/>
-              <a:t>‹#›</a:t>
-            </a:fld>
-            <a:endParaRPr lang="en-US"/>
-          </a:p>
-        </p:txBody>
-      </p:sp>
     </p:spTree>
   </p:cSld>
   <p:clrMapOvr>
@@ -1261,7 +1392,7 @@
         </p:nvSpPr>
         <p:spPr>
           <a:xfrm>
-            <a:off x="6629400" y="274638"/>
+            <a:off x="6629400" y="617538"/>
             <a:ext cx="2057400" cy="5851525"/>
           </a:xfrm>
         </p:spPr>
@@ -1288,7 +1419,7 @@
         </p:nvSpPr>
         <p:spPr>
           <a:xfrm>
-            <a:off x="457200" y="274638"/>
+            <a:off x="457200" y="617538"/>
             <a:ext cx="6019800" cy="5851525"/>
           </a:xfrm>
         </p:spPr>
@@ -1373,30 +1504,6 @@
               <a:rPr lang="en-US"/>
               <a:t>EE 329 </a:t>
             </a:r>
-          </a:p>
-        </p:txBody>
-      </p:sp>
-      <p:sp>
-        <p:nvSpPr>
-          <p:cNvPr id="6" name="Slide Number Placeholder 5"/>
-          <p:cNvSpPr>
-            <a:spLocks noGrp="1"/>
-          </p:cNvSpPr>
-          <p:nvPr>
-            <p:ph type="sldNum" sz="quarter" idx="12"/>
-          </p:nvPr>
-        </p:nvSpPr>
-        <p:spPr/>
-        <p:txBody>
-          <a:bodyPr/>
-          <a:lstStyle/>
-          <a:p>
-            <a:fld id="{B6F15528-21DE-4FAA-801E-634DDDAF4B2B}" type="slidenum">
-              <a:rPr lang="en-US" smtClean="0"/>
-              <a:pPr/>
-              <a:t>‹#›</a:t>
-            </a:fld>
-            <a:endParaRPr lang="en-US"/>
           </a:p>
         </p:txBody>
       </p:sp>
@@ -1542,30 +1649,6 @@
           </a:p>
         </p:txBody>
       </p:sp>
-      <p:sp>
-        <p:nvSpPr>
-          <p:cNvPr id="6" name="Slide Number Placeholder 5"/>
-          <p:cNvSpPr>
-            <a:spLocks noGrp="1"/>
-          </p:cNvSpPr>
-          <p:nvPr>
-            <p:ph type="sldNum" sz="quarter" idx="12"/>
-          </p:nvPr>
-        </p:nvSpPr>
-        <p:spPr/>
-        <p:txBody>
-          <a:bodyPr/>
-          <a:lstStyle/>
-          <a:p>
-            <a:fld id="{B6F15528-21DE-4FAA-801E-634DDDAF4B2B}" type="slidenum">
-              <a:rPr lang="en-US" smtClean="0"/>
-              <a:pPr/>
-              <a:t>‹#›</a:t>
-            </a:fld>
-            <a:endParaRPr lang="en-US"/>
-          </a:p>
-        </p:txBody>
-      </p:sp>
     </p:spTree>
   </p:cSld>
   <p:clrMapOvr>
@@ -1603,7 +1686,7 @@
         </p:nvSpPr>
         <p:spPr>
           <a:xfrm>
-            <a:off x="722313" y="4406900"/>
+            <a:off x="722313" y="4749800"/>
             <a:ext cx="7772400" cy="1362075"/>
           </a:xfrm>
         </p:spPr>
@@ -1611,7 +1694,7 @@
           <a:bodyPr anchor="t"/>
           <a:lstStyle>
             <a:lvl1pPr algn="l">
-              <a:defRPr sz="4000" b="1" cap="all"/>
+              <a:defRPr sz="3200" b="1" cap="all"/>
             </a:lvl1pPr>
           </a:lstStyle>
           <a:p>
@@ -1634,7 +1717,7 @@
         </p:nvSpPr>
         <p:spPr>
           <a:xfrm>
-            <a:off x="722313" y="2906713"/>
+            <a:off x="722313" y="3249613"/>
             <a:ext cx="7772400" cy="1500187"/>
           </a:xfrm>
         </p:spPr>
@@ -1643,7 +1726,7 @@
           <a:lstStyle>
             <a:lvl1pPr marL="0" indent="0">
               <a:buNone/>
-              <a:defRPr sz="2000">
+              <a:defRPr sz="1600">
                 <a:solidFill>
                   <a:schemeClr val="tx1">
                     <a:tint val="75000"/>
@@ -1653,7 +1736,7 @@
             </a:lvl1pPr>
             <a:lvl2pPr marL="457200" indent="0">
               <a:buNone/>
-              <a:defRPr sz="1800">
+              <a:defRPr sz="1440">
                 <a:solidFill>
                   <a:schemeClr val="tx1">
                     <a:tint val="75000"/>
@@ -1663,7 +1746,7 @@
             </a:lvl2pPr>
             <a:lvl3pPr marL="914400" indent="0">
               <a:buNone/>
-              <a:defRPr sz="1600">
+              <a:defRPr sz="1280">
                 <a:solidFill>
                   <a:schemeClr val="tx1">
                     <a:tint val="75000"/>
@@ -1673,7 +1756,7 @@
             </a:lvl3pPr>
             <a:lvl4pPr marL="1371600" indent="0">
               <a:buNone/>
-              <a:defRPr sz="1400">
+              <a:defRPr sz="1120">
                 <a:solidFill>
                   <a:schemeClr val="tx1">
                     <a:tint val="75000"/>
@@ -1683,7 +1766,7 @@
             </a:lvl4pPr>
             <a:lvl5pPr marL="1828800" indent="0">
               <a:buNone/>
-              <a:defRPr sz="1400">
+              <a:defRPr sz="1120">
                 <a:solidFill>
                   <a:schemeClr val="tx1">
                     <a:tint val="75000"/>
@@ -1693,7 +1776,7 @@
             </a:lvl5pPr>
             <a:lvl6pPr marL="2286000" indent="0">
               <a:buNone/>
-              <a:defRPr sz="1400">
+              <a:defRPr sz="1120">
                 <a:solidFill>
                   <a:schemeClr val="tx1">
                     <a:tint val="75000"/>
@@ -1703,7 +1786,7 @@
             </a:lvl6pPr>
             <a:lvl7pPr marL="2743200" indent="0">
               <a:buNone/>
-              <a:defRPr sz="1400">
+              <a:defRPr sz="1120">
                 <a:solidFill>
                   <a:schemeClr val="tx1">
                     <a:tint val="75000"/>
@@ -1713,7 +1796,7 @@
             </a:lvl7pPr>
             <a:lvl8pPr marL="3200400" indent="0">
               <a:buNone/>
-              <a:defRPr sz="1400">
+              <a:defRPr sz="1120">
                 <a:solidFill>
                   <a:schemeClr val="tx1">
                     <a:tint val="75000"/>
@@ -1723,7 +1806,7 @@
             </a:lvl8pPr>
             <a:lvl9pPr marL="3657600" indent="0">
               <a:buNone/>
-              <a:defRPr sz="1400">
+              <a:defRPr sz="1120">
                 <a:solidFill>
                   <a:schemeClr val="tx1">
                     <a:tint val="75000"/>
@@ -1782,30 +1865,6 @@
               <a:rPr lang="en-US"/>
               <a:t>EE 329 </a:t>
             </a:r>
-          </a:p>
-        </p:txBody>
-      </p:sp>
-      <p:sp>
-        <p:nvSpPr>
-          <p:cNvPr id="6" name="Slide Number Placeholder 5"/>
-          <p:cNvSpPr>
-            <a:spLocks noGrp="1"/>
-          </p:cNvSpPr>
-          <p:nvPr>
-            <p:ph type="sldNum" sz="quarter" idx="12"/>
-          </p:nvPr>
-        </p:nvSpPr>
-        <p:spPr/>
-        <p:txBody>
-          <a:bodyPr/>
-          <a:lstStyle/>
-          <a:p>
-            <a:fld id="{B6F15528-21DE-4FAA-801E-634DDDAF4B2B}" type="slidenum">
-              <a:rPr lang="en-US" smtClean="0"/>
-              <a:pPr/>
-              <a:t>‹#›</a:t>
-            </a:fld>
-            <a:endParaRPr lang="en-US"/>
           </a:p>
         </p:txBody>
       </p:sp>
@@ -1868,7 +1927,7 @@
         </p:nvSpPr>
         <p:spPr>
           <a:xfrm>
-            <a:off x="457200" y="1600200"/>
+            <a:off x="457200" y="1943100"/>
             <a:ext cx="4038600" cy="4525963"/>
           </a:xfrm>
         </p:spPr>
@@ -1876,31 +1935,31 @@
           <a:bodyPr/>
           <a:lstStyle>
             <a:lvl1pPr>
-              <a:defRPr sz="2800"/>
+              <a:defRPr sz="2240"/>
             </a:lvl1pPr>
             <a:lvl2pPr>
-              <a:defRPr sz="2400"/>
+              <a:defRPr sz="1920"/>
             </a:lvl2pPr>
             <a:lvl3pPr>
-              <a:defRPr sz="2000"/>
+              <a:defRPr sz="1600"/>
             </a:lvl3pPr>
             <a:lvl4pPr>
-              <a:defRPr sz="1800"/>
+              <a:defRPr sz="1440"/>
             </a:lvl4pPr>
             <a:lvl5pPr>
-              <a:defRPr sz="1800"/>
+              <a:defRPr sz="1440"/>
             </a:lvl5pPr>
             <a:lvl6pPr>
-              <a:defRPr sz="1800"/>
+              <a:defRPr sz="1440"/>
             </a:lvl6pPr>
             <a:lvl7pPr>
-              <a:defRPr sz="1800"/>
+              <a:defRPr sz="1440"/>
             </a:lvl7pPr>
             <a:lvl8pPr>
-              <a:defRPr sz="1800"/>
+              <a:defRPr sz="1440"/>
             </a:lvl8pPr>
             <a:lvl9pPr>
-              <a:defRPr sz="1800"/>
+              <a:defRPr sz="1440"/>
             </a:lvl9pPr>
           </a:lstStyle>
           <a:p>
@@ -1952,7 +2011,7 @@
         </p:nvSpPr>
         <p:spPr>
           <a:xfrm>
-            <a:off x="4648200" y="1600200"/>
+            <a:off x="4648200" y="1943100"/>
             <a:ext cx="4038600" cy="4525963"/>
           </a:xfrm>
         </p:spPr>
@@ -1960,31 +2019,31 @@
           <a:bodyPr/>
           <a:lstStyle>
             <a:lvl1pPr>
-              <a:defRPr sz="2800"/>
+              <a:defRPr sz="2240"/>
             </a:lvl1pPr>
             <a:lvl2pPr>
-              <a:defRPr sz="2400"/>
+              <a:defRPr sz="1920"/>
             </a:lvl2pPr>
             <a:lvl3pPr>
-              <a:defRPr sz="2000"/>
+              <a:defRPr sz="1600"/>
             </a:lvl3pPr>
             <a:lvl4pPr>
-              <a:defRPr sz="1800"/>
+              <a:defRPr sz="1440"/>
             </a:lvl4pPr>
             <a:lvl5pPr>
-              <a:defRPr sz="1800"/>
+              <a:defRPr sz="1440"/>
             </a:lvl5pPr>
             <a:lvl6pPr>
-              <a:defRPr sz="1800"/>
+              <a:defRPr sz="1440"/>
             </a:lvl6pPr>
             <a:lvl7pPr>
-              <a:defRPr sz="1800"/>
+              <a:defRPr sz="1440"/>
             </a:lvl7pPr>
             <a:lvl8pPr>
-              <a:defRPr sz="1800"/>
+              <a:defRPr sz="1440"/>
             </a:lvl8pPr>
             <a:lvl9pPr>
-              <a:defRPr sz="1800"/>
+              <a:defRPr sz="1440"/>
             </a:lvl9pPr>
           </a:lstStyle>
           <a:p>
@@ -2065,30 +2124,6 @@
               <a:rPr lang="en-US"/>
               <a:t>EE 329 </a:t>
             </a:r>
-          </a:p>
-        </p:txBody>
-      </p:sp>
-      <p:sp>
-        <p:nvSpPr>
-          <p:cNvPr id="7" name="Slide Number Placeholder 6"/>
-          <p:cNvSpPr>
-            <a:spLocks noGrp="1"/>
-          </p:cNvSpPr>
-          <p:nvPr>
-            <p:ph type="sldNum" sz="quarter" idx="12"/>
-          </p:nvPr>
-        </p:nvSpPr>
-        <p:spPr/>
-        <p:txBody>
-          <a:bodyPr/>
-          <a:lstStyle/>
-          <a:p>
-            <a:fld id="{B6F15528-21DE-4FAA-801E-634DDDAF4B2B}" type="slidenum">
-              <a:rPr lang="en-US" smtClean="0"/>
-              <a:pPr/>
-              <a:t>‹#›</a:t>
-            </a:fld>
-            <a:endParaRPr lang="en-US"/>
           </a:p>
         </p:txBody>
       </p:sp>
@@ -2155,7 +2190,7 @@
         </p:nvSpPr>
         <p:spPr>
           <a:xfrm>
-            <a:off x="457200" y="1535113"/>
+            <a:off x="457200" y="1878013"/>
             <a:ext cx="4040188" cy="639762"/>
           </a:xfrm>
         </p:spPr>
@@ -2164,39 +2199,39 @@
           <a:lstStyle>
             <a:lvl1pPr marL="0" indent="0">
               <a:buNone/>
-              <a:defRPr sz="2400" b="1"/>
+              <a:defRPr sz="1920" b="1"/>
             </a:lvl1pPr>
             <a:lvl2pPr marL="457200" indent="0">
               <a:buNone/>
-              <a:defRPr sz="2000" b="1"/>
+              <a:defRPr sz="1600" b="1"/>
             </a:lvl2pPr>
             <a:lvl3pPr marL="914400" indent="0">
               <a:buNone/>
-              <a:defRPr sz="1800" b="1"/>
+              <a:defRPr sz="1440" b="1"/>
             </a:lvl3pPr>
             <a:lvl4pPr marL="1371600" indent="0">
               <a:buNone/>
-              <a:defRPr sz="1600" b="1"/>
+              <a:defRPr sz="1280" b="1"/>
             </a:lvl4pPr>
             <a:lvl5pPr marL="1828800" indent="0">
               <a:buNone/>
-              <a:defRPr sz="1600" b="1"/>
+              <a:defRPr sz="1280" b="1"/>
             </a:lvl5pPr>
             <a:lvl6pPr marL="2286000" indent="0">
               <a:buNone/>
-              <a:defRPr sz="1600" b="1"/>
+              <a:defRPr sz="1280" b="1"/>
             </a:lvl6pPr>
             <a:lvl7pPr marL="2743200" indent="0">
               <a:buNone/>
-              <a:defRPr sz="1600" b="1"/>
+              <a:defRPr sz="1280" b="1"/>
             </a:lvl7pPr>
             <a:lvl8pPr marL="3200400" indent="0">
               <a:buNone/>
-              <a:defRPr sz="1600" b="1"/>
+              <a:defRPr sz="1280" b="1"/>
             </a:lvl8pPr>
             <a:lvl9pPr marL="3657600" indent="0">
               <a:buNone/>
-              <a:defRPr sz="1600" b="1"/>
+              <a:defRPr sz="1280" b="1"/>
             </a:lvl9pPr>
           </a:lstStyle>
           <a:p>
@@ -2220,7 +2255,7 @@
         </p:nvSpPr>
         <p:spPr>
           <a:xfrm>
-            <a:off x="457200" y="2174875"/>
+            <a:off x="457200" y="2517775"/>
             <a:ext cx="4040188" cy="3951288"/>
           </a:xfrm>
         </p:spPr>
@@ -2228,31 +2263,31 @@
           <a:bodyPr/>
           <a:lstStyle>
             <a:lvl1pPr>
-              <a:defRPr sz="2400"/>
+              <a:defRPr sz="1920"/>
             </a:lvl1pPr>
             <a:lvl2pPr>
-              <a:defRPr sz="2000"/>
+              <a:defRPr sz="1600"/>
             </a:lvl2pPr>
             <a:lvl3pPr>
-              <a:defRPr sz="1800"/>
+              <a:defRPr sz="1440"/>
             </a:lvl3pPr>
             <a:lvl4pPr>
-              <a:defRPr sz="1600"/>
+              <a:defRPr sz="1280"/>
             </a:lvl4pPr>
             <a:lvl5pPr>
-              <a:defRPr sz="1600"/>
+              <a:defRPr sz="1280"/>
             </a:lvl5pPr>
             <a:lvl6pPr>
-              <a:defRPr sz="1600"/>
+              <a:defRPr sz="1280"/>
             </a:lvl6pPr>
             <a:lvl7pPr>
-              <a:defRPr sz="1600"/>
+              <a:defRPr sz="1280"/>
             </a:lvl7pPr>
             <a:lvl8pPr>
-              <a:defRPr sz="1600"/>
+              <a:defRPr sz="1280"/>
             </a:lvl8pPr>
             <a:lvl9pPr>
-              <a:defRPr sz="1600"/>
+              <a:defRPr sz="1280"/>
             </a:lvl9pPr>
           </a:lstStyle>
           <a:p>
@@ -2304,7 +2339,7 @@
         </p:nvSpPr>
         <p:spPr>
           <a:xfrm>
-            <a:off x="4645025" y="1535113"/>
+            <a:off x="4645025" y="1878013"/>
             <a:ext cx="4041775" cy="639762"/>
           </a:xfrm>
         </p:spPr>
@@ -2313,39 +2348,39 @@
           <a:lstStyle>
             <a:lvl1pPr marL="0" indent="0">
               <a:buNone/>
-              <a:defRPr sz="2400" b="1"/>
+              <a:defRPr sz="1920" b="1"/>
             </a:lvl1pPr>
             <a:lvl2pPr marL="457200" indent="0">
               <a:buNone/>
-              <a:defRPr sz="2000" b="1"/>
+              <a:defRPr sz="1600" b="1"/>
             </a:lvl2pPr>
             <a:lvl3pPr marL="914400" indent="0">
               <a:buNone/>
-              <a:defRPr sz="1800" b="1"/>
+              <a:defRPr sz="1440" b="1"/>
             </a:lvl3pPr>
             <a:lvl4pPr marL="1371600" indent="0">
               <a:buNone/>
-              <a:defRPr sz="1600" b="1"/>
+              <a:defRPr sz="1280" b="1"/>
             </a:lvl4pPr>
             <a:lvl5pPr marL="1828800" indent="0">
               <a:buNone/>
-              <a:defRPr sz="1600" b="1"/>
+              <a:defRPr sz="1280" b="1"/>
             </a:lvl5pPr>
             <a:lvl6pPr marL="2286000" indent="0">
               <a:buNone/>
-              <a:defRPr sz="1600" b="1"/>
+              <a:defRPr sz="1280" b="1"/>
             </a:lvl6pPr>
             <a:lvl7pPr marL="2743200" indent="0">
               <a:buNone/>
-              <a:defRPr sz="1600" b="1"/>
+              <a:defRPr sz="1280" b="1"/>
             </a:lvl7pPr>
             <a:lvl8pPr marL="3200400" indent="0">
               <a:buNone/>
-              <a:defRPr sz="1600" b="1"/>
+              <a:defRPr sz="1280" b="1"/>
             </a:lvl8pPr>
             <a:lvl9pPr marL="3657600" indent="0">
               <a:buNone/>
-              <a:defRPr sz="1600" b="1"/>
+              <a:defRPr sz="1280" b="1"/>
             </a:lvl9pPr>
           </a:lstStyle>
           <a:p>
@@ -2369,7 +2404,7 @@
         </p:nvSpPr>
         <p:spPr>
           <a:xfrm>
-            <a:off x="4645025" y="2174875"/>
+            <a:off x="4645025" y="2517775"/>
             <a:ext cx="4041775" cy="3951288"/>
           </a:xfrm>
         </p:spPr>
@@ -2377,31 +2412,31 @@
           <a:bodyPr/>
           <a:lstStyle>
             <a:lvl1pPr>
-              <a:defRPr sz="2400"/>
+              <a:defRPr sz="1920"/>
             </a:lvl1pPr>
             <a:lvl2pPr>
-              <a:defRPr sz="2000"/>
+              <a:defRPr sz="1600"/>
             </a:lvl2pPr>
             <a:lvl3pPr>
-              <a:defRPr sz="1800"/>
+              <a:defRPr sz="1440"/>
             </a:lvl3pPr>
             <a:lvl4pPr>
-              <a:defRPr sz="1600"/>
+              <a:defRPr sz="1280"/>
             </a:lvl4pPr>
             <a:lvl5pPr>
-              <a:defRPr sz="1600"/>
+              <a:defRPr sz="1280"/>
             </a:lvl5pPr>
             <a:lvl6pPr>
-              <a:defRPr sz="1600"/>
+              <a:defRPr sz="1280"/>
             </a:lvl6pPr>
             <a:lvl7pPr>
-              <a:defRPr sz="1600"/>
+              <a:defRPr sz="1280"/>
             </a:lvl7pPr>
             <a:lvl8pPr>
-              <a:defRPr sz="1600"/>
+              <a:defRPr sz="1280"/>
             </a:lvl8pPr>
             <a:lvl9pPr>
-              <a:defRPr sz="1600"/>
+              <a:defRPr sz="1280"/>
             </a:lvl9pPr>
           </a:lstStyle>
           <a:p>
@@ -2482,30 +2517,6 @@
               <a:rPr lang="en-US"/>
               <a:t>EE 329 </a:t>
             </a:r>
-          </a:p>
-        </p:txBody>
-      </p:sp>
-      <p:sp>
-        <p:nvSpPr>
-          <p:cNvPr id="9" name="Slide Number Placeholder 8"/>
-          <p:cNvSpPr>
-            <a:spLocks noGrp="1"/>
-          </p:cNvSpPr>
-          <p:nvPr>
-            <p:ph type="sldNum" sz="quarter" idx="12"/>
-          </p:nvPr>
-        </p:nvSpPr>
-        <p:spPr/>
-        <p:txBody>
-          <a:bodyPr/>
-          <a:lstStyle/>
-          <a:p>
-            <a:fld id="{B6F15528-21DE-4FAA-801E-634DDDAF4B2B}" type="slidenum">
-              <a:rPr lang="en-US" smtClean="0"/>
-              <a:pPr/>
-              <a:t>‹#›</a:t>
-            </a:fld>
-            <a:endParaRPr lang="en-US"/>
           </a:p>
         </p:txBody>
       </p:sp>
@@ -2600,30 +2611,6 @@
           </a:p>
         </p:txBody>
       </p:sp>
-      <p:sp>
-        <p:nvSpPr>
-          <p:cNvPr id="5" name="Slide Number Placeholder 4"/>
-          <p:cNvSpPr>
-            <a:spLocks noGrp="1"/>
-          </p:cNvSpPr>
-          <p:nvPr>
-            <p:ph type="sldNum" sz="quarter" idx="12"/>
-          </p:nvPr>
-        </p:nvSpPr>
-        <p:spPr/>
-        <p:txBody>
-          <a:bodyPr/>
-          <a:lstStyle/>
-          <a:p>
-            <a:fld id="{B6F15528-21DE-4FAA-801E-634DDDAF4B2B}" type="slidenum">
-              <a:rPr lang="en-US" smtClean="0"/>
-              <a:pPr/>
-              <a:t>‹#›</a:t>
-            </a:fld>
-            <a:endParaRPr lang="en-US"/>
-          </a:p>
-        </p:txBody>
-      </p:sp>
     </p:spTree>
   </p:cSld>
   <p:clrMapOvr>
@@ -2693,30 +2680,6 @@
           </a:p>
         </p:txBody>
       </p:sp>
-      <p:sp>
-        <p:nvSpPr>
-          <p:cNvPr id="4" name="Slide Number Placeholder 3"/>
-          <p:cNvSpPr>
-            <a:spLocks noGrp="1"/>
-          </p:cNvSpPr>
-          <p:nvPr>
-            <p:ph type="sldNum" sz="quarter" idx="12"/>
-          </p:nvPr>
-        </p:nvSpPr>
-        <p:spPr/>
-        <p:txBody>
-          <a:bodyPr/>
-          <a:lstStyle/>
-          <a:p>
-            <a:fld id="{B6F15528-21DE-4FAA-801E-634DDDAF4B2B}" type="slidenum">
-              <a:rPr lang="en-US" smtClean="0"/>
-              <a:pPr/>
-              <a:t>‹#›</a:t>
-            </a:fld>
-            <a:endParaRPr lang="en-US"/>
-          </a:p>
-        </p:txBody>
-      </p:sp>
     </p:spTree>
   </p:cSld>
   <p:clrMapOvr>
@@ -2754,7 +2717,7 @@
         </p:nvSpPr>
         <p:spPr>
           <a:xfrm>
-            <a:off x="457200" y="273050"/>
+            <a:off x="457200" y="615950"/>
             <a:ext cx="3008313" cy="1162050"/>
           </a:xfrm>
         </p:spPr>
@@ -2762,7 +2725,7 @@
           <a:bodyPr anchor="b"/>
           <a:lstStyle>
             <a:lvl1pPr algn="l">
-              <a:defRPr sz="2000" b="1"/>
+              <a:defRPr sz="1600" b="1"/>
             </a:lvl1pPr>
           </a:lstStyle>
           <a:p>
@@ -2785,7 +2748,7 @@
         </p:nvSpPr>
         <p:spPr>
           <a:xfrm>
-            <a:off x="3575050" y="273050"/>
+            <a:off x="3575050" y="615950"/>
             <a:ext cx="5111750" cy="5853113"/>
           </a:xfrm>
         </p:spPr>
@@ -2793,31 +2756,31 @@
           <a:bodyPr/>
           <a:lstStyle>
             <a:lvl1pPr>
-              <a:defRPr sz="3200"/>
+              <a:defRPr sz="2560"/>
             </a:lvl1pPr>
             <a:lvl2pPr>
-              <a:defRPr sz="2800"/>
+              <a:defRPr sz="2240"/>
             </a:lvl2pPr>
             <a:lvl3pPr>
-              <a:defRPr sz="2400"/>
+              <a:defRPr sz="1920"/>
             </a:lvl3pPr>
             <a:lvl4pPr>
-              <a:defRPr sz="2000"/>
+              <a:defRPr sz="1600"/>
             </a:lvl4pPr>
             <a:lvl5pPr>
-              <a:defRPr sz="2000"/>
+              <a:defRPr sz="1600"/>
             </a:lvl5pPr>
             <a:lvl6pPr>
-              <a:defRPr sz="2000"/>
+              <a:defRPr sz="1600"/>
             </a:lvl6pPr>
             <a:lvl7pPr>
-              <a:defRPr sz="2000"/>
+              <a:defRPr sz="1600"/>
             </a:lvl7pPr>
             <a:lvl8pPr>
-              <a:defRPr sz="2000"/>
+              <a:defRPr sz="1600"/>
             </a:lvl8pPr>
             <a:lvl9pPr>
-              <a:defRPr sz="2000"/>
+              <a:defRPr sz="1600"/>
             </a:lvl9pPr>
           </a:lstStyle>
           <a:p>
@@ -2869,7 +2832,7 @@
         </p:nvSpPr>
         <p:spPr>
           <a:xfrm>
-            <a:off x="457200" y="1435100"/>
+            <a:off x="457200" y="1778000"/>
             <a:ext cx="3008313" cy="4691063"/>
           </a:xfrm>
         </p:spPr>
@@ -2878,39 +2841,39 @@
           <a:lstStyle>
             <a:lvl1pPr marL="0" indent="0">
               <a:buNone/>
-              <a:defRPr sz="1400"/>
+              <a:defRPr sz="1120"/>
             </a:lvl1pPr>
             <a:lvl2pPr marL="457200" indent="0">
               <a:buNone/>
-              <a:defRPr sz="1200"/>
+              <a:defRPr sz="960"/>
             </a:lvl2pPr>
             <a:lvl3pPr marL="914400" indent="0">
               <a:buNone/>
-              <a:defRPr sz="1000"/>
+              <a:defRPr sz="800"/>
             </a:lvl3pPr>
             <a:lvl4pPr marL="1371600" indent="0">
               <a:buNone/>
-              <a:defRPr sz="900"/>
+              <a:defRPr sz="720"/>
             </a:lvl4pPr>
             <a:lvl5pPr marL="1828800" indent="0">
               <a:buNone/>
-              <a:defRPr sz="900"/>
+              <a:defRPr sz="720"/>
             </a:lvl5pPr>
             <a:lvl6pPr marL="2286000" indent="0">
               <a:buNone/>
-              <a:defRPr sz="900"/>
+              <a:defRPr sz="720"/>
             </a:lvl6pPr>
             <a:lvl7pPr marL="2743200" indent="0">
               <a:buNone/>
-              <a:defRPr sz="900"/>
+              <a:defRPr sz="720"/>
             </a:lvl7pPr>
             <a:lvl8pPr marL="3200400" indent="0">
               <a:buNone/>
-              <a:defRPr sz="900"/>
+              <a:defRPr sz="720"/>
             </a:lvl8pPr>
             <a:lvl9pPr marL="3657600" indent="0">
               <a:buNone/>
-              <a:defRPr sz="900"/>
+              <a:defRPr sz="720"/>
             </a:lvl9pPr>
           </a:lstStyle>
           <a:p>
@@ -2963,30 +2926,6 @@
               <a:rPr lang="en-US"/>
               <a:t>EE 329 </a:t>
             </a:r>
-          </a:p>
-        </p:txBody>
-      </p:sp>
-      <p:sp>
-        <p:nvSpPr>
-          <p:cNvPr id="7" name="Slide Number Placeholder 6"/>
-          <p:cNvSpPr>
-            <a:spLocks noGrp="1"/>
-          </p:cNvSpPr>
-          <p:nvPr>
-            <p:ph type="sldNum" sz="quarter" idx="12"/>
-          </p:nvPr>
-        </p:nvSpPr>
-        <p:spPr/>
-        <p:txBody>
-          <a:bodyPr/>
-          <a:lstStyle/>
-          <a:p>
-            <a:fld id="{B6F15528-21DE-4FAA-801E-634DDDAF4B2B}" type="slidenum">
-              <a:rPr lang="en-US" smtClean="0"/>
-              <a:pPr/>
-              <a:t>‹#›</a:t>
-            </a:fld>
-            <a:endParaRPr lang="en-US"/>
           </a:p>
         </p:txBody>
       </p:sp>
@@ -3027,7 +2966,7 @@
         </p:nvSpPr>
         <p:spPr>
           <a:xfrm>
-            <a:off x="1792288" y="4800600"/>
+            <a:off x="1792288" y="5143500"/>
             <a:ext cx="5486400" cy="566738"/>
           </a:xfrm>
         </p:spPr>
@@ -3035,7 +2974,7 @@
           <a:bodyPr anchor="b"/>
           <a:lstStyle>
             <a:lvl1pPr algn="l">
-              <a:defRPr sz="2000" b="1"/>
+              <a:defRPr sz="1600" b="1"/>
             </a:lvl1pPr>
           </a:lstStyle>
           <a:p>
@@ -3058,7 +2997,7 @@
         </p:nvSpPr>
         <p:spPr>
           <a:xfrm>
-            <a:off x="1792288" y="612775"/>
+            <a:off x="1792288" y="955675"/>
             <a:ext cx="5486400" cy="4114800"/>
           </a:xfrm>
         </p:spPr>
@@ -3067,39 +3006,39 @@
           <a:lstStyle>
             <a:lvl1pPr marL="0" indent="0">
               <a:buNone/>
-              <a:defRPr sz="3200"/>
+              <a:defRPr sz="2560"/>
             </a:lvl1pPr>
             <a:lvl2pPr marL="457200" indent="0">
               <a:buNone/>
-              <a:defRPr sz="2800"/>
+              <a:defRPr sz="2240"/>
             </a:lvl2pPr>
             <a:lvl3pPr marL="914400" indent="0">
               <a:buNone/>
-              <a:defRPr sz="2400"/>
+              <a:defRPr sz="1920"/>
             </a:lvl3pPr>
             <a:lvl4pPr marL="1371600" indent="0">
               <a:buNone/>
-              <a:defRPr sz="2000"/>
+              <a:defRPr sz="1600"/>
             </a:lvl4pPr>
             <a:lvl5pPr marL="1828800" indent="0">
               <a:buNone/>
-              <a:defRPr sz="2000"/>
+              <a:defRPr sz="1600"/>
             </a:lvl5pPr>
             <a:lvl6pPr marL="2286000" indent="0">
               <a:buNone/>
-              <a:defRPr sz="2000"/>
+              <a:defRPr sz="1600"/>
             </a:lvl6pPr>
             <a:lvl7pPr marL="2743200" indent="0">
               <a:buNone/>
-              <a:defRPr sz="2000"/>
+              <a:defRPr sz="1600"/>
             </a:lvl7pPr>
             <a:lvl8pPr marL="3200400" indent="0">
               <a:buNone/>
-              <a:defRPr sz="2000"/>
+              <a:defRPr sz="1600"/>
             </a:lvl8pPr>
             <a:lvl9pPr marL="3657600" indent="0">
               <a:buNone/>
-              <a:defRPr sz="2000"/>
+              <a:defRPr sz="1600"/>
             </a:lvl9pPr>
           </a:lstStyle>
           <a:p>
@@ -3119,7 +3058,7 @@
         </p:nvSpPr>
         <p:spPr>
           <a:xfrm>
-            <a:off x="1792288" y="5367338"/>
+            <a:off x="1792288" y="5710238"/>
             <a:ext cx="5486400" cy="804862"/>
           </a:xfrm>
         </p:spPr>
@@ -3128,39 +3067,39 @@
           <a:lstStyle>
             <a:lvl1pPr marL="0" indent="0">
               <a:buNone/>
-              <a:defRPr sz="1400"/>
+              <a:defRPr sz="1120"/>
             </a:lvl1pPr>
             <a:lvl2pPr marL="457200" indent="0">
               <a:buNone/>
-              <a:defRPr sz="1200"/>
+              <a:defRPr sz="960"/>
             </a:lvl2pPr>
             <a:lvl3pPr marL="914400" indent="0">
               <a:buNone/>
-              <a:defRPr sz="1000"/>
+              <a:defRPr sz="800"/>
             </a:lvl3pPr>
             <a:lvl4pPr marL="1371600" indent="0">
               <a:buNone/>
-              <a:defRPr sz="900"/>
+              <a:defRPr sz="720"/>
             </a:lvl4pPr>
             <a:lvl5pPr marL="1828800" indent="0">
               <a:buNone/>
-              <a:defRPr sz="900"/>
+              <a:defRPr sz="720"/>
             </a:lvl5pPr>
             <a:lvl6pPr marL="2286000" indent="0">
               <a:buNone/>
-              <a:defRPr sz="900"/>
+              <a:defRPr sz="720"/>
             </a:lvl6pPr>
             <a:lvl7pPr marL="2743200" indent="0">
               <a:buNone/>
-              <a:defRPr sz="900"/>
+              <a:defRPr sz="720"/>
             </a:lvl7pPr>
             <a:lvl8pPr marL="3200400" indent="0">
               <a:buNone/>
-              <a:defRPr sz="900"/>
+              <a:defRPr sz="720"/>
             </a:lvl8pPr>
             <a:lvl9pPr marL="3657600" indent="0">
               <a:buNone/>
-              <a:defRPr sz="900"/>
+              <a:defRPr sz="720"/>
             </a:lvl9pPr>
           </a:lstStyle>
           <a:p>
@@ -3213,30 +3152,6 @@
               <a:rPr lang="en-US"/>
               <a:t>EE 329 </a:t>
             </a:r>
-          </a:p>
-        </p:txBody>
-      </p:sp>
-      <p:sp>
-        <p:nvSpPr>
-          <p:cNvPr id="7" name="Slide Number Placeholder 6"/>
-          <p:cNvSpPr>
-            <a:spLocks noGrp="1"/>
-          </p:cNvSpPr>
-          <p:nvPr>
-            <p:ph type="sldNum" sz="quarter" idx="12"/>
-          </p:nvPr>
-        </p:nvSpPr>
-        <p:spPr/>
-        <p:txBody>
-          <a:bodyPr/>
-          <a:lstStyle/>
-          <a:p>
-            <a:fld id="{B6F15528-21DE-4FAA-801E-634DDDAF4B2B}" type="slidenum">
-              <a:rPr lang="en-US" smtClean="0"/>
-              <a:pPr/>
-              <a:t>‹#›</a:t>
-            </a:fld>
-            <a:endParaRPr lang="en-US"/>
           </a:p>
         </p:txBody>
       </p:sp>
@@ -3282,7 +3197,7 @@
         </p:nvSpPr>
         <p:spPr>
           <a:xfrm>
-            <a:off x="457200" y="274638"/>
+            <a:off x="457200" y="617538"/>
             <a:ext cx="8229600" cy="1143000"/>
           </a:xfrm>
           <a:prstGeom prst="rect">
@@ -3314,7 +3229,7 @@
         </p:nvSpPr>
         <p:spPr>
           <a:xfrm>
-            <a:off x="457200" y="1600200"/>
+            <a:off x="457200" y="1943100"/>
             <a:ext cx="8229600" cy="4525963"/>
           </a:xfrm>
           <a:prstGeom prst="rect">
@@ -3375,7 +3290,7 @@
         </p:nvSpPr>
         <p:spPr>
           <a:xfrm>
-            <a:off x="457200" y="6356350"/>
+            <a:off x="457200" y="6699250"/>
             <a:ext cx="2133600" cy="365125"/>
           </a:xfrm>
           <a:prstGeom prst="rect">
@@ -3386,7 +3301,7 @@
           <a:bodyPr vert="horz" lIns="91440" tIns="45720" rIns="91440" bIns="45720" rtlCol="0" anchor="ctr"/>
           <a:lstStyle>
             <a:lvl1pPr algn="l">
-              <a:defRPr sz="1200">
+              <a:defRPr sz="960">
                 <a:solidFill>
                   <a:schemeClr val="tx1">
                     <a:tint val="75000"/>
@@ -3415,7 +3330,7 @@
         </p:nvSpPr>
         <p:spPr>
           <a:xfrm>
-            <a:off x="3124200" y="6356350"/>
+            <a:off x="3124200" y="6699250"/>
             <a:ext cx="2895600" cy="365125"/>
           </a:xfrm>
           <a:prstGeom prst="rect">
@@ -3426,7 +3341,7 @@
           <a:bodyPr vert="horz" lIns="91440" tIns="45720" rIns="91440" bIns="45720" rtlCol="0" anchor="ctr"/>
           <a:lstStyle>
             <a:lvl1pPr algn="ctr">
-              <a:defRPr sz="1200">
+              <a:defRPr sz="960">
                 <a:solidFill>
                   <a:schemeClr val="tx1">
                     <a:tint val="75000"/>
@@ -3440,48 +3355,6 @@
               <a:rPr lang="en-US"/>
               <a:t>EE 329 </a:t>
             </a:r>
-          </a:p>
-        </p:txBody>
-      </p:sp>
-      <p:sp>
-        <p:nvSpPr>
-          <p:cNvPr id="6" name="Slide Number Placeholder 5"/>
-          <p:cNvSpPr>
-            <a:spLocks noGrp="1"/>
-          </p:cNvSpPr>
-          <p:nvPr>
-            <p:ph type="sldNum" sz="quarter" idx="4"/>
-          </p:nvPr>
-        </p:nvSpPr>
-        <p:spPr>
-          <a:xfrm>
-            <a:off x="6553200" y="6356350"/>
-            <a:ext cx="2133600" cy="365125"/>
-          </a:xfrm>
-          <a:prstGeom prst="rect">
-            <a:avLst/>
-          </a:prstGeom>
-        </p:spPr>
-        <p:txBody>
-          <a:bodyPr vert="horz" lIns="91440" tIns="45720" rIns="91440" bIns="45720" rtlCol="0" anchor="ctr"/>
-          <a:lstStyle>
-            <a:lvl1pPr algn="r">
-              <a:defRPr sz="1200">
-                <a:solidFill>
-                  <a:schemeClr val="tx1">
-                    <a:tint val="75000"/>
-                  </a:schemeClr>
-                </a:solidFill>
-              </a:defRPr>
-            </a:lvl1pPr>
-          </a:lstStyle>
-          <a:p>
-            <a:fld id="{B6F15528-21DE-4FAA-801E-634DDDAF4B2B}" type="slidenum">
-              <a:rPr lang="en-US" smtClean="0"/>
-              <a:pPr/>
-              <a:t>‹#›</a:t>
-            </a:fld>
-            <a:endParaRPr lang="en-US"/>
           </a:p>
         </p:txBody>
       </p:sp>
@@ -3509,11 +3382,11 @@
           <a:spcPct val="0"/>
         </a:spcBef>
         <a:buNone/>
-        <a:defRPr sz="4400" kern="1200">
+        <a:defRPr sz="3520" kern="1200">
           <a:solidFill>
             <a:schemeClr val="tx1"/>
           </a:solidFill>
-          <a:latin typeface="+mj-lt"/>
+          <a:latin typeface="Arial"/>
           <a:ea typeface="+mj-ea"/>
           <a:cs typeface="+mj-cs"/>
         </a:defRPr>
@@ -3526,11 +3399,11 @@
         </a:spcBef>
         <a:buFont typeface="Arial" pitchFamily="34" charset="0"/>
         <a:buChar char="•"/>
-        <a:defRPr sz="3200" kern="1200">
+        <a:defRPr sz="2560" kern="1200">
           <a:solidFill>
             <a:schemeClr val="tx1"/>
           </a:solidFill>
-          <a:latin typeface="+mn-lt"/>
+          <a:latin typeface="Arial"/>
           <a:ea typeface="+mn-ea"/>
           <a:cs typeface="+mn-cs"/>
         </a:defRPr>
@@ -3541,11 +3414,11 @@
         </a:spcBef>
         <a:buFont typeface="Arial" pitchFamily="34" charset="0"/>
         <a:buChar char="–"/>
-        <a:defRPr sz="2800" kern="1200">
+        <a:defRPr sz="2240" kern="1200">
           <a:solidFill>
             <a:schemeClr val="tx1"/>
           </a:solidFill>
-          <a:latin typeface="+mn-lt"/>
+          <a:latin typeface="Arial"/>
           <a:ea typeface="+mn-ea"/>
           <a:cs typeface="+mn-cs"/>
         </a:defRPr>
@@ -3556,11 +3429,11 @@
         </a:spcBef>
         <a:buFont typeface="Arial" pitchFamily="34" charset="0"/>
         <a:buChar char="•"/>
-        <a:defRPr sz="2400" kern="1200">
+        <a:defRPr sz="1920" kern="1200">
           <a:solidFill>
             <a:schemeClr val="tx1"/>
           </a:solidFill>
-          <a:latin typeface="+mn-lt"/>
+          <a:latin typeface="Arial"/>
           <a:ea typeface="+mn-ea"/>
           <a:cs typeface="+mn-cs"/>
         </a:defRPr>
@@ -3571,11 +3444,11 @@
         </a:spcBef>
         <a:buFont typeface="Arial" pitchFamily="34" charset="0"/>
         <a:buChar char="–"/>
-        <a:defRPr sz="2000" kern="1200">
+        <a:defRPr sz="1600" kern="1200">
           <a:solidFill>
             <a:schemeClr val="tx1"/>
           </a:solidFill>
-          <a:latin typeface="+mn-lt"/>
+          <a:latin typeface="Arial"/>
           <a:ea typeface="+mn-ea"/>
           <a:cs typeface="+mn-cs"/>
         </a:defRPr>
@@ -3586,11 +3459,11 @@
         </a:spcBef>
         <a:buFont typeface="Arial" pitchFamily="34" charset="0"/>
         <a:buChar char="»"/>
-        <a:defRPr sz="2000" kern="1200">
+        <a:defRPr sz="1600" kern="1200">
           <a:solidFill>
             <a:schemeClr val="tx1"/>
           </a:solidFill>
-          <a:latin typeface="+mn-lt"/>
+          <a:latin typeface="Arial"/>
           <a:ea typeface="+mn-ea"/>
           <a:cs typeface="+mn-cs"/>
         </a:defRPr>
@@ -3601,11 +3474,11 @@
         </a:spcBef>
         <a:buFont typeface="Arial" pitchFamily="34" charset="0"/>
         <a:buChar char="•"/>
-        <a:defRPr sz="2000" kern="1200">
+        <a:defRPr sz="1600" kern="1200">
           <a:solidFill>
             <a:schemeClr val="tx1"/>
           </a:solidFill>
-          <a:latin typeface="+mn-lt"/>
+          <a:latin typeface="Arial"/>
           <a:ea typeface="+mn-ea"/>
           <a:cs typeface="+mn-cs"/>
         </a:defRPr>
@@ -3616,11 +3489,11 @@
         </a:spcBef>
         <a:buFont typeface="Arial" pitchFamily="34" charset="0"/>
         <a:buChar char="•"/>
-        <a:defRPr sz="2000" kern="1200">
+        <a:defRPr sz="1600" kern="1200">
           <a:solidFill>
             <a:schemeClr val="tx1"/>
           </a:solidFill>
-          <a:latin typeface="+mn-lt"/>
+          <a:latin typeface="Arial"/>
           <a:ea typeface="+mn-ea"/>
           <a:cs typeface="+mn-cs"/>
         </a:defRPr>
@@ -3631,11 +3504,11 @@
         </a:spcBef>
         <a:buFont typeface="Arial" pitchFamily="34" charset="0"/>
         <a:buChar char="•"/>
-        <a:defRPr sz="2000" kern="1200">
+        <a:defRPr sz="1600" kern="1200">
           <a:solidFill>
             <a:schemeClr val="tx1"/>
           </a:solidFill>
-          <a:latin typeface="+mn-lt"/>
+          <a:latin typeface="Arial"/>
           <a:ea typeface="+mn-ea"/>
           <a:cs typeface="+mn-cs"/>
         </a:defRPr>
@@ -3646,11 +3519,11 @@
         </a:spcBef>
         <a:buFont typeface="Arial" pitchFamily="34" charset="0"/>
         <a:buChar char="•"/>
-        <a:defRPr sz="2000" kern="1200">
+        <a:defRPr sz="1600" kern="1200">
           <a:solidFill>
             <a:schemeClr val="tx1"/>
           </a:solidFill>
-          <a:latin typeface="+mn-lt"/>
+          <a:latin typeface="Arial"/>
           <a:ea typeface="+mn-ea"/>
           <a:cs typeface="+mn-cs"/>
         </a:defRPr>
@@ -3661,91 +3534,91 @@
         <a:defRPr lang="en-US"/>
       </a:defPPr>
       <a:lvl1pPr marL="0" algn="l" defTabSz="914400" rtl="0" eaLnBrk="1" latinLnBrk="0" hangingPunct="1">
-        <a:defRPr sz="1800" kern="1200">
+        <a:defRPr sz="1440" kern="1200">
           <a:solidFill>
             <a:schemeClr val="tx1"/>
           </a:solidFill>
-          <a:latin typeface="+mn-lt"/>
+          <a:latin typeface="Arial"/>
           <a:ea typeface="+mn-ea"/>
           <a:cs typeface="+mn-cs"/>
         </a:defRPr>
       </a:lvl1pPr>
       <a:lvl2pPr marL="457200" algn="l" defTabSz="914400" rtl="0" eaLnBrk="1" latinLnBrk="0" hangingPunct="1">
-        <a:defRPr sz="1800" kern="1200">
+        <a:defRPr sz="1440" kern="1200">
           <a:solidFill>
             <a:schemeClr val="tx1"/>
           </a:solidFill>
-          <a:latin typeface="+mn-lt"/>
+          <a:latin typeface="Arial"/>
           <a:ea typeface="+mn-ea"/>
           <a:cs typeface="+mn-cs"/>
         </a:defRPr>
       </a:lvl2pPr>
       <a:lvl3pPr marL="914400" algn="l" defTabSz="914400" rtl="0" eaLnBrk="1" latinLnBrk="0" hangingPunct="1">
-        <a:defRPr sz="1800" kern="1200">
+        <a:defRPr sz="1440" kern="1200">
           <a:solidFill>
             <a:schemeClr val="tx1"/>
           </a:solidFill>
-          <a:latin typeface="+mn-lt"/>
+          <a:latin typeface="Arial"/>
           <a:ea typeface="+mn-ea"/>
           <a:cs typeface="+mn-cs"/>
         </a:defRPr>
       </a:lvl3pPr>
       <a:lvl4pPr marL="1371600" algn="l" defTabSz="914400" rtl="0" eaLnBrk="1" latinLnBrk="0" hangingPunct="1">
-        <a:defRPr sz="1800" kern="1200">
+        <a:defRPr sz="1440" kern="1200">
           <a:solidFill>
             <a:schemeClr val="tx1"/>
           </a:solidFill>
-          <a:latin typeface="+mn-lt"/>
+          <a:latin typeface="Arial"/>
           <a:ea typeface="+mn-ea"/>
           <a:cs typeface="+mn-cs"/>
         </a:defRPr>
       </a:lvl4pPr>
       <a:lvl5pPr marL="1828800" algn="l" defTabSz="914400" rtl="0" eaLnBrk="1" latinLnBrk="0" hangingPunct="1">
-        <a:defRPr sz="1800" kern="1200">
+        <a:defRPr sz="1440" kern="1200">
           <a:solidFill>
             <a:schemeClr val="tx1"/>
           </a:solidFill>
-          <a:latin typeface="+mn-lt"/>
+          <a:latin typeface="Arial"/>
           <a:ea typeface="+mn-ea"/>
           <a:cs typeface="+mn-cs"/>
         </a:defRPr>
       </a:lvl5pPr>
       <a:lvl6pPr marL="2286000" algn="l" defTabSz="914400" rtl="0" eaLnBrk="1" latinLnBrk="0" hangingPunct="1">
-        <a:defRPr sz="1800" kern="1200">
+        <a:defRPr sz="1440" kern="1200">
           <a:solidFill>
             <a:schemeClr val="tx1"/>
           </a:solidFill>
-          <a:latin typeface="+mn-lt"/>
+          <a:latin typeface="Arial"/>
           <a:ea typeface="+mn-ea"/>
           <a:cs typeface="+mn-cs"/>
         </a:defRPr>
       </a:lvl6pPr>
       <a:lvl7pPr marL="2743200" algn="l" defTabSz="914400" rtl="0" eaLnBrk="1" latinLnBrk="0" hangingPunct="1">
-        <a:defRPr sz="1800" kern="1200">
+        <a:defRPr sz="1440" kern="1200">
           <a:solidFill>
             <a:schemeClr val="tx1"/>
           </a:solidFill>
-          <a:latin typeface="+mn-lt"/>
+          <a:latin typeface="Arial"/>
           <a:ea typeface="+mn-ea"/>
           <a:cs typeface="+mn-cs"/>
         </a:defRPr>
       </a:lvl7pPr>
       <a:lvl8pPr marL="3200400" algn="l" defTabSz="914400" rtl="0" eaLnBrk="1" latinLnBrk="0" hangingPunct="1">
-        <a:defRPr sz="1800" kern="1200">
+        <a:defRPr sz="1440" kern="1200">
           <a:solidFill>
             <a:schemeClr val="tx1"/>
           </a:solidFill>
-          <a:latin typeface="+mn-lt"/>
+          <a:latin typeface="Arial"/>
           <a:ea typeface="+mn-ea"/>
           <a:cs typeface="+mn-cs"/>
         </a:defRPr>
       </a:lvl8pPr>
       <a:lvl9pPr marL="3657600" algn="l" defTabSz="914400" rtl="0" eaLnBrk="1" latinLnBrk="0" hangingPunct="1">
-        <a:defRPr sz="1800" kern="1200">
+        <a:defRPr sz="1440" kern="1200">
           <a:solidFill>
             <a:schemeClr val="tx1"/>
           </a:solidFill>
-          <a:latin typeface="+mn-lt"/>
+          <a:latin typeface="Arial"/>
           <a:ea typeface="+mn-ea"/>
           <a:cs typeface="+mn-cs"/>
         </a:defRPr>
@@ -3805,7 +3678,7 @@
         </p:nvSpPr>
         <p:spPr bwMode="ltGray">
           <a:xfrm>
-            <a:off x="241173" y="320040"/>
+            <a:off x="241173" y="662940"/>
             <a:ext cx="8661654" cy="6217920"/>
           </a:xfrm>
           <a:prstGeom prst="rect">
@@ -3863,7 +3736,7 @@
         </p:nvSpPr>
         <p:spPr>
           <a:xfrm>
-            <a:off x="628650" y="963877"/>
+            <a:off x="628650" y="1306777"/>
             <a:ext cx="2620771" cy="4930246"/>
           </a:xfrm>
         </p:spPr>
@@ -3883,7 +3756,7 @@
                 <a:solidFill>
                   <a:srgbClr val="0070C0"/>
                 </a:solidFill>
-                <a:latin typeface="+mj-lt"/>
+                <a:latin typeface="Arial"/>
                 <a:ea typeface="+mj-ea"/>
                 <a:cs typeface="+mj-cs"/>
               </a:rPr>
@@ -3917,7 +3790,7 @@
         </p:nvCxnSpPr>
         <p:spPr>
           <a:xfrm>
-            <a:off x="3490722" y="2057400"/>
+            <a:off x="3490722" y="2400300"/>
             <a:ext cx="0" cy="2743200"/>
           </a:xfrm>
           <a:prstGeom prst="line">
@@ -3985,25 +3858,25 @@
                 <a14:m>
                   <m:oMath xmlns:m="http://schemas.openxmlformats.org/officeDocument/2006/math">
                     <m:r>
-                      <a:rPr lang="en-US" sz="2100" b="0" i="1">
+                      <a:rPr lang="en-US" sz="1680" b="0" i="1">
                         <a:latin typeface="Cambria Math" panose="02040503050406030204" pitchFamily="18" charset="0"/>
                       </a:rPr>
                       <m:t>𝑥</m:t>
                     </m:r>
                     <m:r>
-                      <a:rPr lang="en-US" sz="2100" b="0" i="1">
+                      <a:rPr lang="en-US" sz="1680" b="0" i="1">
                         <a:latin typeface="Cambria Math" panose="02040503050406030204" pitchFamily="18" charset="0"/>
                       </a:rPr>
                       <m:t>(</m:t>
                     </m:r>
                     <m:r>
-                      <a:rPr lang="en-US" sz="2100" b="0" i="1">
+                      <a:rPr lang="en-US" sz="1680" b="0" i="1">
                         <a:latin typeface="Cambria Math" panose="02040503050406030204" pitchFamily="18" charset="0"/>
                       </a:rPr>
                       <m:t>𝑡</m:t>
                     </m:r>
                     <m:r>
-                      <a:rPr lang="en-US" sz="2100" b="0" i="1">
+                      <a:rPr lang="en-US" sz="1680" b="0" i="1">
                         <a:latin typeface="Cambria Math" panose="02040503050406030204" pitchFamily="18" charset="0"/>
                       </a:rPr>
                       <m:t>)</m:t>
@@ -4011,7 +3884,7 @@
                   </m:oMath>
                 </a14:m>
                 <a:r>
-                  <a:rPr lang="en-US" sz="2100" dirty="0"/>
+                  <a:rPr lang="en-US" sz="1680" dirty="0"/>
                   <a:t> is a low pass signal (a smooth function)</a:t>
                 </a:r>
               </a:p>
@@ -4024,7 +3897,7 @@
                 <a14:m>
                   <m:oMath xmlns:m="http://schemas.openxmlformats.org/officeDocument/2006/math">
                     <m:r>
-                      <a:rPr lang="en-US" sz="2100" b="0" i="1">
+                      <a:rPr lang="en-US" sz="1680" b="0" i="1">
                         <a:latin typeface="Cambria Math" panose="02040503050406030204" pitchFamily="18" charset="0"/>
                       </a:rPr>
                       <m:t>𝑊</m:t>
@@ -4032,31 +3905,31 @@
                   </m:oMath>
                 </a14:m>
                 <a:r>
-                  <a:rPr lang="en-US" sz="2100" dirty="0"/>
+                  <a:rPr lang="en-US" sz="1680" dirty="0"/>
                   <a:t> is its bandwidth (all frequencies describing </a:t>
                 </a:r>
                 <a14:m>
                   <m:oMath xmlns:m="http://schemas.openxmlformats.org/officeDocument/2006/math">
                     <m:r>
-                      <a:rPr lang="en-US" sz="2100" i="1">
+                      <a:rPr lang="en-US" sz="1680" i="1">
                         <a:latin typeface="Cambria Math" panose="02040503050406030204" pitchFamily="18" charset="0"/>
                       </a:rPr>
                       <m:t>𝑥</m:t>
                     </m:r>
                     <m:r>
-                      <a:rPr lang="en-US" sz="2100" i="1">
+                      <a:rPr lang="en-US" sz="1680" i="1">
                         <a:latin typeface="Cambria Math" panose="02040503050406030204" pitchFamily="18" charset="0"/>
                       </a:rPr>
                       <m:t>(</m:t>
                     </m:r>
                     <m:r>
-                      <a:rPr lang="en-US" sz="2100" i="1">
+                      <a:rPr lang="en-US" sz="1680" i="1">
                         <a:latin typeface="Cambria Math" panose="02040503050406030204" pitchFamily="18" charset="0"/>
                       </a:rPr>
                       <m:t>𝑡</m:t>
                     </m:r>
                     <m:r>
-                      <a:rPr lang="en-US" sz="2100" i="1">
+                      <a:rPr lang="en-US" sz="1680" i="1">
                         <a:latin typeface="Cambria Math" panose="02040503050406030204" pitchFamily="18" charset="0"/>
                       </a:rPr>
                       <m:t>)</m:t>
@@ -4064,7 +3937,7 @@
                   </m:oMath>
                 </a14:m>
                 <a:r>
-                  <a:rPr lang="en-US" sz="2100" dirty="0"/>
+                  <a:rPr lang="en-US" sz="1680" dirty="0"/>
                   <a:t>)</a:t>
                 </a:r>
               </a:p>
@@ -4075,31 +3948,31 @@
                   </a:lnSpc>
                 </a:pPr>
                 <a:r>
-                  <a:rPr lang="en-US" sz="2100" dirty="0"/>
+                  <a:rPr lang="en-US" sz="1680" dirty="0"/>
                   <a:t>Ideal sampling is performed by multiplying </a:t>
                 </a:r>
                 <a14:m>
                   <m:oMath xmlns:m="http://schemas.openxmlformats.org/officeDocument/2006/math">
                     <m:r>
-                      <a:rPr lang="en-US" sz="2100" i="1">
+                      <a:rPr lang="en-US" sz="1680" i="1">
                         <a:latin typeface="Cambria Math" panose="02040503050406030204" pitchFamily="18" charset="0"/>
                       </a:rPr>
                       <m:t>𝑥</m:t>
                     </m:r>
                     <m:r>
-                      <a:rPr lang="en-US" sz="2100" i="1">
+                      <a:rPr lang="en-US" sz="1680" i="1">
                         <a:latin typeface="Cambria Math" panose="02040503050406030204" pitchFamily="18" charset="0"/>
                       </a:rPr>
                       <m:t>(</m:t>
                     </m:r>
                     <m:r>
-                      <a:rPr lang="en-US" sz="2100" i="1">
+                      <a:rPr lang="en-US" sz="1680" i="1">
                         <a:latin typeface="Cambria Math" panose="02040503050406030204" pitchFamily="18" charset="0"/>
                       </a:rPr>
                       <m:t>𝑡</m:t>
                     </m:r>
                     <m:r>
-                      <a:rPr lang="en-US" sz="2100" i="1">
+                      <a:rPr lang="en-US" sz="1680" i="1">
                         <a:latin typeface="Cambria Math" panose="02040503050406030204" pitchFamily="18" charset="0"/>
                       </a:rPr>
                       <m:t>)</m:t>
@@ -4107,7 +3980,7 @@
                   </m:oMath>
                 </a14:m>
                 <a:r>
-                  <a:rPr lang="en-US" sz="2100" dirty="0"/>
+                  <a:rPr lang="en-US" sz="1680" dirty="0"/>
                   <a:t> with a Dirac delta train</a:t>
                 </a:r>
               </a:p>
@@ -4127,14 +4000,14 @@
                       <m:sSub>
                         <m:sSubPr>
                           <m:ctrlPr>
-                            <a:rPr lang="en-US" sz="2100" i="1">
+                            <a:rPr lang="en-US" sz="1680" i="1">
                               <a:latin typeface="Cambria Math" panose="02040503050406030204" pitchFamily="18" charset="0"/>
                             </a:rPr>
                           </m:ctrlPr>
                         </m:sSubPr>
                         <m:e>
                           <m:r>
-                            <a:rPr lang="en-US" sz="2100" b="0" i="1">
+                            <a:rPr lang="en-US" sz="1680" b="0" i="1">
                               <a:latin typeface="Cambria Math" panose="02040503050406030204" pitchFamily="18" charset="0"/>
                             </a:rPr>
                             <m:t>𝑥</m:t>
@@ -4142,7 +4015,7 @@
                         </m:e>
                         <m:sub>
                           <m:r>
-                            <a:rPr lang="en-US" sz="2100" b="0" i="1">
+                            <a:rPr lang="en-US" sz="1680" b="0" i="1">
                               <a:latin typeface="Cambria Math" panose="02040503050406030204" pitchFamily="18" charset="0"/>
                             </a:rPr>
                             <m:t>𝑠</m:t>
@@ -4152,14 +4025,14 @@
                       <m:d>
                         <m:dPr>
                           <m:ctrlPr>
-                            <a:rPr lang="en-US" sz="2100" b="0" i="1">
+                            <a:rPr lang="en-US" sz="1680" b="0" i="1">
                               <a:latin typeface="Cambria Math" panose="02040503050406030204" pitchFamily="18" charset="0"/>
                             </a:rPr>
                           </m:ctrlPr>
                         </m:dPr>
                         <m:e>
                           <m:r>
-                            <a:rPr lang="en-US" sz="2100" b="0" i="1">
+                            <a:rPr lang="en-US" sz="1680" b="0" i="1">
                               <a:latin typeface="Cambria Math" panose="02040503050406030204" pitchFamily="18" charset="0"/>
                             </a:rPr>
                             <m:t>𝑡</m:t>
@@ -4167,31 +4040,31 @@
                         </m:e>
                       </m:d>
                       <m:r>
-                        <a:rPr lang="en-US" sz="2100" b="0" i="1">
+                        <a:rPr lang="en-US" sz="1680" b="0" i="1">
                           <a:latin typeface="Cambria Math" panose="02040503050406030204" pitchFamily="18" charset="0"/>
                         </a:rPr>
                         <m:t>=</m:t>
                       </m:r>
                       <m:r>
-                        <a:rPr lang="en-US" sz="2100" b="0" i="1">
+                        <a:rPr lang="en-US" sz="1680" b="0" i="1">
                           <a:latin typeface="Cambria Math" panose="02040503050406030204" pitchFamily="18" charset="0"/>
                         </a:rPr>
                         <m:t>𝑥</m:t>
                       </m:r>
                       <m:r>
-                        <a:rPr lang="en-US" sz="2100" b="0" i="1">
+                        <a:rPr lang="en-US" sz="1680" b="0" i="1">
                           <a:latin typeface="Cambria Math" panose="02040503050406030204" pitchFamily="18" charset="0"/>
                         </a:rPr>
                         <m:t>(</m:t>
                       </m:r>
                       <m:r>
-                        <a:rPr lang="en-US" sz="2100" b="0" i="1">
+                        <a:rPr lang="en-US" sz="1680" b="0" i="1">
                           <a:latin typeface="Cambria Math" panose="02040503050406030204" pitchFamily="18" charset="0"/>
                         </a:rPr>
                         <m:t>𝑡</m:t>
                       </m:r>
                       <m:r>
-                        <a:rPr lang="en-US" sz="2100" b="0" i="1">
+                        <a:rPr lang="en-US" sz="1680" b="0" i="1">
                           <a:latin typeface="Cambria Math" panose="02040503050406030204" pitchFamily="18" charset="0"/>
                         </a:rPr>
                         <m:t>)×</m:t>
@@ -4200,7 +4073,7 @@
                         <m:naryPr>
                           <m:chr m:val="∑"/>
                           <m:ctrlPr>
-                            <a:rPr lang="en-US" sz="2100" b="0" i="1">
+                            <a:rPr lang="en-US" sz="1680" b="0" i="1">
                               <a:latin typeface="Cambria Math" panose="02040503050406030204" pitchFamily="18" charset="0"/>
                             </a:rPr>
                           </m:ctrlPr>
@@ -4210,13 +4083,13 @@
                             <m:rPr>
                               <m:brk m:alnAt="23"/>
                             </m:rPr>
-                            <a:rPr lang="en-US" sz="2100" b="0" i="1">
+                            <a:rPr lang="en-US" sz="1680" b="0" i="1">
                               <a:latin typeface="Cambria Math" panose="02040503050406030204" pitchFamily="18" charset="0"/>
                             </a:rPr>
                             <m:t>𝑘</m:t>
                           </m:r>
                           <m:r>
-                            <a:rPr lang="en-US" sz="2100" b="0" i="1">
+                            <a:rPr lang="en-US" sz="1680" b="0" i="1">
                               <a:latin typeface="Cambria Math" panose="02040503050406030204" pitchFamily="18" charset="0"/>
                             </a:rPr>
                             <m:t>=−∞</m:t>
@@ -4224,7 +4097,7 @@
                         </m:sub>
                         <m:sup>
                           <m:r>
-                            <a:rPr lang="en-US" sz="2100" b="0" i="1">
+                            <a:rPr lang="en-US" sz="1680" b="0" i="1">
                               <a:latin typeface="Cambria Math" panose="02040503050406030204" pitchFamily="18" charset="0"/>
                             </a:rPr>
                             <m:t>+∞</m:t>
@@ -4232,7 +4105,7 @@
                         </m:sup>
                         <m:e>
                           <m:r>
-                            <a:rPr lang="en-US" sz="2100" b="0" i="1">
+                            <a:rPr lang="en-US" sz="1680" b="0" i="1">
                               <a:latin typeface="Cambria Math" panose="02040503050406030204" pitchFamily="18" charset="0"/>
                             </a:rPr>
                             <m:t>𝛿</m:t>
@@ -4240,26 +4113,26 @@
                           <m:d>
                             <m:dPr>
                               <m:ctrlPr>
-                                <a:rPr lang="en-US" sz="2100" b="0" i="1">
+                                <a:rPr lang="en-US" sz="1680" b="0" i="1">
                                   <a:latin typeface="Cambria Math" panose="02040503050406030204" pitchFamily="18" charset="0"/>
                                 </a:rPr>
                               </m:ctrlPr>
                             </m:dPr>
                             <m:e>
                               <m:r>
-                                <a:rPr lang="en-US" sz="2100" b="0" i="1">
+                                <a:rPr lang="en-US" sz="1680" b="0" i="1">
                                   <a:latin typeface="Cambria Math" panose="02040503050406030204" pitchFamily="18" charset="0"/>
                                 </a:rPr>
                                 <m:t>𝑡</m:t>
                               </m:r>
                               <m:r>
-                                <a:rPr lang="en-US" sz="2100" b="0" i="1">
+                                <a:rPr lang="en-US" sz="1680" b="0" i="1">
                                   <a:latin typeface="Cambria Math" panose="02040503050406030204" pitchFamily="18" charset="0"/>
                                 </a:rPr>
                                 <m:t>−</m:t>
                               </m:r>
                               <m:r>
-                                <a:rPr lang="en-US" sz="2100" b="0" i="1">
+                                <a:rPr lang="en-US" sz="1680" b="0" i="1">
                                   <a:latin typeface="Cambria Math" panose="02040503050406030204" pitchFamily="18" charset="0"/>
                                 </a:rPr>
                                 <m:t>𝑘</m:t>
@@ -4267,14 +4140,14 @@
                               <m:sSub>
                                 <m:sSubPr>
                                   <m:ctrlPr>
-                                    <a:rPr lang="en-US" sz="2100" b="0" i="1">
+                                    <a:rPr lang="en-US" sz="1680" b="0" i="1">
                                       <a:latin typeface="Cambria Math" panose="02040503050406030204" pitchFamily="18" charset="0"/>
                                     </a:rPr>
                                   </m:ctrlPr>
                                 </m:sSubPr>
                                 <m:e>
                                   <m:r>
-                                    <a:rPr lang="en-US" sz="2100" b="0" i="1">
+                                    <a:rPr lang="en-US" sz="1680" b="0" i="1">
                                       <a:latin typeface="Cambria Math" panose="02040503050406030204" pitchFamily="18" charset="0"/>
                                     </a:rPr>
                                     <m:t>𝑇</m:t>
@@ -4282,7 +4155,7 @@
                                 </m:e>
                                 <m:sub>
                                   <m:r>
-                                    <a:rPr lang="en-US" sz="2100" b="0" i="1">
+                                    <a:rPr lang="en-US" sz="1680" b="0" i="1">
                                       <a:latin typeface="Cambria Math" panose="02040503050406030204" pitchFamily="18" charset="0"/>
                                     </a:rPr>
                                     <m:t>𝑠</m:t>
@@ -4296,7 +4169,7 @@
                     </m:oMath>
                   </m:oMathPara>
                 </a14:m>
-                <a:endParaRPr lang="en-US" sz="2100" dirty="0"/>
+                <a:endParaRPr lang="en-US" sz="1680" dirty="0"/>
               </a:p>
               <a:p>
                 <a:pPr marL="0" indent="0">
@@ -4306,7 +4179,7 @@
                   <a:buNone/>
                 </a:pPr>
                 <a:r>
-                  <a:rPr lang="en-US" sz="2100" dirty="0"/>
+                  <a:rPr lang="en-US" sz="1680" dirty="0"/>
                   <a:t>      where </a:t>
                 </a:r>
                 <a14:m>
@@ -4314,14 +4187,14 @@
                     <m:sSub>
                       <m:sSubPr>
                         <m:ctrlPr>
-                          <a:rPr lang="en-US" sz="2100" i="1">
+                          <a:rPr lang="en-US" sz="1680" i="1">
                             <a:latin typeface="Cambria Math" panose="02040503050406030204" pitchFamily="18" charset="0"/>
                           </a:rPr>
                         </m:ctrlPr>
                       </m:sSubPr>
                       <m:e>
                         <m:r>
-                          <a:rPr lang="en-US" sz="2100" i="1">
+                          <a:rPr lang="en-US" sz="1680" i="1">
                             <a:latin typeface="Cambria Math" panose="02040503050406030204" pitchFamily="18" charset="0"/>
                           </a:rPr>
                           <m:t>𝑇</m:t>
@@ -4329,7 +4202,7 @@
                       </m:e>
                       <m:sub>
                         <m:r>
-                          <a:rPr lang="en-US" sz="2100" i="1">
+                          <a:rPr lang="en-US" sz="1680" i="1">
                             <a:latin typeface="Cambria Math" panose="02040503050406030204" pitchFamily="18" charset="0"/>
                           </a:rPr>
                           <m:t>𝑠</m:t>
@@ -4339,7 +4212,7 @@
                   </m:oMath>
                 </a14:m>
                 <a:r>
-                  <a:rPr lang="en-US" sz="2100" dirty="0"/>
+                  <a:rPr lang="en-US" sz="1680" dirty="0"/>
                   <a:t> is a sampling interval. </a:t>
                 </a:r>
               </a:p>
@@ -4349,7 +4222,7 @@
                     <a:spcPct val="90000"/>
                   </a:lnSpc>
                 </a:pPr>
-                <a:endParaRPr lang="en-US" sz="2100" dirty="0"/>
+                <a:endParaRPr lang="en-US" sz="1680" dirty="0"/>
               </a:p>
             </p:txBody>
           </p:sp>
@@ -4400,59 +4273,202 @@
       </mc:AlternateContent>
       <p:sp>
         <p:nvSpPr>
-          <p:cNvPr id="7" name="Slide Number Placeholder 6">
-            <a:extLst>
-              <a:ext uri="{FF2B5EF4-FFF2-40B4-BE49-F238E27FC236}">
-                <a16:creationId xmlns:a16="http://schemas.microsoft.com/office/drawing/2014/main" id="{85B5A45E-907D-41DE-A174-653801A0D0A5}"/>
-              </a:ext>
-            </a:extLst>
-          </p:cNvPr>
+          <p:cNvPr id="15" name="DSPIRA 1"/>
           <p:cNvSpPr>
             <a:spLocks noGrp="1"/>
           </p:cNvSpPr>
-          <p:nvPr>
-            <p:ph type="sldNum" sz="quarter" idx="12"/>
-          </p:nvPr>
-        </p:nvSpPr>
-        <p:spPr>
-          <a:xfrm>
-            <a:off x="7928637" y="6033479"/>
-            <a:ext cx="586712" cy="365125"/>
-          </a:xfrm>
-        </p:spPr>
-        <p:txBody>
-          <a:bodyPr vert="horz" lIns="91440" tIns="45720" rIns="91440" bIns="45720" rtlCol="0" anchor="ctr">
-            <a:normAutofit/>
+          <p:nvPr/>
+        </p:nvSpPr>
+        <p:spPr>
+          <a:xfrm>
+            <a:off x="0" y="0"/>
+            <a:ext cx="9144000" cy="342900"/>
+          </a:xfrm>
+          <a:prstGeom prst="rect">
+            <a:avLst/>
+          </a:prstGeom>
+          <a:solidFill>
+            <a:srgbClr val="FFFFFF"/>
+          </a:solidFill>
+          <a:ln w="0">
+            <a:noFill/>
+          </a:ln>
+        </p:spPr>
+      </p:sp>
+      <p:sp>
+        <p:nvSpPr>
+          <p:cNvPr id="16" name="DSPIRA 2"/>
+          <p:cNvSpPr>
+            <a:spLocks noGrp="1"/>
+          </p:cNvSpPr>
+          <p:nvPr/>
+        </p:nvSpPr>
+        <p:spPr>
+          <a:xfrm>
+            <a:off x="0" y="7200900"/>
+            <a:ext cx="9144000" cy="342900"/>
+          </a:xfrm>
+          <a:prstGeom prst="rect">
+            <a:avLst/>
+          </a:prstGeom>
+          <a:solidFill>
+            <a:srgbClr val="FFFFFF"/>
+          </a:solidFill>
+          <a:ln w="0">
+            <a:noFill/>
+          </a:ln>
+        </p:spPr>
+      </p:sp>
+      <p:sp>
+        <p:nvSpPr>
+          <p:cNvPr id="17" name="DSPIRA 3"/>
+          <p:cNvSpPr>
+            <a:spLocks noGrp="1"/>
+          </p:cNvSpPr>
+          <p:nvPr/>
+        </p:nvSpPr>
+        <p:spPr>
+          <a:xfrm>
+            <a:off x="228600" y="76200"/>
+            <a:ext cx="4762500" cy="228600"/>
+          </a:xfrm>
+          <a:prstGeom prst="rect">
+            <a:avLst/>
+          </a:prstGeom>
+          <a:noFill/>
+          <a:ln w="0">
+            <a:noFill/>
+          </a:ln>
+        </p:spPr>
+        <p:txBody>
+          <a:bodyPr>
+            <a:noAutofit/>
           </a:bodyPr>
           <a:lstStyle/>
           <a:p>
             <a:pPr>
-              <a:spcAft>
-                <a:spcPts val="600"/>
-              </a:spcAft>
+              <a:defRPr sz="1200" b="1">
+                <a:solidFill>
+                  <a:srgbClr val="002855"/>
+                </a:solidFill>
+                <a:latin typeface="Arial"/>
+                <a:ea typeface="Arial"/>
+                <a:cs typeface="Arial"/>
+              </a:defRPr>
             </a:pPr>
-            <a:fld id="{B6F15528-21DE-4FAA-801E-634DDDAF4B2B}" type="slidenum">
-              <a:rPr lang="en-US" sz="900">
+            <a:r>
+              <a:rPr sz="1200" b="1">
                 <a:solidFill>
-                  <a:schemeClr val="tx1">
-                    <a:alpha val="80000"/>
-                  </a:schemeClr>
+                  <a:srgbClr val="002855"/>
                 </a:solidFill>
+                <a:latin typeface="Arial"/>
+                <a:ea typeface="Arial"/>
+                <a:cs typeface="Arial"/>
               </a:rPr>
-              <a:pPr>
-                <a:spcAft>
-                  <a:spcPts val="600"/>
-                </a:spcAft>
-              </a:pPr>
-              <a:t>1</a:t>
-            </a:fld>
-            <a:endParaRPr lang="en-US" sz="900">
-              <a:solidFill>
-                <a:schemeClr val="tx1">
-                  <a:alpha val="80000"/>
-                </a:schemeClr>
-              </a:solidFill>
-            </a:endParaRPr>
+              <a:t>WVU DSPIRA</a:t>
+            </a:r>
+          </a:p>
+        </p:txBody>
+      </p:sp>
+      <p:sp>
+        <p:nvSpPr>
+          <p:cNvPr id="18" name="DSPIRA 4"/>
+          <p:cNvSpPr>
+            <a:spLocks noGrp="1"/>
+          </p:cNvSpPr>
+          <p:nvPr/>
+        </p:nvSpPr>
+        <p:spPr>
+          <a:xfrm>
+            <a:off x="228600" y="7277100"/>
+            <a:ext cx="6667500" cy="228600"/>
+          </a:xfrm>
+          <a:prstGeom prst="rect">
+            <a:avLst/>
+          </a:prstGeom>
+          <a:noFill/>
+          <a:ln w="0">
+            <a:noFill/>
+          </a:ln>
+        </p:spPr>
+        <p:txBody>
+          <a:bodyPr>
+            <a:noAutofit/>
+          </a:bodyPr>
+          <a:lstStyle/>
+          <a:p>
+            <a:pPr>
+              <a:defRPr sz="900" b="0">
+                <a:solidFill>
+                  <a:srgbClr val="002855"/>
+                </a:solidFill>
+                <a:latin typeface="Arial"/>
+                <a:ea typeface="Arial"/>
+                <a:cs typeface="Arial"/>
+              </a:defRPr>
+            </a:pPr>
+            <a:r>
+              <a:rPr sz="900" b="0">
+                <a:solidFill>
+                  <a:srgbClr val="002855"/>
+                </a:solidFill>
+                <a:latin typeface="Arial"/>
+                <a:ea typeface="Arial"/>
+                <a:cs typeface="Arial"/>
+              </a:rPr>
+              <a:t>wvurail.org/dspira</a:t>
+            </a:r>
+          </a:p>
+        </p:txBody>
+      </p:sp>
+      <p:sp>
+        <p:nvSpPr>
+          <p:cNvPr id="19" name="DSPIRA 5"/>
+          <p:cNvSpPr>
+            <a:spLocks noGrp="1"/>
+          </p:cNvSpPr>
+          <p:nvPr/>
+        </p:nvSpPr>
+        <p:spPr>
+          <a:xfrm>
+            <a:off x="8143875" y="7277100"/>
+            <a:ext cx="762000" cy="228600"/>
+          </a:xfrm>
+          <a:prstGeom prst="rect">
+            <a:avLst/>
+          </a:prstGeom>
+          <a:noFill/>
+          <a:ln w="0">
+            <a:noFill/>
+          </a:ln>
+        </p:spPr>
+        <p:txBody>
+          <a:bodyPr>
+            <a:noAutofit/>
+          </a:bodyPr>
+          <a:lstStyle/>
+          <a:p>
+            <a:pPr>
+              <a:defRPr sz="900" b="0">
+                <a:solidFill>
+                  <a:srgbClr val="002855"/>
+                </a:solidFill>
+                <a:latin typeface="Arial"/>
+                <a:ea typeface="Arial"/>
+                <a:cs typeface="Arial"/>
+              </a:defRPr>
+            </a:pPr>
+            <a:r>
+              <a:rPr sz="900" b="0">
+                <a:solidFill>
+                  <a:srgbClr val="002855"/>
+                </a:solidFill>
+                <a:latin typeface="Arial"/>
+                <a:ea typeface="Arial"/>
+                <a:cs typeface="Arial"/>
+              </a:rPr>
+              <a:t>1 of 10</a:t>
+            </a:r>
           </a:p>
         </p:txBody>
       </p:sp>
@@ -4498,7 +4514,7 @@
         </p:nvSpPr>
         <p:spPr>
           <a:xfrm>
-            <a:off x="457200" y="76200"/>
+            <a:off x="457200" y="419100"/>
             <a:ext cx="8229600" cy="990600"/>
           </a:xfrm>
         </p:spPr>
@@ -4514,30 +4530,6 @@
               </a:rPr>
               <a:t>Aliasing (another example)</a:t>
             </a:r>
-          </a:p>
-        </p:txBody>
-      </p:sp>
-      <p:sp>
-        <p:nvSpPr>
-          <p:cNvPr id="7" name="Slide Number Placeholder 6"/>
-          <p:cNvSpPr>
-            <a:spLocks noGrp="1"/>
-          </p:cNvSpPr>
-          <p:nvPr>
-            <p:ph type="sldNum" sz="quarter" idx="12"/>
-          </p:nvPr>
-        </p:nvSpPr>
-        <p:spPr/>
-        <p:txBody>
-          <a:bodyPr/>
-          <a:lstStyle/>
-          <a:p>
-            <a:fld id="{B6F15528-21DE-4FAA-801E-634DDDAF4B2B}" type="slidenum">
-              <a:rPr lang="en-US" smtClean="0"/>
-              <a:pPr/>
-              <a:t>10</a:t>
-            </a:fld>
-            <a:endParaRPr lang="en-US"/>
           </a:p>
         </p:txBody>
       </p:sp>
@@ -4563,7 +4555,7 @@
         </p:blipFill>
         <p:spPr>
           <a:xfrm>
-            <a:off x="533400" y="1219200"/>
+            <a:off x="533400" y="1562100"/>
             <a:ext cx="4044805" cy="2633664"/>
           </a:xfrm>
           <a:prstGeom prst="rect">
@@ -4593,7 +4585,7 @@
         </p:blipFill>
         <p:spPr>
           <a:xfrm>
-            <a:off x="4329656" y="3505200"/>
+            <a:off x="4329656" y="3848100"/>
             <a:ext cx="3988336" cy="2596896"/>
           </a:xfrm>
           <a:prstGeom prst="rect">
@@ -4609,7 +4601,7 @@
         </p:nvSpPr>
         <p:spPr>
           <a:xfrm>
-            <a:off x="5029200" y="1828800"/>
+            <a:off x="5029200" y="2171700"/>
             <a:ext cx="3335721" cy="400110"/>
           </a:xfrm>
           <a:prstGeom prst="rect">
@@ -4624,14 +4616,14 @@
           <a:lstStyle/>
           <a:p>
             <a:r>
-              <a:rPr lang="en-US" sz="2000" dirty="0"/>
+              <a:rPr lang="en-US" sz="1600" dirty="0"/>
               <a:t>Aliasing due to </a:t>
             </a:r>
             <a:r>
-              <a:rPr lang="en-US" sz="2000" dirty="0" err="1"/>
+              <a:rPr lang="en-US" sz="1600" dirty="0" err="1"/>
               <a:t>undersampling</a:t>
             </a:r>
-            <a:endParaRPr lang="en-US" sz="2000" dirty="0"/>
+            <a:endParaRPr lang="en-US" sz="1600" dirty="0"/>
           </a:p>
         </p:txBody>
       </p:sp>
@@ -4643,7 +4635,7 @@
         </p:nvSpPr>
         <p:spPr>
           <a:xfrm>
-            <a:off x="457200" y="4953000"/>
+            <a:off x="457200" y="5295900"/>
             <a:ext cx="3626314" cy="400110"/>
           </a:xfrm>
           <a:prstGeom prst="rect">
@@ -4658,8 +4650,209 @@
           <a:lstStyle/>
           <a:p>
             <a:r>
-              <a:rPr lang="en-US" sz="2000" dirty="0"/>
+              <a:rPr lang="en-US" sz="1600" dirty="0"/>
               <a:t>Application of anti-aliasing filter  </a:t>
+            </a:r>
+          </a:p>
+        </p:txBody>
+      </p:sp>
+      <p:sp>
+        <p:nvSpPr>
+          <p:cNvPr id="13" name="DSPIRA 1"/>
+          <p:cNvSpPr>
+            <a:spLocks noGrp="1"/>
+          </p:cNvSpPr>
+          <p:nvPr/>
+        </p:nvSpPr>
+        <p:spPr>
+          <a:xfrm>
+            <a:off x="0" y="0"/>
+            <a:ext cx="9144000" cy="342900"/>
+          </a:xfrm>
+          <a:prstGeom prst="rect">
+            <a:avLst/>
+          </a:prstGeom>
+          <a:solidFill>
+            <a:srgbClr val="FFFFFF"/>
+          </a:solidFill>
+          <a:ln w="0">
+            <a:noFill/>
+          </a:ln>
+        </p:spPr>
+      </p:sp>
+      <p:sp>
+        <p:nvSpPr>
+          <p:cNvPr id="14" name="DSPIRA 2"/>
+          <p:cNvSpPr>
+            <a:spLocks noGrp="1"/>
+          </p:cNvSpPr>
+          <p:nvPr/>
+        </p:nvSpPr>
+        <p:spPr>
+          <a:xfrm>
+            <a:off x="0" y="7200900"/>
+            <a:ext cx="9144000" cy="342900"/>
+          </a:xfrm>
+          <a:prstGeom prst="rect">
+            <a:avLst/>
+          </a:prstGeom>
+          <a:solidFill>
+            <a:srgbClr val="FFFFFF"/>
+          </a:solidFill>
+          <a:ln w="0">
+            <a:noFill/>
+          </a:ln>
+        </p:spPr>
+      </p:sp>
+      <p:sp>
+        <p:nvSpPr>
+          <p:cNvPr id="15" name="DSPIRA 3"/>
+          <p:cNvSpPr>
+            <a:spLocks noGrp="1"/>
+          </p:cNvSpPr>
+          <p:nvPr/>
+        </p:nvSpPr>
+        <p:spPr>
+          <a:xfrm>
+            <a:off x="228600" y="76200"/>
+            <a:ext cx="4762500" cy="228600"/>
+          </a:xfrm>
+          <a:prstGeom prst="rect">
+            <a:avLst/>
+          </a:prstGeom>
+          <a:noFill/>
+          <a:ln w="0">
+            <a:noFill/>
+          </a:ln>
+        </p:spPr>
+        <p:txBody>
+          <a:bodyPr>
+            <a:noAutofit/>
+          </a:bodyPr>
+          <a:lstStyle/>
+          <a:p>
+            <a:pPr>
+              <a:defRPr sz="1200" b="1">
+                <a:solidFill>
+                  <a:srgbClr val="002855"/>
+                </a:solidFill>
+                <a:latin typeface="Arial"/>
+                <a:ea typeface="Arial"/>
+                <a:cs typeface="Arial"/>
+              </a:defRPr>
+            </a:pPr>
+            <a:r>
+              <a:rPr sz="1200" b="1">
+                <a:solidFill>
+                  <a:srgbClr val="002855"/>
+                </a:solidFill>
+                <a:latin typeface="Arial"/>
+                <a:ea typeface="Arial"/>
+                <a:cs typeface="Arial"/>
+              </a:rPr>
+              <a:t>WVU DSPIRA</a:t>
+            </a:r>
+          </a:p>
+        </p:txBody>
+      </p:sp>
+      <p:sp>
+        <p:nvSpPr>
+          <p:cNvPr id="16" name="DSPIRA 4"/>
+          <p:cNvSpPr>
+            <a:spLocks noGrp="1"/>
+          </p:cNvSpPr>
+          <p:nvPr/>
+        </p:nvSpPr>
+        <p:spPr>
+          <a:xfrm>
+            <a:off x="228600" y="7277100"/>
+            <a:ext cx="6667500" cy="228600"/>
+          </a:xfrm>
+          <a:prstGeom prst="rect">
+            <a:avLst/>
+          </a:prstGeom>
+          <a:noFill/>
+          <a:ln w="0">
+            <a:noFill/>
+          </a:ln>
+        </p:spPr>
+        <p:txBody>
+          <a:bodyPr>
+            <a:noAutofit/>
+          </a:bodyPr>
+          <a:lstStyle/>
+          <a:p>
+            <a:pPr>
+              <a:defRPr sz="900" b="0">
+                <a:solidFill>
+                  <a:srgbClr val="002855"/>
+                </a:solidFill>
+                <a:latin typeface="Arial"/>
+                <a:ea typeface="Arial"/>
+                <a:cs typeface="Arial"/>
+              </a:defRPr>
+            </a:pPr>
+            <a:r>
+              <a:rPr sz="900" b="0">
+                <a:solidFill>
+                  <a:srgbClr val="002855"/>
+                </a:solidFill>
+                <a:latin typeface="Arial"/>
+                <a:ea typeface="Arial"/>
+                <a:cs typeface="Arial"/>
+              </a:rPr>
+              <a:t>wvurail.org/dspira</a:t>
+            </a:r>
+          </a:p>
+        </p:txBody>
+      </p:sp>
+      <p:sp>
+        <p:nvSpPr>
+          <p:cNvPr id="17" name="DSPIRA 5"/>
+          <p:cNvSpPr>
+            <a:spLocks noGrp="1"/>
+          </p:cNvSpPr>
+          <p:nvPr/>
+        </p:nvSpPr>
+        <p:spPr>
+          <a:xfrm>
+            <a:off x="8143875" y="7277100"/>
+            <a:ext cx="762000" cy="228600"/>
+          </a:xfrm>
+          <a:prstGeom prst="rect">
+            <a:avLst/>
+          </a:prstGeom>
+          <a:noFill/>
+          <a:ln w="0">
+            <a:noFill/>
+          </a:ln>
+        </p:spPr>
+        <p:txBody>
+          <a:bodyPr>
+            <a:noAutofit/>
+          </a:bodyPr>
+          <a:lstStyle/>
+          <a:p>
+            <a:pPr>
+              <a:defRPr sz="900" b="0">
+                <a:solidFill>
+                  <a:srgbClr val="002855"/>
+                </a:solidFill>
+                <a:latin typeface="Arial"/>
+                <a:ea typeface="Arial"/>
+                <a:cs typeface="Arial"/>
+              </a:defRPr>
+            </a:pPr>
+            <a:r>
+              <a:rPr sz="900" b="0">
+                <a:solidFill>
+                  <a:srgbClr val="002855"/>
+                </a:solidFill>
+                <a:latin typeface="Arial"/>
+                <a:ea typeface="Arial"/>
+                <a:cs typeface="Arial"/>
+              </a:rPr>
+              <a:t>10 of 10</a:t>
             </a:r>
           </a:p>
         </p:txBody>
@@ -4727,7 +4920,7 @@
         </p:nvSpPr>
         <p:spPr bwMode="ltGray">
           <a:xfrm>
-            <a:off x="241173" y="320040"/>
+            <a:off x="241173" y="662940"/>
             <a:ext cx="8661654" cy="6217920"/>
           </a:xfrm>
           <a:prstGeom prst="rect">
@@ -4791,7 +4984,7 @@
         </p:nvSpPr>
         <p:spPr>
           <a:xfrm>
-            <a:off x="628650" y="631825"/>
+            <a:off x="628650" y="974725"/>
             <a:ext cx="7886700" cy="1325563"/>
           </a:xfrm>
         </p:spPr>
@@ -4811,7 +5004,7 @@
                 <a:solidFill>
                   <a:schemeClr val="tx1"/>
                 </a:solidFill>
-                <a:latin typeface="+mj-lt"/>
+                <a:latin typeface="Arial"/>
                 <a:ea typeface="+mj-ea"/>
                 <a:cs typeface="+mj-cs"/>
               </a:rPr>
@@ -4856,7 +5049,7 @@
                   </a:lnSpc>
                 </a:pPr>
                 <a:r>
-                  <a:rPr lang="en-US" sz="2100" b="0" dirty="0"/>
+                  <a:rPr lang="en-US" sz="1680" b="0" dirty="0"/>
                   <a:t>Signal as a function of time: </a:t>
                 </a:r>
               </a:p>
@@ -4874,7 +5067,7 @@
                     </m:oMathParaPr>
                     <m:oMath xmlns:m="http://schemas.openxmlformats.org/officeDocument/2006/math">
                       <m:r>
-                        <a:rPr lang="en-US" sz="2100" b="0" i="1">
+                        <a:rPr lang="en-US" sz="1680" b="0" i="1">
                           <a:latin typeface="Cambria Math" panose="02040503050406030204" pitchFamily="18" charset="0"/>
                         </a:rPr>
                         <m:t>𝑥</m:t>
@@ -4882,14 +5075,14 @@
                       <m:d>
                         <m:dPr>
                           <m:ctrlPr>
-                            <a:rPr lang="en-US" sz="2100" b="0" i="1">
+                            <a:rPr lang="en-US" sz="1680" b="0" i="1">
                               <a:latin typeface="Cambria Math" panose="02040503050406030204" pitchFamily="18" charset="0"/>
                             </a:rPr>
                           </m:ctrlPr>
                         </m:dPr>
                         <m:e>
                           <m:r>
-                            <a:rPr lang="en-US" sz="2100" b="0" i="1">
+                            <a:rPr lang="en-US" sz="1680" b="0" i="1">
                               <a:latin typeface="Cambria Math" panose="02040503050406030204" pitchFamily="18" charset="0"/>
                             </a:rPr>
                             <m:t>𝑡</m:t>
@@ -4897,7 +5090,7 @@
                         </m:e>
                       </m:d>
                       <m:r>
-                        <a:rPr lang="en-US" sz="2100" b="0" i="1">
+                        <a:rPr lang="en-US" sz="1680" b="0" i="1">
                           <a:latin typeface="Cambria Math" panose="02040503050406030204" pitchFamily="18" charset="0"/>
                         </a:rPr>
                         <m:t>=</m:t>
@@ -4905,7 +5098,7 @@
                       <m:func>
                         <m:funcPr>
                           <m:ctrlPr>
-                            <a:rPr lang="en-US" sz="2100" b="0" i="1">
+                            <a:rPr lang="en-US" sz="1680" b="0" i="1">
                               <a:latin typeface="Cambria Math" panose="02040503050406030204" pitchFamily="18" charset="0"/>
                             </a:rPr>
                           </m:ctrlPr>
@@ -4915,7 +5108,7 @@
                             <m:rPr>
                               <m:sty m:val="p"/>
                             </m:rPr>
-                            <a:rPr lang="en-US" sz="2100" b="0" i="0">
+                            <a:rPr lang="en-US" sz="1680" b="0" i="0">
                               <a:latin typeface="Cambria Math" panose="02040503050406030204" pitchFamily="18" charset="0"/>
                             </a:rPr>
                             <m:t>cos</m:t>
@@ -4925,20 +5118,20 @@
                           <m:d>
                             <m:dPr>
                               <m:ctrlPr>
-                                <a:rPr lang="en-US" sz="2100" b="0" i="1">
+                                <a:rPr lang="en-US" sz="1680" b="0" i="1">
                                   <a:latin typeface="Cambria Math" panose="02040503050406030204" pitchFamily="18" charset="0"/>
                                 </a:rPr>
                               </m:ctrlPr>
                             </m:dPr>
                             <m:e>
                               <m:r>
-                                <a:rPr lang="en-US" sz="2100" b="0" i="1">
+                                <a:rPr lang="en-US" sz="1680" b="0" i="1">
                                   <a:latin typeface="Cambria Math" panose="02040503050406030204" pitchFamily="18" charset="0"/>
                                 </a:rPr>
                                 <m:t>2</m:t>
                               </m:r>
                               <m:r>
-                                <a:rPr lang="en-US" sz="2100" b="0" i="1">
+                                <a:rPr lang="en-US" sz="1680" b="0" i="1">
                                   <a:latin typeface="Cambria Math" panose="02040503050406030204" pitchFamily="18" charset="0"/>
                                 </a:rPr>
                                 <m:t>𝜋</m:t>
@@ -4947,7 +5140,7 @@
                                 <m:rPr>
                                   <m:sty m:val="p"/>
                                 </m:rPr>
-                                <a:rPr lang="en-US" sz="2100" b="0" i="0">
+                                <a:rPr lang="en-US" sz="1680" b="0" i="0">
                                   <a:latin typeface="Cambria Math" panose="02040503050406030204" pitchFamily="18" charset="0"/>
                                 </a:rPr>
                                 <m:t>t</m:t>
@@ -4957,7 +5150,7 @@
                         </m:e>
                       </m:func>
                       <m:r>
-                        <a:rPr lang="en-US" sz="2100" b="0" i="0">
+                        <a:rPr lang="en-US" sz="1680" b="0" i="0">
                           <a:latin typeface="Cambria Math" panose="02040503050406030204" pitchFamily="18" charset="0"/>
                         </a:rPr>
                         <m:t>+2</m:t>
@@ -4966,13 +5159,13 @@
                         <m:rPr>
                           <m:sty m:val="p"/>
                         </m:rPr>
-                        <a:rPr lang="en-US" sz="2100" b="0" i="0">
+                        <a:rPr lang="en-US" sz="1680" b="0" i="0">
                           <a:latin typeface="Cambria Math" panose="02040503050406030204" pitchFamily="18" charset="0"/>
                         </a:rPr>
                         <m:t>cos</m:t>
                       </m:r>
                       <m:r>
-                        <a:rPr lang="en-US" sz="2100" b="0" i="0">
+                        <a:rPr lang="en-US" sz="1680" b="0" i="0">
                           <a:latin typeface="Cambria Math" panose="02040503050406030204" pitchFamily="18" charset="0"/>
                         </a:rPr>
                         <m:t>(6</m:t>
@@ -4981,19 +5174,19 @@
                         <m:rPr>
                           <m:sty m:val="p"/>
                         </m:rPr>
-                        <a:rPr lang="en-US" sz="2100" b="0" i="1">
+                        <a:rPr lang="en-US" sz="1680" b="0" i="1">
                           <a:latin typeface="Cambria Math" panose="02040503050406030204" pitchFamily="18" charset="0"/>
                         </a:rPr>
                         <m:t>π</m:t>
                       </m:r>
                       <m:r>
-                        <a:rPr lang="en-US" sz="2100" b="0" i="1">
+                        <a:rPr lang="en-US" sz="1680" b="0" i="1">
                           <a:latin typeface="Cambria Math" panose="02040503050406030204" pitchFamily="18" charset="0"/>
                         </a:rPr>
                         <m:t>𝑡</m:t>
                       </m:r>
                       <m:r>
-                        <a:rPr lang="en-US" sz="2100" b="0" i="1">
+                        <a:rPr lang="en-US" sz="1680" b="0" i="1">
                           <a:latin typeface="Cambria Math" panose="02040503050406030204" pitchFamily="18" charset="0"/>
                         </a:rPr>
                         <m:t>)</m:t>
@@ -5001,7 +5194,7 @@
                     </m:oMath>
                   </m:oMathPara>
                 </a14:m>
-                <a:endParaRPr lang="en-US" sz="2100" dirty="0"/>
+                <a:endParaRPr lang="en-US" sz="1680" dirty="0"/>
               </a:p>
               <a:p>
                 <a:pPr indent="-228600">
@@ -5010,7 +5203,7 @@
                   </a:lnSpc>
                 </a:pPr>
                 <a:r>
-                  <a:rPr lang="en-US" sz="2100" dirty="0"/>
+                  <a:rPr lang="en-US" sz="1680" dirty="0"/>
                   <a:t>Its Fourier transform:</a:t>
                 </a:r>
               </a:p>
@@ -5028,7 +5221,7 @@
                     </m:oMathParaPr>
                     <m:oMath xmlns:m="http://schemas.openxmlformats.org/officeDocument/2006/math">
                       <m:r>
-                        <a:rPr lang="en-US" sz="2100" b="0" i="1">
+                        <a:rPr lang="en-US" sz="1680" b="0" i="1">
                           <a:latin typeface="Cambria Math" panose="02040503050406030204" pitchFamily="18" charset="0"/>
                         </a:rPr>
                         <m:t>𝑋</m:t>
@@ -5036,14 +5229,14 @@
                       <m:d>
                         <m:dPr>
                           <m:ctrlPr>
-                            <a:rPr lang="en-US" sz="2100" b="0" i="1">
+                            <a:rPr lang="en-US" sz="1680" b="0" i="1">
                               <a:latin typeface="Cambria Math" panose="02040503050406030204" pitchFamily="18" charset="0"/>
                             </a:rPr>
                           </m:ctrlPr>
                         </m:dPr>
                         <m:e>
                           <m:r>
-                            <a:rPr lang="en-US" sz="2100" b="0" i="1">
+                            <a:rPr lang="en-US" sz="1680" b="0" i="1">
                               <a:latin typeface="Cambria Math" panose="02040503050406030204" pitchFamily="18" charset="0"/>
                             </a:rPr>
                             <m:t>𝑓</m:t>
@@ -5051,7 +5244,7 @@
                         </m:e>
                       </m:d>
                       <m:r>
-                        <a:rPr lang="en-US" sz="2100" b="0" i="1">
+                        <a:rPr lang="en-US" sz="1680" b="0" i="1">
                           <a:latin typeface="Cambria Math" panose="02040503050406030204" pitchFamily="18" charset="0"/>
                         </a:rPr>
                         <m:t>= </m:t>
@@ -5059,14 +5252,14 @@
                       <m:f>
                         <m:fPr>
                           <m:ctrlPr>
-                            <a:rPr lang="en-US" sz="2100" b="0" i="1">
+                            <a:rPr lang="en-US" sz="1680" b="0" i="1">
                               <a:latin typeface="Cambria Math" panose="02040503050406030204" pitchFamily="18" charset="0"/>
                             </a:rPr>
                           </m:ctrlPr>
                         </m:fPr>
                         <m:num>
                           <m:r>
-                            <a:rPr lang="en-US" sz="2100" b="0" i="1">
+                            <a:rPr lang="en-US" sz="1680" b="0" i="1">
                               <a:latin typeface="Cambria Math" panose="02040503050406030204" pitchFamily="18" charset="0"/>
                             </a:rPr>
                             <m:t>1</m:t>
@@ -5074,7 +5267,7 @@
                         </m:num>
                         <m:den>
                           <m:r>
-                            <a:rPr lang="en-US" sz="2100" b="0" i="1">
+                            <a:rPr lang="en-US" sz="1680" b="0" i="1">
                               <a:latin typeface="Cambria Math" panose="02040503050406030204" pitchFamily="18" charset="0"/>
                             </a:rPr>
                             <m:t>2</m:t>
@@ -5082,7 +5275,7 @@
                         </m:den>
                       </m:f>
                       <m:r>
-                        <a:rPr lang="en-US" sz="2100" b="0" i="1">
+                        <a:rPr lang="en-US" sz="1680" b="0" i="1">
                           <a:latin typeface="Cambria Math" panose="02040503050406030204" pitchFamily="18" charset="0"/>
                         </a:rPr>
                         <m:t>𝛿</m:t>
@@ -5090,20 +5283,20 @@
                       <m:d>
                         <m:dPr>
                           <m:ctrlPr>
-                            <a:rPr lang="en-US" sz="2100" b="0" i="1">
+                            <a:rPr lang="en-US" sz="1680" b="0" i="1">
                               <a:latin typeface="Cambria Math" panose="02040503050406030204" pitchFamily="18" charset="0"/>
                             </a:rPr>
                           </m:ctrlPr>
                         </m:dPr>
                         <m:e>
                           <m:r>
-                            <a:rPr lang="en-US" sz="2100" b="0" i="1">
+                            <a:rPr lang="en-US" sz="1680" b="0" i="1">
                               <a:latin typeface="Cambria Math" panose="02040503050406030204" pitchFamily="18" charset="0"/>
                             </a:rPr>
                             <m:t>𝑓</m:t>
                           </m:r>
                           <m:r>
-                            <a:rPr lang="en-US" sz="2100" b="0" i="1">
+                            <a:rPr lang="en-US" sz="1680" b="0" i="1">
                               <a:latin typeface="Cambria Math" panose="02040503050406030204" pitchFamily="18" charset="0"/>
                             </a:rPr>
                             <m:t>±1</m:t>
@@ -5111,13 +5304,13 @@
                         </m:e>
                       </m:d>
                       <m:r>
-                        <a:rPr lang="en-US" sz="2100" b="0" i="1">
+                        <a:rPr lang="en-US" sz="1680" b="0" i="1">
                           <a:latin typeface="Cambria Math" panose="02040503050406030204" pitchFamily="18" charset="0"/>
                         </a:rPr>
                         <m:t>+</m:t>
                       </m:r>
                       <m:r>
-                        <a:rPr lang="en-US" sz="2100" b="0" i="1">
+                        <a:rPr lang="en-US" sz="1680" b="0" i="1">
                           <a:latin typeface="Cambria Math" panose="02040503050406030204" pitchFamily="18" charset="0"/>
                         </a:rPr>
                         <m:t>𝛿</m:t>
@@ -5125,20 +5318,20 @@
                       <m:d>
                         <m:dPr>
                           <m:ctrlPr>
-                            <a:rPr lang="en-US" sz="2100" b="0" i="1">
+                            <a:rPr lang="en-US" sz="1680" b="0" i="1">
                               <a:latin typeface="Cambria Math" panose="02040503050406030204" pitchFamily="18" charset="0"/>
                             </a:rPr>
                           </m:ctrlPr>
                         </m:dPr>
                         <m:e>
                           <m:r>
-                            <a:rPr lang="en-US" sz="2100" b="0" i="1">
+                            <a:rPr lang="en-US" sz="1680" b="0" i="1">
                               <a:latin typeface="Cambria Math" panose="02040503050406030204" pitchFamily="18" charset="0"/>
                             </a:rPr>
                             <m:t>𝑓</m:t>
                           </m:r>
                           <m:r>
-                            <a:rPr lang="en-US" sz="2100" b="0" i="1">
+                            <a:rPr lang="en-US" sz="1680" b="0" i="1">
                               <a:latin typeface="Cambria Math" panose="02040503050406030204" pitchFamily="18" charset="0"/>
                             </a:rPr>
                             <m:t>±3</m:t>
@@ -5148,7 +5341,7 @@
                     </m:oMath>
                   </m:oMathPara>
                 </a14:m>
-                <a:endParaRPr lang="en-US" sz="2100" dirty="0"/>
+                <a:endParaRPr lang="en-US" sz="1680" dirty="0"/>
               </a:p>
               <a:p>
                 <a:pPr indent="-228600">
@@ -5157,23 +5350,23 @@
                   </a:lnSpc>
                 </a:pPr>
                 <a:r>
-                  <a:rPr lang="en-US" sz="2100" dirty="0"/>
+                  <a:rPr lang="en-US" sz="1680" dirty="0"/>
                   <a:t>If we treat it as a low pass signal (described by low frequencies), then its bandwidth is </a:t>
                 </a:r>
                 <a:r>
-                  <a:rPr lang="en-US" sz="2100" i="1" dirty="0"/>
+                  <a:rPr lang="en-US" sz="1680" i="1" dirty="0"/>
                   <a:t> </a:t>
                 </a:r>
                 <a14:m>
                   <m:oMath xmlns:m="http://schemas.openxmlformats.org/officeDocument/2006/math">
                     <m:r>
-                      <a:rPr lang="en-US" sz="2100" b="0" i="1">
+                      <a:rPr lang="en-US" sz="1680" b="0" i="1">
                         <a:latin typeface="Cambria Math" panose="02040503050406030204" pitchFamily="18" charset="0"/>
                       </a:rPr>
                       <m:t>𝑊</m:t>
                     </m:r>
                     <m:r>
-                      <a:rPr lang="en-US" sz="2100" b="0" i="1">
+                      <a:rPr lang="en-US" sz="1680" b="0" i="1">
                         <a:latin typeface="Cambria Math" panose="02040503050406030204" pitchFamily="18" charset="0"/>
                       </a:rPr>
                       <m:t>=3</m:t>
@@ -5181,7 +5374,7 @@
                   </m:oMath>
                 </a14:m>
                 <a:r>
-                  <a:rPr lang="en-US" sz="2100" dirty="0"/>
+                  <a:rPr lang="en-US" sz="1680" dirty="0"/>
                   <a:t>.</a:t>
                 </a:r>
               </a:p>
@@ -5192,7 +5385,7 @@
                   </a:lnSpc>
                 </a:pPr>
                 <a:r>
-                  <a:rPr lang="en-US" sz="2100" dirty="0"/>
+                  <a:rPr lang="en-US" sz="1680" dirty="0"/>
                   <a:t>Let us sample the signal at the rate </a:t>
                 </a:r>
                 <a14:m>
@@ -5200,14 +5393,14 @@
                     <m:sSub>
                       <m:sSubPr>
                         <m:ctrlPr>
-                          <a:rPr lang="en-US" sz="2100" i="1">
+                          <a:rPr lang="en-US" sz="1680" i="1">
                             <a:latin typeface="Cambria Math" panose="02040503050406030204" pitchFamily="18" charset="0"/>
                           </a:rPr>
                         </m:ctrlPr>
                       </m:sSubPr>
                       <m:e>
                         <m:r>
-                          <a:rPr lang="en-US" sz="2100" b="0" i="1">
+                          <a:rPr lang="en-US" sz="1680" b="0" i="1">
                             <a:latin typeface="Cambria Math" panose="02040503050406030204" pitchFamily="18" charset="0"/>
                           </a:rPr>
                           <m:t>𝑓</m:t>
@@ -5215,7 +5408,7 @@
                       </m:e>
                       <m:sub>
                         <m:r>
-                          <a:rPr lang="en-US" sz="2100" b="0" i="1">
+                          <a:rPr lang="en-US" sz="1680" b="0" i="1">
                             <a:latin typeface="Cambria Math" panose="02040503050406030204" pitchFamily="18" charset="0"/>
                           </a:rPr>
                           <m:t>𝑠</m:t>
@@ -5223,7 +5416,7 @@
                       </m:sub>
                     </m:sSub>
                     <m:r>
-                      <a:rPr lang="en-US" sz="2100" b="0" i="1">
+                      <a:rPr lang="en-US" sz="1680" b="0" i="1">
                         <a:latin typeface="Cambria Math" panose="02040503050406030204" pitchFamily="18" charset="0"/>
                       </a:rPr>
                       <m:t>=8</m:t>
@@ -5231,7 +5424,7 @@
                   </m:oMath>
                 </a14:m>
                 <a:r>
-                  <a:rPr lang="en-US" sz="2100" dirty="0"/>
+                  <a:rPr lang="en-US" sz="1680" dirty="0"/>
                   <a:t> Hz (the sampling period is </a:t>
                 </a:r>
                 <a14:m>
@@ -5239,14 +5432,14 @@
                     <m:sSub>
                       <m:sSubPr>
                         <m:ctrlPr>
-                          <a:rPr lang="en-US" sz="2100" i="1">
+                          <a:rPr lang="en-US" sz="1680" i="1">
                             <a:latin typeface="Cambria Math" panose="02040503050406030204" pitchFamily="18" charset="0"/>
                           </a:rPr>
                         </m:ctrlPr>
                       </m:sSubPr>
                       <m:e>
                         <m:r>
-                          <a:rPr lang="en-US" sz="2100" b="0" i="1">
+                          <a:rPr lang="en-US" sz="1680" b="0" i="1">
                             <a:latin typeface="Cambria Math" panose="02040503050406030204" pitchFamily="18" charset="0"/>
                           </a:rPr>
                           <m:t>𝑇</m:t>
@@ -5254,7 +5447,7 @@
                       </m:e>
                       <m:sub>
                         <m:r>
-                          <a:rPr lang="en-US" sz="2100" b="0" i="1">
+                          <a:rPr lang="en-US" sz="1680" b="0" i="1">
                             <a:latin typeface="Cambria Math" panose="02040503050406030204" pitchFamily="18" charset="0"/>
                           </a:rPr>
                           <m:t>𝑠</m:t>
@@ -5262,7 +5455,7 @@
                       </m:sub>
                     </m:sSub>
                     <m:r>
-                      <a:rPr lang="en-US" sz="2100" b="0" i="1">
+                      <a:rPr lang="en-US" sz="1680" b="0" i="1">
                         <a:latin typeface="Cambria Math" panose="02040503050406030204" pitchFamily="18" charset="0"/>
                       </a:rPr>
                       <m:t>=1/8</m:t>
@@ -5270,7 +5463,7 @@
                   </m:oMath>
                 </a14:m>
                 <a:r>
-                  <a:rPr lang="en-US" sz="2100" dirty="0"/>
+                  <a:rPr lang="en-US" sz="1680" dirty="0"/>
                   <a:t> s.  </a:t>
                 </a:r>
               </a:p>
@@ -5280,7 +5473,7 @@
                     <a:spcPct val="90000"/>
                   </a:lnSpc>
                 </a:pPr>
-                <a:endParaRPr lang="en-US" sz="2100" dirty="0"/>
+                <a:endParaRPr lang="en-US" sz="1680" dirty="0"/>
               </a:p>
             </p:txBody>
           </p:sp>
@@ -5347,7 +5540,7 @@
         </p:nvSpPr>
         <p:spPr>
           <a:xfrm>
-            <a:off x="628650" y="6077585"/>
+            <a:off x="628650" y="6420485"/>
             <a:ext cx="2057400" cy="365125"/>
           </a:xfrm>
         </p:spPr>
@@ -5387,7 +5580,7 @@
         </p:nvSpPr>
         <p:spPr>
           <a:xfrm>
-            <a:off x="3028950" y="6077585"/>
+            <a:off x="3028950" y="6420485"/>
             <a:ext cx="3086100" cy="365125"/>
           </a:xfrm>
         </p:spPr>
@@ -5409,7 +5602,7 @@
                     <a:tint val="75000"/>
                   </a:schemeClr>
                 </a:solidFill>
-                <a:latin typeface="+mn-lt"/>
+                <a:latin typeface="Arial"/>
                 <a:ea typeface="+mn-ea"/>
                 <a:cs typeface="+mn-cs"/>
               </a:rPr>
@@ -5420,47 +5613,202 @@
       </p:sp>
       <p:sp>
         <p:nvSpPr>
-          <p:cNvPr id="7" name="Slide Number Placeholder 6">
-            <a:extLst>
-              <a:ext uri="{FF2B5EF4-FFF2-40B4-BE49-F238E27FC236}">
-                <a16:creationId xmlns:a16="http://schemas.microsoft.com/office/drawing/2014/main" id="{0586A52B-BDFF-4F6B-9F5E-89E1F7242C3D}"/>
-              </a:ext>
-            </a:extLst>
-          </p:cNvPr>
+          <p:cNvPr id="17" name="DSPIRA 1"/>
           <p:cNvSpPr>
             <a:spLocks noGrp="1"/>
           </p:cNvSpPr>
-          <p:nvPr>
-            <p:ph type="sldNum" sz="quarter" idx="12"/>
-          </p:nvPr>
-        </p:nvSpPr>
-        <p:spPr>
-          <a:xfrm>
-            <a:off x="6457950" y="6077585"/>
-            <a:ext cx="2057400" cy="365125"/>
-          </a:xfrm>
-        </p:spPr>
-        <p:txBody>
-          <a:bodyPr vert="horz" lIns="91440" tIns="45720" rIns="91440" bIns="45720" rtlCol="0" anchor="ctr">
-            <a:normAutofit/>
+          <p:nvPr/>
+        </p:nvSpPr>
+        <p:spPr>
+          <a:xfrm>
+            <a:off x="0" y="0"/>
+            <a:ext cx="9144000" cy="342900"/>
+          </a:xfrm>
+          <a:prstGeom prst="rect">
+            <a:avLst/>
+          </a:prstGeom>
+          <a:solidFill>
+            <a:srgbClr val="FFFFFF"/>
+          </a:solidFill>
+          <a:ln w="0">
+            <a:noFill/>
+          </a:ln>
+        </p:spPr>
+      </p:sp>
+      <p:sp>
+        <p:nvSpPr>
+          <p:cNvPr id="18" name="DSPIRA 2"/>
+          <p:cNvSpPr>
+            <a:spLocks noGrp="1"/>
+          </p:cNvSpPr>
+          <p:nvPr/>
+        </p:nvSpPr>
+        <p:spPr>
+          <a:xfrm>
+            <a:off x="0" y="7200900"/>
+            <a:ext cx="9144000" cy="342900"/>
+          </a:xfrm>
+          <a:prstGeom prst="rect">
+            <a:avLst/>
+          </a:prstGeom>
+          <a:solidFill>
+            <a:srgbClr val="FFFFFF"/>
+          </a:solidFill>
+          <a:ln w="0">
+            <a:noFill/>
+          </a:ln>
+        </p:spPr>
+      </p:sp>
+      <p:sp>
+        <p:nvSpPr>
+          <p:cNvPr id="19" name="DSPIRA 3"/>
+          <p:cNvSpPr>
+            <a:spLocks noGrp="1"/>
+          </p:cNvSpPr>
+          <p:nvPr/>
+        </p:nvSpPr>
+        <p:spPr>
+          <a:xfrm>
+            <a:off x="228600" y="76200"/>
+            <a:ext cx="4762500" cy="228600"/>
+          </a:xfrm>
+          <a:prstGeom prst="rect">
+            <a:avLst/>
+          </a:prstGeom>
+          <a:noFill/>
+          <a:ln w="0">
+            <a:noFill/>
+          </a:ln>
+        </p:spPr>
+        <p:txBody>
+          <a:bodyPr>
+            <a:noAutofit/>
           </a:bodyPr>
           <a:lstStyle/>
           <a:p>
             <a:pPr>
-              <a:spcAft>
-                <a:spcPts val="600"/>
-              </a:spcAft>
+              <a:defRPr sz="1200" b="1">
+                <a:solidFill>
+                  <a:srgbClr val="002855"/>
+                </a:solidFill>
+                <a:latin typeface="Arial"/>
+                <a:ea typeface="Arial"/>
+                <a:cs typeface="Arial"/>
+              </a:defRPr>
             </a:pPr>
-            <a:fld id="{B6F15528-21DE-4FAA-801E-634DDDAF4B2B}" type="slidenum">
-              <a:rPr lang="en-US" smtClean="0"/>
-              <a:pPr>
-                <a:spcAft>
-                  <a:spcPts val="600"/>
-                </a:spcAft>
-              </a:pPr>
-              <a:t>2</a:t>
-            </a:fld>
-            <a:endParaRPr lang="en-US"/>
+            <a:r>
+              <a:rPr sz="1200" b="1">
+                <a:solidFill>
+                  <a:srgbClr val="002855"/>
+                </a:solidFill>
+                <a:latin typeface="Arial"/>
+                <a:ea typeface="Arial"/>
+                <a:cs typeface="Arial"/>
+              </a:rPr>
+              <a:t>WVU DSPIRA</a:t>
+            </a:r>
+          </a:p>
+        </p:txBody>
+      </p:sp>
+      <p:sp>
+        <p:nvSpPr>
+          <p:cNvPr id="20" name="DSPIRA 4"/>
+          <p:cNvSpPr>
+            <a:spLocks noGrp="1"/>
+          </p:cNvSpPr>
+          <p:nvPr/>
+        </p:nvSpPr>
+        <p:spPr>
+          <a:xfrm>
+            <a:off x="228600" y="7277100"/>
+            <a:ext cx="6667500" cy="228600"/>
+          </a:xfrm>
+          <a:prstGeom prst="rect">
+            <a:avLst/>
+          </a:prstGeom>
+          <a:noFill/>
+          <a:ln w="0">
+            <a:noFill/>
+          </a:ln>
+        </p:spPr>
+        <p:txBody>
+          <a:bodyPr>
+            <a:noAutofit/>
+          </a:bodyPr>
+          <a:lstStyle/>
+          <a:p>
+            <a:pPr>
+              <a:defRPr sz="900" b="0">
+                <a:solidFill>
+                  <a:srgbClr val="002855"/>
+                </a:solidFill>
+                <a:latin typeface="Arial"/>
+                <a:ea typeface="Arial"/>
+                <a:cs typeface="Arial"/>
+              </a:defRPr>
+            </a:pPr>
+            <a:r>
+              <a:rPr sz="900" b="0">
+                <a:solidFill>
+                  <a:srgbClr val="002855"/>
+                </a:solidFill>
+                <a:latin typeface="Arial"/>
+                <a:ea typeface="Arial"/>
+                <a:cs typeface="Arial"/>
+              </a:rPr>
+              <a:t>wvurail.org/dspira</a:t>
+            </a:r>
+          </a:p>
+        </p:txBody>
+      </p:sp>
+      <p:sp>
+        <p:nvSpPr>
+          <p:cNvPr id="21" name="DSPIRA 5"/>
+          <p:cNvSpPr>
+            <a:spLocks noGrp="1"/>
+          </p:cNvSpPr>
+          <p:nvPr/>
+        </p:nvSpPr>
+        <p:spPr>
+          <a:xfrm>
+            <a:off x="8143875" y="7277100"/>
+            <a:ext cx="762000" cy="228600"/>
+          </a:xfrm>
+          <a:prstGeom prst="rect">
+            <a:avLst/>
+          </a:prstGeom>
+          <a:noFill/>
+          <a:ln w="0">
+            <a:noFill/>
+          </a:ln>
+        </p:spPr>
+        <p:txBody>
+          <a:bodyPr>
+            <a:noAutofit/>
+          </a:bodyPr>
+          <a:lstStyle/>
+          <a:p>
+            <a:pPr>
+              <a:defRPr sz="900" b="0">
+                <a:solidFill>
+                  <a:srgbClr val="002855"/>
+                </a:solidFill>
+                <a:latin typeface="Arial"/>
+                <a:ea typeface="Arial"/>
+                <a:cs typeface="Arial"/>
+              </a:defRPr>
+            </a:pPr>
+            <a:r>
+              <a:rPr sz="900" b="0">
+                <a:solidFill>
+                  <a:srgbClr val="002855"/>
+                </a:solidFill>
+                <a:latin typeface="Arial"/>
+                <a:ea typeface="Arial"/>
+                <a:cs typeface="Arial"/>
+              </a:rPr>
+              <a:t>2 of 10</a:t>
+            </a:r>
           </a:p>
         </p:txBody>
       </p:sp>
@@ -5527,7 +5875,7 @@
         </p:nvSpPr>
         <p:spPr>
           <a:xfrm>
-            <a:off x="478631" y="0"/>
+            <a:off x="478631" y="342900"/>
             <a:ext cx="2436019" cy="3400426"/>
           </a:xfrm>
           <a:prstGeom prst="flowChartDocument">
@@ -5583,7 +5931,7 @@
         </p:nvSpPr>
         <p:spPr>
           <a:xfrm>
-            <a:off x="628650" y="171162"/>
+            <a:off x="628650" y="514062"/>
             <a:ext cx="2130136" cy="2371148"/>
           </a:xfrm>
         </p:spPr>
@@ -5599,11 +5947,11 @@
               </a:lnSpc>
             </a:pPr>
             <a:r>
-              <a:rPr lang="en-US" sz="2800" kern="1200">
+              <a:rPr lang="en-US" sz="2240" kern="1200">
                 <a:solidFill>
                   <a:srgbClr val="FFFFFF"/>
                 </a:solidFill>
-                <a:latin typeface="+mj-lt"/>
+                <a:latin typeface="Arial"/>
                 <a:ea typeface="+mj-ea"/>
                 <a:cs typeface="+mj-cs"/>
               </a:rPr>
@@ -5640,7 +5988,7 @@
         </p:blipFill>
         <p:spPr>
           <a:xfrm>
-            <a:off x="3155949" y="1142567"/>
+            <a:off x="3155949" y="1485467"/>
             <a:ext cx="5510653" cy="4573841"/>
           </a:xfrm>
           <a:prstGeom prst="rect">
@@ -5666,7 +6014,7 @@
         </p:nvSpPr>
         <p:spPr>
           <a:xfrm>
-            <a:off x="628650" y="6356350"/>
+            <a:off x="628650" y="6699250"/>
             <a:ext cx="4470713" cy="365125"/>
           </a:xfrm>
           <a:noFill/>
@@ -5689,7 +6037,7 @@
                     <a:tint val="75000"/>
                   </a:schemeClr>
                 </a:solidFill>
-                <a:latin typeface="+mn-lt"/>
+                <a:latin typeface="Arial"/>
                 <a:ea typeface="+mn-ea"/>
                 <a:cs typeface="+mn-cs"/>
               </a:rPr>
@@ -5716,7 +6064,7 @@
         </p:nvSpPr>
         <p:spPr>
           <a:xfrm>
-            <a:off x="6035312" y="6356350"/>
+            <a:off x="6035312" y="6699250"/>
             <a:ext cx="1917593" cy="365125"/>
           </a:xfrm>
           <a:noFill/>
@@ -5741,48 +6089,202 @@
       </p:sp>
       <p:sp>
         <p:nvSpPr>
-          <p:cNvPr id="7" name="Slide Number Placeholder 6">
-            <a:extLst>
-              <a:ext uri="{FF2B5EF4-FFF2-40B4-BE49-F238E27FC236}">
-                <a16:creationId xmlns:a16="http://schemas.microsoft.com/office/drawing/2014/main" id="{EAF6A07F-6474-46D5-BC64-D8DDFC2FB3A4}"/>
-              </a:ext>
-            </a:extLst>
-          </p:cNvPr>
+          <p:cNvPr id="22" name="DSPIRA 1"/>
           <p:cNvSpPr>
             <a:spLocks noGrp="1"/>
           </p:cNvSpPr>
-          <p:nvPr>
-            <p:ph type="sldNum" sz="quarter" idx="12"/>
-          </p:nvPr>
-        </p:nvSpPr>
-        <p:spPr>
-          <a:xfrm>
-            <a:off x="8194857" y="6356350"/>
-            <a:ext cx="469082" cy="365125"/>
-          </a:xfrm>
+          <p:nvPr/>
+        </p:nvSpPr>
+        <p:spPr>
+          <a:xfrm>
+            <a:off x="0" y="0"/>
+            <a:ext cx="9144000" cy="342900"/>
+          </a:xfrm>
+          <a:prstGeom prst="rect">
+            <a:avLst/>
+          </a:prstGeom>
+          <a:solidFill>
+            <a:srgbClr val="FFFFFF"/>
+          </a:solidFill>
+          <a:ln w="0">
+            <a:noFill/>
+          </a:ln>
+        </p:spPr>
+      </p:sp>
+      <p:sp>
+        <p:nvSpPr>
+          <p:cNvPr id="23" name="DSPIRA 2"/>
+          <p:cNvSpPr>
+            <a:spLocks noGrp="1"/>
+          </p:cNvSpPr>
+          <p:nvPr/>
+        </p:nvSpPr>
+        <p:spPr>
+          <a:xfrm>
+            <a:off x="0" y="7200900"/>
+            <a:ext cx="9144000" cy="342900"/>
+          </a:xfrm>
+          <a:prstGeom prst="rect">
+            <a:avLst/>
+          </a:prstGeom>
+          <a:solidFill>
+            <a:srgbClr val="FFFFFF"/>
+          </a:solidFill>
+          <a:ln w="0">
+            <a:noFill/>
+          </a:ln>
+        </p:spPr>
+      </p:sp>
+      <p:sp>
+        <p:nvSpPr>
+          <p:cNvPr id="24" name="DSPIRA 3"/>
+          <p:cNvSpPr>
+            <a:spLocks noGrp="1"/>
+          </p:cNvSpPr>
+          <p:nvPr/>
+        </p:nvSpPr>
+        <p:spPr>
+          <a:xfrm>
+            <a:off x="228600" y="76200"/>
+            <a:ext cx="4762500" cy="228600"/>
+          </a:xfrm>
+          <a:prstGeom prst="rect">
+            <a:avLst/>
+          </a:prstGeom>
           <a:noFill/>
-        </p:spPr>
-        <p:txBody>
-          <a:bodyPr vert="horz" lIns="91440" tIns="45720" rIns="91440" bIns="45720" rtlCol="0" anchor="ctr">
-            <a:normAutofit/>
+          <a:ln w="0">
+            <a:noFill/>
+          </a:ln>
+        </p:spPr>
+        <p:txBody>
+          <a:bodyPr>
+            <a:noAutofit/>
           </a:bodyPr>
           <a:lstStyle/>
           <a:p>
-            <a:pPr algn="l">
-              <a:spcAft>
-                <a:spcPts val="600"/>
-              </a:spcAft>
+            <a:pPr>
+              <a:defRPr sz="1200" b="1">
+                <a:solidFill>
+                  <a:srgbClr val="002855"/>
+                </a:solidFill>
+                <a:latin typeface="Arial"/>
+                <a:ea typeface="Arial"/>
+                <a:cs typeface="Arial"/>
+              </a:defRPr>
             </a:pPr>
-            <a:fld id="{B6F15528-21DE-4FAA-801E-634DDDAF4B2B}" type="slidenum">
-              <a:rPr lang="en-US"/>
-              <a:pPr algn="l">
-                <a:spcAft>
-                  <a:spcPts val="600"/>
-                </a:spcAft>
-              </a:pPr>
-              <a:t>3</a:t>
-            </a:fld>
-            <a:endParaRPr lang="en-US"/>
+            <a:r>
+              <a:rPr sz="1200" b="1">
+                <a:solidFill>
+                  <a:srgbClr val="002855"/>
+                </a:solidFill>
+                <a:latin typeface="Arial"/>
+                <a:ea typeface="Arial"/>
+                <a:cs typeface="Arial"/>
+              </a:rPr>
+              <a:t>WVU DSPIRA</a:t>
+            </a:r>
+          </a:p>
+        </p:txBody>
+      </p:sp>
+      <p:sp>
+        <p:nvSpPr>
+          <p:cNvPr id="25" name="DSPIRA 4"/>
+          <p:cNvSpPr>
+            <a:spLocks noGrp="1"/>
+          </p:cNvSpPr>
+          <p:nvPr/>
+        </p:nvSpPr>
+        <p:spPr>
+          <a:xfrm>
+            <a:off x="228600" y="7277100"/>
+            <a:ext cx="6667500" cy="228600"/>
+          </a:xfrm>
+          <a:prstGeom prst="rect">
+            <a:avLst/>
+          </a:prstGeom>
+          <a:noFill/>
+          <a:ln w="0">
+            <a:noFill/>
+          </a:ln>
+        </p:spPr>
+        <p:txBody>
+          <a:bodyPr>
+            <a:noAutofit/>
+          </a:bodyPr>
+          <a:lstStyle/>
+          <a:p>
+            <a:pPr>
+              <a:defRPr sz="900" b="0">
+                <a:solidFill>
+                  <a:srgbClr val="002855"/>
+                </a:solidFill>
+                <a:latin typeface="Arial"/>
+                <a:ea typeface="Arial"/>
+                <a:cs typeface="Arial"/>
+              </a:defRPr>
+            </a:pPr>
+            <a:r>
+              <a:rPr sz="900" b="0">
+                <a:solidFill>
+                  <a:srgbClr val="002855"/>
+                </a:solidFill>
+                <a:latin typeface="Arial"/>
+                <a:ea typeface="Arial"/>
+                <a:cs typeface="Arial"/>
+              </a:rPr>
+              <a:t>wvurail.org/dspira</a:t>
+            </a:r>
+          </a:p>
+        </p:txBody>
+      </p:sp>
+      <p:sp>
+        <p:nvSpPr>
+          <p:cNvPr id="26" name="DSPIRA 5"/>
+          <p:cNvSpPr>
+            <a:spLocks noGrp="1"/>
+          </p:cNvSpPr>
+          <p:nvPr/>
+        </p:nvSpPr>
+        <p:spPr>
+          <a:xfrm>
+            <a:off x="8143875" y="7277100"/>
+            <a:ext cx="762000" cy="228600"/>
+          </a:xfrm>
+          <a:prstGeom prst="rect">
+            <a:avLst/>
+          </a:prstGeom>
+          <a:noFill/>
+          <a:ln w="0">
+            <a:noFill/>
+          </a:ln>
+        </p:spPr>
+        <p:txBody>
+          <a:bodyPr>
+            <a:noAutofit/>
+          </a:bodyPr>
+          <a:lstStyle/>
+          <a:p>
+            <a:pPr>
+              <a:defRPr sz="900" b="0">
+                <a:solidFill>
+                  <a:srgbClr val="002855"/>
+                </a:solidFill>
+                <a:latin typeface="Arial"/>
+                <a:ea typeface="Arial"/>
+                <a:cs typeface="Arial"/>
+              </a:defRPr>
+            </a:pPr>
+            <a:r>
+              <a:rPr sz="900" b="0">
+                <a:solidFill>
+                  <a:srgbClr val="002855"/>
+                </a:solidFill>
+                <a:latin typeface="Arial"/>
+                <a:ea typeface="Arial"/>
+                <a:cs typeface="Arial"/>
+              </a:rPr>
+              <a:t>3 of 10</a:t>
+            </a:r>
           </a:p>
         </p:txBody>
       </p:sp>
@@ -5849,7 +6351,7 @@
         </p:nvSpPr>
         <p:spPr bwMode="ltGray">
           <a:xfrm>
-            <a:off x="241173" y="320040"/>
+            <a:off x="241173" y="662940"/>
             <a:ext cx="8661654" cy="6217920"/>
           </a:xfrm>
           <a:prstGeom prst="rect">
@@ -5913,7 +6415,7 @@
         </p:nvSpPr>
         <p:spPr>
           <a:xfrm>
-            <a:off x="628650" y="631825"/>
+            <a:off x="628650" y="974725"/>
             <a:ext cx="7886700" cy="1325563"/>
           </a:xfrm>
         </p:spPr>
@@ -5933,7 +6435,7 @@
                 <a:solidFill>
                   <a:schemeClr val="tx1"/>
                 </a:solidFill>
-                <a:latin typeface="+mj-lt"/>
+                <a:latin typeface="Arial"/>
                 <a:ea typeface="+mj-ea"/>
                 <a:cs typeface="+mj-cs"/>
               </a:rPr>
@@ -6537,7 +7039,7 @@
                     <a:spcPct val="90000"/>
                   </a:lnSpc>
                 </a:pPr>
-                <a:endParaRPr lang="en-US" sz="2100" dirty="0"/>
+                <a:endParaRPr lang="en-US" sz="1680" dirty="0"/>
               </a:p>
             </p:txBody>
           </p:sp>
@@ -6604,7 +7106,7 @@
         </p:nvSpPr>
         <p:spPr>
           <a:xfrm>
-            <a:off x="628650" y="6077585"/>
+            <a:off x="628650" y="6420485"/>
             <a:ext cx="2057400" cy="365125"/>
           </a:xfrm>
         </p:spPr>
@@ -6644,7 +7146,7 @@
         </p:nvSpPr>
         <p:spPr>
           <a:xfrm>
-            <a:off x="3028950" y="6077585"/>
+            <a:off x="3028950" y="6420485"/>
             <a:ext cx="3086100" cy="365125"/>
           </a:xfrm>
         </p:spPr>
@@ -6666,7 +7168,7 @@
                     <a:tint val="75000"/>
                   </a:schemeClr>
                 </a:solidFill>
-                <a:latin typeface="+mn-lt"/>
+                <a:latin typeface="Arial"/>
                 <a:ea typeface="+mn-ea"/>
                 <a:cs typeface="+mn-cs"/>
               </a:rPr>
@@ -6677,47 +7179,202 @@
       </p:sp>
       <p:sp>
         <p:nvSpPr>
-          <p:cNvPr id="7" name="Slide Number Placeholder 6">
-            <a:extLst>
-              <a:ext uri="{FF2B5EF4-FFF2-40B4-BE49-F238E27FC236}">
-                <a16:creationId xmlns:a16="http://schemas.microsoft.com/office/drawing/2014/main" id="{367AC26D-AB65-4336-958C-96BC2ADFE03C}"/>
-              </a:ext>
-            </a:extLst>
-          </p:cNvPr>
+          <p:cNvPr id="13" name="DSPIRA 1"/>
           <p:cNvSpPr>
             <a:spLocks noGrp="1"/>
           </p:cNvSpPr>
-          <p:nvPr>
-            <p:ph type="sldNum" sz="quarter" idx="12"/>
-          </p:nvPr>
-        </p:nvSpPr>
-        <p:spPr>
-          <a:xfrm>
-            <a:off x="6457950" y="6077585"/>
-            <a:ext cx="2057400" cy="365125"/>
-          </a:xfrm>
-        </p:spPr>
-        <p:txBody>
-          <a:bodyPr vert="horz" lIns="91440" tIns="45720" rIns="91440" bIns="45720" rtlCol="0" anchor="ctr">
-            <a:normAutofit/>
+          <p:nvPr/>
+        </p:nvSpPr>
+        <p:spPr>
+          <a:xfrm>
+            <a:off x="0" y="0"/>
+            <a:ext cx="9144000" cy="342900"/>
+          </a:xfrm>
+          <a:prstGeom prst="rect">
+            <a:avLst/>
+          </a:prstGeom>
+          <a:solidFill>
+            <a:srgbClr val="FFFFFF"/>
+          </a:solidFill>
+          <a:ln w="0">
+            <a:noFill/>
+          </a:ln>
+        </p:spPr>
+      </p:sp>
+      <p:sp>
+        <p:nvSpPr>
+          <p:cNvPr id="14" name="DSPIRA 2"/>
+          <p:cNvSpPr>
+            <a:spLocks noGrp="1"/>
+          </p:cNvSpPr>
+          <p:nvPr/>
+        </p:nvSpPr>
+        <p:spPr>
+          <a:xfrm>
+            <a:off x="0" y="7200900"/>
+            <a:ext cx="9144000" cy="342900"/>
+          </a:xfrm>
+          <a:prstGeom prst="rect">
+            <a:avLst/>
+          </a:prstGeom>
+          <a:solidFill>
+            <a:srgbClr val="FFFFFF"/>
+          </a:solidFill>
+          <a:ln w="0">
+            <a:noFill/>
+          </a:ln>
+        </p:spPr>
+      </p:sp>
+      <p:sp>
+        <p:nvSpPr>
+          <p:cNvPr id="15" name="DSPIRA 3"/>
+          <p:cNvSpPr>
+            <a:spLocks noGrp="1"/>
+          </p:cNvSpPr>
+          <p:nvPr/>
+        </p:nvSpPr>
+        <p:spPr>
+          <a:xfrm>
+            <a:off x="228600" y="76200"/>
+            <a:ext cx="4762500" cy="228600"/>
+          </a:xfrm>
+          <a:prstGeom prst="rect">
+            <a:avLst/>
+          </a:prstGeom>
+          <a:noFill/>
+          <a:ln w="0">
+            <a:noFill/>
+          </a:ln>
+        </p:spPr>
+        <p:txBody>
+          <a:bodyPr>
+            <a:noAutofit/>
           </a:bodyPr>
           <a:lstStyle/>
           <a:p>
             <a:pPr>
-              <a:spcAft>
-                <a:spcPts val="600"/>
-              </a:spcAft>
+              <a:defRPr sz="1200" b="1">
+                <a:solidFill>
+                  <a:srgbClr val="002855"/>
+                </a:solidFill>
+                <a:latin typeface="Arial"/>
+                <a:ea typeface="Arial"/>
+                <a:cs typeface="Arial"/>
+              </a:defRPr>
             </a:pPr>
-            <a:fld id="{B6F15528-21DE-4FAA-801E-634DDDAF4B2B}" type="slidenum">
-              <a:rPr lang="en-US" smtClean="0"/>
-              <a:pPr>
-                <a:spcAft>
-                  <a:spcPts val="600"/>
-                </a:spcAft>
-              </a:pPr>
-              <a:t>4</a:t>
-            </a:fld>
-            <a:endParaRPr lang="en-US"/>
+            <a:r>
+              <a:rPr sz="1200" b="1">
+                <a:solidFill>
+                  <a:srgbClr val="002855"/>
+                </a:solidFill>
+                <a:latin typeface="Arial"/>
+                <a:ea typeface="Arial"/>
+                <a:cs typeface="Arial"/>
+              </a:rPr>
+              <a:t>WVU DSPIRA</a:t>
+            </a:r>
+          </a:p>
+        </p:txBody>
+      </p:sp>
+      <p:sp>
+        <p:nvSpPr>
+          <p:cNvPr id="16" name="DSPIRA 4"/>
+          <p:cNvSpPr>
+            <a:spLocks noGrp="1"/>
+          </p:cNvSpPr>
+          <p:nvPr/>
+        </p:nvSpPr>
+        <p:spPr>
+          <a:xfrm>
+            <a:off x="228600" y="7277100"/>
+            <a:ext cx="6667500" cy="228600"/>
+          </a:xfrm>
+          <a:prstGeom prst="rect">
+            <a:avLst/>
+          </a:prstGeom>
+          <a:noFill/>
+          <a:ln w="0">
+            <a:noFill/>
+          </a:ln>
+        </p:spPr>
+        <p:txBody>
+          <a:bodyPr>
+            <a:noAutofit/>
+          </a:bodyPr>
+          <a:lstStyle/>
+          <a:p>
+            <a:pPr>
+              <a:defRPr sz="900" b="0">
+                <a:solidFill>
+                  <a:srgbClr val="002855"/>
+                </a:solidFill>
+                <a:latin typeface="Arial"/>
+                <a:ea typeface="Arial"/>
+                <a:cs typeface="Arial"/>
+              </a:defRPr>
+            </a:pPr>
+            <a:r>
+              <a:rPr sz="900" b="0">
+                <a:solidFill>
+                  <a:srgbClr val="002855"/>
+                </a:solidFill>
+                <a:latin typeface="Arial"/>
+                <a:ea typeface="Arial"/>
+                <a:cs typeface="Arial"/>
+              </a:rPr>
+              <a:t>wvurail.org/dspira</a:t>
+            </a:r>
+          </a:p>
+        </p:txBody>
+      </p:sp>
+      <p:sp>
+        <p:nvSpPr>
+          <p:cNvPr id="17" name="DSPIRA 5"/>
+          <p:cNvSpPr>
+            <a:spLocks noGrp="1"/>
+          </p:cNvSpPr>
+          <p:nvPr/>
+        </p:nvSpPr>
+        <p:spPr>
+          <a:xfrm>
+            <a:off x="8143875" y="7277100"/>
+            <a:ext cx="762000" cy="228600"/>
+          </a:xfrm>
+          <a:prstGeom prst="rect">
+            <a:avLst/>
+          </a:prstGeom>
+          <a:noFill/>
+          <a:ln w="0">
+            <a:noFill/>
+          </a:ln>
+        </p:spPr>
+        <p:txBody>
+          <a:bodyPr>
+            <a:noAutofit/>
+          </a:bodyPr>
+          <a:lstStyle/>
+          <a:p>
+            <a:pPr>
+              <a:defRPr sz="900" b="0">
+                <a:solidFill>
+                  <a:srgbClr val="002855"/>
+                </a:solidFill>
+                <a:latin typeface="Arial"/>
+                <a:ea typeface="Arial"/>
+                <a:cs typeface="Arial"/>
+              </a:defRPr>
+            </a:pPr>
+            <a:r>
+              <a:rPr sz="900" b="0">
+                <a:solidFill>
+                  <a:srgbClr val="002855"/>
+                </a:solidFill>
+                <a:latin typeface="Arial"/>
+                <a:ea typeface="Arial"/>
+                <a:cs typeface="Arial"/>
+              </a:rPr>
+              <a:t>4 of 10</a:t>
+            </a:r>
           </a:p>
         </p:txBody>
       </p:sp>
@@ -6784,7 +7441,7 @@
         </p:nvSpPr>
         <p:spPr>
           <a:xfrm>
-            <a:off x="6089902" y="643467"/>
+            <a:off x="6089902" y="986367"/>
             <a:ext cx="2568323" cy="5573182"/>
           </a:xfrm>
           <a:prstGeom prst="rect">
@@ -6831,7 +7488,7 @@
         </p:nvSpPr>
         <p:spPr>
           <a:xfrm>
-            <a:off x="6288343" y="996950"/>
+            <a:off x="6288343" y="1339850"/>
             <a:ext cx="2227007" cy="5028490"/>
           </a:xfrm>
         </p:spPr>
@@ -6842,7 +7499,7 @@
           <a:lstStyle/>
           <a:p>
             <a:r>
-              <a:rPr lang="en-US" sz="3700">
+              <a:rPr lang="en-US" sz="2960">
                 <a:solidFill>
                   <a:srgbClr val="FFFFFF"/>
                 </a:solidFill>
@@ -6886,7 +7543,7 @@
                   <a:buNone/>
                 </a:pPr>
                 <a:r>
-                  <a:rPr lang="en-US" sz="1900"/>
+                  <a:rPr lang="en-US" sz="1520"/>
                   <a:t>FT of the sampled signal</a:t>
                 </a:r>
               </a:p>
@@ -6901,7 +7558,7 @@
                     </m:oMathParaPr>
                     <m:oMath xmlns:m="http://schemas.openxmlformats.org/officeDocument/2006/math">
                       <m:r>
-                        <a:rPr lang="en-US" sz="1900" i="1">
+                        <a:rPr lang="en-US" sz="1520" i="1">
                           <a:latin typeface="Cambria Math" panose="02040503050406030204" pitchFamily="18" charset="0"/>
                         </a:rPr>
                         <m:t>𝑥</m:t>
@@ -6909,14 +7566,14 @@
                       <m:d>
                         <m:dPr>
                           <m:ctrlPr>
-                            <a:rPr lang="en-US" sz="1900" i="1">
+                            <a:rPr lang="en-US" sz="1520" i="1">
                               <a:latin typeface="Cambria Math" panose="02040503050406030204" pitchFamily="18" charset="0"/>
                             </a:rPr>
                           </m:ctrlPr>
                         </m:dPr>
                         <m:e>
                           <m:r>
-                            <a:rPr lang="en-US" sz="1900" i="1">
+                            <a:rPr lang="en-US" sz="1520" i="1">
                               <a:latin typeface="Cambria Math" panose="02040503050406030204" pitchFamily="18" charset="0"/>
                             </a:rPr>
                             <m:t>𝑡</m:t>
@@ -6924,7 +7581,7 @@
                         </m:e>
                       </m:d>
                       <m:r>
-                        <a:rPr lang="en-US" sz="1900" i="1">
+                        <a:rPr lang="en-US" sz="1520" i="1">
                           <a:latin typeface="Cambria Math" panose="02040503050406030204" pitchFamily="18" charset="0"/>
                         </a:rPr>
                         <m:t>=</m:t>
@@ -6932,7 +7589,7 @@
                       <m:func>
                         <m:funcPr>
                           <m:ctrlPr>
-                            <a:rPr lang="en-US" sz="1900" i="1">
+                            <a:rPr lang="en-US" sz="1520" i="1">
                               <a:latin typeface="Cambria Math" panose="02040503050406030204" pitchFamily="18" charset="0"/>
                             </a:rPr>
                           </m:ctrlPr>
@@ -6942,7 +7599,7 @@
                             <m:rPr>
                               <m:sty m:val="p"/>
                             </m:rPr>
-                            <a:rPr lang="en-US" sz="1900">
+                            <a:rPr lang="en-US" sz="1520">
                               <a:latin typeface="Cambria Math" panose="02040503050406030204" pitchFamily="18" charset="0"/>
                             </a:rPr>
                             <m:t>cos</m:t>
@@ -6952,20 +7609,20 @@
                           <m:d>
                             <m:dPr>
                               <m:ctrlPr>
-                                <a:rPr lang="en-US" sz="1900" i="1">
+                                <a:rPr lang="en-US" sz="1520" i="1">
                                   <a:latin typeface="Cambria Math" panose="02040503050406030204" pitchFamily="18" charset="0"/>
                                 </a:rPr>
                               </m:ctrlPr>
                             </m:dPr>
                             <m:e>
                               <m:r>
-                                <a:rPr lang="en-US" sz="1900" i="1">
+                                <a:rPr lang="en-US" sz="1520" i="1">
                                   <a:latin typeface="Cambria Math" panose="02040503050406030204" pitchFamily="18" charset="0"/>
                                 </a:rPr>
                                 <m:t>2</m:t>
                               </m:r>
                               <m:r>
-                                <a:rPr lang="en-US" sz="1900" i="1">
+                                <a:rPr lang="en-US" sz="1520" i="1">
                                   <a:latin typeface="Cambria Math" panose="02040503050406030204" pitchFamily="18" charset="0"/>
                                 </a:rPr>
                                 <m:t>𝜋</m:t>
@@ -6974,7 +7631,7 @@
                                 <m:rPr>
                                   <m:sty m:val="p"/>
                                 </m:rPr>
-                                <a:rPr lang="en-US" sz="1900">
+                                <a:rPr lang="en-US" sz="1520">
                                   <a:latin typeface="Cambria Math" panose="02040503050406030204" pitchFamily="18" charset="0"/>
                                 </a:rPr>
                                 <m:t>t</m:t>
@@ -6984,7 +7641,7 @@
                         </m:e>
                       </m:func>
                       <m:r>
-                        <a:rPr lang="en-US" sz="1900">
+                        <a:rPr lang="en-US" sz="1520">
                           <a:latin typeface="Cambria Math" panose="02040503050406030204" pitchFamily="18" charset="0"/>
                         </a:rPr>
                         <m:t>+2</m:t>
@@ -6993,7 +7650,7 @@
                         <m:rPr>
                           <m:sty m:val="p"/>
                         </m:rPr>
-                        <a:rPr lang="en-US" sz="1900">
+                        <a:rPr lang="en-US" sz="1520">
                           <a:latin typeface="Cambria Math" panose="02040503050406030204" pitchFamily="18" charset="0"/>
                         </a:rPr>
                         <m:t>cos</m:t>
@@ -7001,14 +7658,14 @@
                       <m:d>
                         <m:dPr>
                           <m:ctrlPr>
-                            <a:rPr lang="en-US" sz="1900" i="1">
+                            <a:rPr lang="en-US" sz="1520" i="1">
                               <a:latin typeface="Cambria Math" panose="02040503050406030204" pitchFamily="18" charset="0"/>
                             </a:rPr>
                           </m:ctrlPr>
                         </m:dPr>
                         <m:e>
                           <m:r>
-                            <a:rPr lang="en-US" sz="1900">
+                            <a:rPr lang="en-US" sz="1520">
                               <a:latin typeface="Cambria Math" panose="02040503050406030204" pitchFamily="18" charset="0"/>
                             </a:rPr>
                             <m:t>6</m:t>
@@ -7017,13 +7674,13 @@
                             <m:rPr>
                               <m:sty m:val="p"/>
                             </m:rPr>
-                            <a:rPr lang="en-US" sz="1900" i="1">
+                            <a:rPr lang="en-US" sz="1520" i="1">
                               <a:latin typeface="Cambria Math" panose="02040503050406030204" pitchFamily="18" charset="0"/>
                             </a:rPr>
                             <m:t>π</m:t>
                           </m:r>
                           <m:r>
-                            <a:rPr lang="en-US" sz="1900" i="1">
+                            <a:rPr lang="en-US" sz="1520" i="1">
                               <a:latin typeface="Cambria Math" panose="02040503050406030204" pitchFamily="18" charset="0"/>
                             </a:rPr>
                             <m:t>𝑡</m:t>
@@ -7033,14 +7690,14 @@
                     </m:oMath>
                   </m:oMathPara>
                 </a14:m>
-                <a:endParaRPr lang="en-US" sz="1900"/>
+                <a:endParaRPr lang="en-US" sz="1520"/>
               </a:p>
               <a:p>
                 <a:pPr marL="0" indent="0">
                   <a:buNone/>
                 </a:pPr>
                 <a:r>
-                  <a:rPr lang="en-US" sz="1900"/>
+                  <a:rPr lang="en-US" sz="1520"/>
                   <a:t>sampled at the rate </a:t>
                 </a:r>
                 <a14:m>
@@ -7048,14 +7705,14 @@
                     <m:sSub>
                       <m:sSubPr>
                         <m:ctrlPr>
-                          <a:rPr lang="en-US" sz="1900" i="1">
+                          <a:rPr lang="en-US" sz="1520" i="1">
                             <a:latin typeface="Cambria Math" panose="02040503050406030204" pitchFamily="18" charset="0"/>
                           </a:rPr>
                         </m:ctrlPr>
                       </m:sSubPr>
                       <m:e>
                         <m:r>
-                          <a:rPr lang="en-US" sz="1900" b="0" i="1">
+                          <a:rPr lang="en-US" sz="1520" b="0" i="1">
                             <a:latin typeface="Cambria Math" panose="02040503050406030204" pitchFamily="18" charset="0"/>
                           </a:rPr>
                           <m:t>𝑓</m:t>
@@ -7063,7 +7720,7 @@
                       </m:e>
                       <m:sub>
                         <m:r>
-                          <a:rPr lang="en-US" sz="1900" b="0" i="1">
+                          <a:rPr lang="en-US" sz="1520" b="0" i="1">
                             <a:latin typeface="Cambria Math" panose="02040503050406030204" pitchFamily="18" charset="0"/>
                           </a:rPr>
                           <m:t>𝑠</m:t>
@@ -7071,7 +7728,7 @@
                       </m:sub>
                     </m:sSub>
                     <m:r>
-                      <a:rPr lang="en-US" sz="1900" b="0" i="1">
+                      <a:rPr lang="en-US" sz="1520" b="0" i="1">
                         <a:latin typeface="Cambria Math" panose="02040503050406030204" pitchFamily="18" charset="0"/>
                       </a:rPr>
                       <m:t>=8</m:t>
@@ -7079,7 +7736,7 @@
                   </m:oMath>
                 </a14:m>
                 <a:r>
-                  <a:rPr lang="en-US" sz="1900"/>
+                  <a:rPr lang="en-US" sz="1520"/>
                   <a:t> Hz is </a:t>
                 </a:r>
               </a:p>
@@ -7096,14 +7753,14 @@
                       <m:sSub>
                         <m:sSubPr>
                           <m:ctrlPr>
-                            <a:rPr lang="en-US" sz="1900" i="1">
+                            <a:rPr lang="en-US" sz="1520" i="1">
                               <a:latin typeface="Cambria Math" panose="02040503050406030204" pitchFamily="18" charset="0"/>
                             </a:rPr>
                           </m:ctrlPr>
                         </m:sSubPr>
                         <m:e>
                           <m:r>
-                            <a:rPr lang="en-US" sz="1900" b="0" i="1">
+                            <a:rPr lang="en-US" sz="1520" b="0" i="1">
                               <a:latin typeface="Cambria Math" panose="02040503050406030204" pitchFamily="18" charset="0"/>
                             </a:rPr>
                             <m:t>𝑋</m:t>
@@ -7111,7 +7768,7 @@
                         </m:e>
                         <m:sub>
                           <m:r>
-                            <a:rPr lang="en-US" sz="1900" b="0" i="1">
+                            <a:rPr lang="en-US" sz="1520" b="0" i="1">
                               <a:latin typeface="Cambria Math" panose="02040503050406030204" pitchFamily="18" charset="0"/>
                             </a:rPr>
                             <m:t>𝑠</m:t>
@@ -7121,14 +7778,14 @@
                       <m:d>
                         <m:dPr>
                           <m:ctrlPr>
-                            <a:rPr lang="en-US" sz="1900" b="0" i="1">
+                            <a:rPr lang="en-US" sz="1520" b="0" i="1">
                               <a:latin typeface="Cambria Math" panose="02040503050406030204" pitchFamily="18" charset="0"/>
                             </a:rPr>
                           </m:ctrlPr>
                         </m:dPr>
                         <m:e>
                           <m:r>
-                            <a:rPr lang="en-US" sz="1900" b="0" i="1">
+                            <a:rPr lang="en-US" sz="1520" b="0" i="1">
                               <a:latin typeface="Cambria Math" panose="02040503050406030204" pitchFamily="18" charset="0"/>
                             </a:rPr>
                             <m:t>𝑓</m:t>
@@ -7136,7 +7793,7 @@
                         </m:e>
                       </m:d>
                       <m:r>
-                        <a:rPr lang="en-US" sz="1900" b="0" i="1">
+                        <a:rPr lang="en-US" sz="1520" b="0" i="1">
                           <a:latin typeface="Cambria Math" panose="02040503050406030204" pitchFamily="18" charset="0"/>
                         </a:rPr>
                         <m:t>=</m:t>
@@ -7145,7 +7802,7 @@
                         <m:naryPr>
                           <m:chr m:val="∑"/>
                           <m:ctrlPr>
-                            <a:rPr lang="en-US" sz="1900" b="0" i="1">
+                            <a:rPr lang="en-US" sz="1520" b="0" i="1">
                               <a:latin typeface="Cambria Math" panose="02040503050406030204" pitchFamily="18" charset="0"/>
                             </a:rPr>
                           </m:ctrlPr>
@@ -7155,13 +7812,13 @@
                             <m:rPr>
                               <m:brk m:alnAt="23"/>
                             </m:rPr>
-                            <a:rPr lang="en-US" sz="1900" b="0" i="1">
+                            <a:rPr lang="en-US" sz="1520" b="0" i="1">
                               <a:latin typeface="Cambria Math" panose="02040503050406030204" pitchFamily="18" charset="0"/>
                             </a:rPr>
                             <m:t>𝑘</m:t>
                           </m:r>
                           <m:r>
-                            <a:rPr lang="en-US" sz="1900" b="0" i="1">
+                            <a:rPr lang="en-US" sz="1520" b="0" i="1">
                               <a:latin typeface="Cambria Math" panose="02040503050406030204" pitchFamily="18" charset="0"/>
                             </a:rPr>
                             <m:t>=−∞</m:t>
@@ -7169,13 +7826,13 @@
                         </m:sub>
                         <m:sup>
                           <m:r>
-                            <a:rPr lang="en-US" sz="1900" b="0" i="1">
+                            <a:rPr lang="en-US" sz="1520" b="0" i="1">
                               <a:latin typeface="Cambria Math" panose="02040503050406030204" pitchFamily="18" charset="0"/>
                             </a:rPr>
                             <m:t>+</m:t>
                           </m:r>
                           <m:r>
-                            <a:rPr lang="en-US" sz="1900" b="0" i="1">
+                            <a:rPr lang="en-US" sz="1520" b="0" i="1">
                               <a:latin typeface="Cambria Math" panose="02040503050406030204" pitchFamily="18" charset="0"/>
                               <a:ea typeface="Cambria Math" panose="02040503050406030204" pitchFamily="18" charset="0"/>
                             </a:rPr>
@@ -7186,20 +7843,20 @@
                           <m:d>
                             <m:dPr>
                               <m:ctrlPr>
-                                <a:rPr lang="en-US" sz="1900" b="0" i="1">
+                                <a:rPr lang="en-US" sz="1520" b="0" i="1">
                                   <a:latin typeface="Cambria Math" panose="02040503050406030204" pitchFamily="18" charset="0"/>
                                 </a:rPr>
                               </m:ctrlPr>
                             </m:dPr>
                             <m:e>
                               <m:r>
-                                <a:rPr lang="en-US" sz="1900" b="0" i="1">
+                                <a:rPr lang="en-US" sz="1520" b="0" i="1">
                                   <a:latin typeface="Cambria Math" panose="02040503050406030204" pitchFamily="18" charset="0"/>
                                 </a:rPr>
                                 <m:t>4</m:t>
                               </m:r>
                               <m:r>
-                                <a:rPr lang="en-US" sz="1900" i="1">
+                                <a:rPr lang="en-US" sz="1520" i="1">
                                   <a:latin typeface="Cambria Math" panose="02040503050406030204" pitchFamily="18" charset="0"/>
                                 </a:rPr>
                                 <m:t>𝛿</m:t>
@@ -7207,32 +7864,32 @@
                               <m:d>
                                 <m:dPr>
                                   <m:ctrlPr>
-                                    <a:rPr lang="en-US" sz="1900" i="1">
+                                    <a:rPr lang="en-US" sz="1520" i="1">
                                       <a:latin typeface="Cambria Math" panose="02040503050406030204" pitchFamily="18" charset="0"/>
                                     </a:rPr>
                                   </m:ctrlPr>
                                 </m:dPr>
                                 <m:e>
                                   <m:r>
-                                    <a:rPr lang="en-US" sz="1900" i="1">
+                                    <a:rPr lang="en-US" sz="1520" i="1">
                                       <a:latin typeface="Cambria Math" panose="02040503050406030204" pitchFamily="18" charset="0"/>
                                     </a:rPr>
                                     <m:t>𝑓</m:t>
                                   </m:r>
                                   <m:r>
-                                    <a:rPr lang="en-US" sz="1900" i="1">
+                                    <a:rPr lang="en-US" sz="1520" i="1">
                                       <a:latin typeface="Cambria Math" panose="02040503050406030204" pitchFamily="18" charset="0"/>
                                     </a:rPr>
                                     <m:t>±1−</m:t>
                                   </m:r>
                                   <m:r>
-                                    <a:rPr lang="en-US" sz="1900" b="0" i="1">
+                                    <a:rPr lang="en-US" sz="1520" b="0" i="1">
                                       <a:latin typeface="Cambria Math" panose="02040503050406030204" pitchFamily="18" charset="0"/>
                                     </a:rPr>
                                     <m:t>𝑘</m:t>
                                   </m:r>
                                   <m:r>
-                                    <a:rPr lang="en-US" sz="1900" b="0" i="1">
+                                    <a:rPr lang="en-US" sz="1520" b="0" i="1">
                                       <a:latin typeface="Cambria Math" panose="02040503050406030204" pitchFamily="18" charset="0"/>
                                     </a:rPr>
                                     <m:t>8</m:t>
@@ -7240,19 +7897,19 @@
                                 </m:e>
                               </m:d>
                               <m:r>
-                                <a:rPr lang="en-US" sz="1900" i="1">
+                                <a:rPr lang="en-US" sz="1520" i="1">
                                   <a:latin typeface="Cambria Math" panose="02040503050406030204" pitchFamily="18" charset="0"/>
                                 </a:rPr>
                                 <m:t>+</m:t>
                               </m:r>
                               <m:r>
-                                <a:rPr lang="en-US" sz="1900" b="0" i="1">
+                                <a:rPr lang="en-US" sz="1520" b="0" i="1">
                                   <a:latin typeface="Cambria Math" panose="02040503050406030204" pitchFamily="18" charset="0"/>
                                 </a:rPr>
                                 <m:t>8</m:t>
                               </m:r>
                               <m:r>
-                                <a:rPr lang="en-US" sz="1900" i="1">
+                                <a:rPr lang="en-US" sz="1520" i="1">
                                   <a:latin typeface="Cambria Math" panose="02040503050406030204" pitchFamily="18" charset="0"/>
                                 </a:rPr>
                                 <m:t>𝛿</m:t>
@@ -7260,32 +7917,32 @@
                               <m:d>
                                 <m:dPr>
                                   <m:ctrlPr>
-                                    <a:rPr lang="en-US" sz="1900" i="1">
+                                    <a:rPr lang="en-US" sz="1520" i="1">
                                       <a:latin typeface="Cambria Math" panose="02040503050406030204" pitchFamily="18" charset="0"/>
                                     </a:rPr>
                                   </m:ctrlPr>
                                 </m:dPr>
                                 <m:e>
                                   <m:r>
-                                    <a:rPr lang="en-US" sz="1900" i="1">
+                                    <a:rPr lang="en-US" sz="1520" i="1">
                                       <a:latin typeface="Cambria Math" panose="02040503050406030204" pitchFamily="18" charset="0"/>
                                     </a:rPr>
                                     <m:t>𝑓</m:t>
                                   </m:r>
                                   <m:r>
-                                    <a:rPr lang="en-US" sz="1900" i="1">
+                                    <a:rPr lang="en-US" sz="1520" i="1">
                                       <a:latin typeface="Cambria Math" panose="02040503050406030204" pitchFamily="18" charset="0"/>
                                     </a:rPr>
                                     <m:t>±3−</m:t>
                                   </m:r>
                                   <m:r>
-                                    <a:rPr lang="en-US" sz="1900" b="0" i="1">
+                                    <a:rPr lang="en-US" sz="1520" b="0" i="1">
                                       <a:latin typeface="Cambria Math" panose="02040503050406030204" pitchFamily="18" charset="0"/>
                                     </a:rPr>
                                     <m:t>𝑘</m:t>
                                   </m:r>
                                   <m:r>
-                                    <a:rPr lang="en-US" sz="1900" b="0" i="1">
+                                    <a:rPr lang="en-US" sz="1520" b="0" i="1">
                                       <a:latin typeface="Cambria Math" panose="02040503050406030204" pitchFamily="18" charset="0"/>
                                     </a:rPr>
                                     <m:t>8</m:t>
@@ -7299,7 +7956,7 @@
                     </m:oMath>
                   </m:oMathPara>
                 </a14:m>
-                <a:endParaRPr lang="en-US" sz="1900"/>
+                <a:endParaRPr lang="en-US" sz="1520"/>
               </a:p>
             </p:txBody>
           </p:sp>
@@ -7370,7 +8027,7 @@
         </p:blipFill>
         <p:spPr>
           <a:xfrm>
-            <a:off x="610754" y="1233656"/>
+            <a:off x="610754" y="1576556"/>
             <a:ext cx="5040237" cy="1927948"/>
           </a:xfrm>
           <a:prstGeom prst="rect">
@@ -7396,7 +8053,7 @@
         </p:nvSpPr>
         <p:spPr>
           <a:xfrm>
-            <a:off x="6224587" y="6356350"/>
+            <a:off x="6224587" y="6699250"/>
             <a:ext cx="1631950" cy="365125"/>
           </a:xfrm>
         </p:spPr>
@@ -7412,7 +8069,7 @@
               </a:spcAft>
             </a:pPr>
             <a:r>
-              <a:rPr lang="en-US" sz="1000">
+              <a:rPr lang="en-US" sz="800">
                 <a:solidFill>
                   <a:prstClr val="black">
                     <a:tint val="75000"/>
@@ -7442,7 +8099,7 @@
         </p:nvSpPr>
         <p:spPr>
           <a:xfrm>
-            <a:off x="482600" y="6356350"/>
+            <a:off x="482600" y="6699250"/>
             <a:ext cx="5265737" cy="365125"/>
           </a:xfrm>
         </p:spPr>
@@ -7458,7 +8115,7 @@
               </a:spcAft>
             </a:pPr>
             <a:r>
-              <a:rPr lang="en-US" sz="1000">
+              <a:rPr lang="en-US" sz="800">
                 <a:solidFill>
                   <a:prstClr val="black">
                     <a:tint val="75000"/>
@@ -7472,59 +8129,202 @@
       </p:sp>
       <p:sp>
         <p:nvSpPr>
-          <p:cNvPr id="6" name="Slide Number Placeholder 5">
-            <a:extLst>
-              <a:ext uri="{FF2B5EF4-FFF2-40B4-BE49-F238E27FC236}">
-                <a16:creationId xmlns:a16="http://schemas.microsoft.com/office/drawing/2014/main" id="{1F091D66-090B-4FD2-B13B-829B242CD03A}"/>
-              </a:ext>
-            </a:extLst>
-          </p:cNvPr>
+          <p:cNvPr id="25" name="DSPIRA 1"/>
           <p:cNvSpPr>
             <a:spLocks noGrp="1"/>
           </p:cNvSpPr>
-          <p:nvPr>
-            <p:ph type="sldNum" sz="quarter" idx="12"/>
-          </p:nvPr>
-        </p:nvSpPr>
-        <p:spPr>
-          <a:xfrm>
-            <a:off x="7977187" y="6356350"/>
-            <a:ext cx="538163" cy="365125"/>
-          </a:xfrm>
+          <p:nvPr/>
+        </p:nvSpPr>
+        <p:spPr>
+          <a:xfrm>
+            <a:off x="0" y="0"/>
+            <a:ext cx="9144000" cy="342900"/>
+          </a:xfrm>
+          <a:prstGeom prst="rect">
+            <a:avLst/>
+          </a:prstGeom>
+          <a:solidFill>
+            <a:srgbClr val="FFFFFF"/>
+          </a:solidFill>
+          <a:ln w="0">
+            <a:noFill/>
+          </a:ln>
+        </p:spPr>
+      </p:sp>
+      <p:sp>
+        <p:nvSpPr>
+          <p:cNvPr id="26" name="DSPIRA 2"/>
+          <p:cNvSpPr>
+            <a:spLocks noGrp="1"/>
+          </p:cNvSpPr>
+          <p:nvPr/>
+        </p:nvSpPr>
+        <p:spPr>
+          <a:xfrm>
+            <a:off x="0" y="7200900"/>
+            <a:ext cx="9144000" cy="342900"/>
+          </a:xfrm>
+          <a:prstGeom prst="rect">
+            <a:avLst/>
+          </a:prstGeom>
+          <a:solidFill>
+            <a:srgbClr val="FFFFFF"/>
+          </a:solidFill>
+          <a:ln w="0">
+            <a:noFill/>
+          </a:ln>
+        </p:spPr>
+      </p:sp>
+      <p:sp>
+        <p:nvSpPr>
+          <p:cNvPr id="27" name="DSPIRA 3"/>
+          <p:cNvSpPr>
+            <a:spLocks noGrp="1"/>
+          </p:cNvSpPr>
+          <p:nvPr/>
+        </p:nvSpPr>
+        <p:spPr>
+          <a:xfrm>
+            <a:off x="228600" y="76200"/>
+            <a:ext cx="4762500" cy="228600"/>
+          </a:xfrm>
+          <a:prstGeom prst="rect">
+            <a:avLst/>
+          </a:prstGeom>
+          <a:noFill/>
+          <a:ln w="0">
+            <a:noFill/>
+          </a:ln>
         </p:spPr>
         <p:txBody>
           <a:bodyPr>
-            <a:normAutofit/>
+            <a:noAutofit/>
           </a:bodyPr>
           <a:lstStyle/>
           <a:p>
             <a:pPr>
-              <a:spcAft>
-                <a:spcPts val="600"/>
-              </a:spcAft>
+              <a:defRPr sz="1200" b="1">
+                <a:solidFill>
+                  <a:srgbClr val="002855"/>
+                </a:solidFill>
+                <a:latin typeface="Arial"/>
+                <a:ea typeface="Arial"/>
+                <a:cs typeface="Arial"/>
+              </a:defRPr>
             </a:pPr>
-            <a:fld id="{B6F15528-21DE-4FAA-801E-634DDDAF4B2B}" type="slidenum">
-              <a:rPr lang="en-US" sz="1000">
+            <a:r>
+              <a:rPr sz="1200" b="1">
                 <a:solidFill>
-                  <a:prstClr val="black">
-                    <a:tint val="75000"/>
-                  </a:prstClr>
+                  <a:srgbClr val="002855"/>
                 </a:solidFill>
+                <a:latin typeface="Arial"/>
+                <a:ea typeface="Arial"/>
+                <a:cs typeface="Arial"/>
               </a:rPr>
-              <a:pPr>
-                <a:spcAft>
-                  <a:spcPts val="600"/>
-                </a:spcAft>
-              </a:pPr>
-              <a:t>5</a:t>
-            </a:fld>
-            <a:endParaRPr lang="en-US" sz="1000">
-              <a:solidFill>
-                <a:prstClr val="black">
-                  <a:tint val="75000"/>
-                </a:prstClr>
-              </a:solidFill>
-            </a:endParaRPr>
+              <a:t>WVU DSPIRA</a:t>
+            </a:r>
+          </a:p>
+        </p:txBody>
+      </p:sp>
+      <p:sp>
+        <p:nvSpPr>
+          <p:cNvPr id="28" name="DSPIRA 4"/>
+          <p:cNvSpPr>
+            <a:spLocks noGrp="1"/>
+          </p:cNvSpPr>
+          <p:nvPr/>
+        </p:nvSpPr>
+        <p:spPr>
+          <a:xfrm>
+            <a:off x="228600" y="7277100"/>
+            <a:ext cx="6667500" cy="228600"/>
+          </a:xfrm>
+          <a:prstGeom prst="rect">
+            <a:avLst/>
+          </a:prstGeom>
+          <a:noFill/>
+          <a:ln w="0">
+            <a:noFill/>
+          </a:ln>
+        </p:spPr>
+        <p:txBody>
+          <a:bodyPr>
+            <a:noAutofit/>
+          </a:bodyPr>
+          <a:lstStyle/>
+          <a:p>
+            <a:pPr>
+              <a:defRPr sz="900" b="0">
+                <a:solidFill>
+                  <a:srgbClr val="002855"/>
+                </a:solidFill>
+                <a:latin typeface="Arial"/>
+                <a:ea typeface="Arial"/>
+                <a:cs typeface="Arial"/>
+              </a:defRPr>
+            </a:pPr>
+            <a:r>
+              <a:rPr sz="900" b="0">
+                <a:solidFill>
+                  <a:srgbClr val="002855"/>
+                </a:solidFill>
+                <a:latin typeface="Arial"/>
+                <a:ea typeface="Arial"/>
+                <a:cs typeface="Arial"/>
+              </a:rPr>
+              <a:t>wvurail.org/dspira</a:t>
+            </a:r>
+          </a:p>
+        </p:txBody>
+      </p:sp>
+      <p:sp>
+        <p:nvSpPr>
+          <p:cNvPr id="29" name="DSPIRA 5"/>
+          <p:cNvSpPr>
+            <a:spLocks noGrp="1"/>
+          </p:cNvSpPr>
+          <p:nvPr/>
+        </p:nvSpPr>
+        <p:spPr>
+          <a:xfrm>
+            <a:off x="8143875" y="7277100"/>
+            <a:ext cx="762000" cy="228600"/>
+          </a:xfrm>
+          <a:prstGeom prst="rect">
+            <a:avLst/>
+          </a:prstGeom>
+          <a:noFill/>
+          <a:ln w="0">
+            <a:noFill/>
+          </a:ln>
+        </p:spPr>
+        <p:txBody>
+          <a:bodyPr>
+            <a:noAutofit/>
+          </a:bodyPr>
+          <a:lstStyle/>
+          <a:p>
+            <a:pPr>
+              <a:defRPr sz="900" b="0">
+                <a:solidFill>
+                  <a:srgbClr val="002855"/>
+                </a:solidFill>
+                <a:latin typeface="Arial"/>
+                <a:ea typeface="Arial"/>
+                <a:cs typeface="Arial"/>
+              </a:defRPr>
+            </a:pPr>
+            <a:r>
+              <a:rPr sz="900" b="0">
+                <a:solidFill>
+                  <a:srgbClr val="002855"/>
+                </a:solidFill>
+                <a:latin typeface="Arial"/>
+                <a:ea typeface="Arial"/>
+                <a:cs typeface="Arial"/>
+              </a:rPr>
+              <a:t>5 of 10</a:t>
+            </a:r>
           </a:p>
         </p:txBody>
       </p:sp>
@@ -7570,7 +8370,7 @@
         </p:nvSpPr>
         <p:spPr>
           <a:xfrm>
-            <a:off x="457200" y="228600"/>
+            <a:off x="457200" y="571500"/>
             <a:ext cx="8229600" cy="1143000"/>
           </a:xfrm>
         </p:spPr>
@@ -7609,7 +8409,7 @@
         </p:nvSpPr>
         <p:spPr>
           <a:xfrm>
-            <a:off x="152400" y="1981200"/>
+            <a:off x="152400" y="2324100"/>
             <a:ext cx="2743200" cy="2667000"/>
           </a:xfrm>
         </p:spPr>
@@ -7620,13 +8420,13 @@
           <a:lstStyle/>
           <a:p>
             <a:r>
-              <a:rPr lang="en-US" sz="2000" dirty="0"/>
+              <a:rPr lang="en-US" sz="1600" dirty="0"/>
               <a:t>W=1000 is the bandwidth of a band pass signal </a:t>
             </a:r>
           </a:p>
           <a:p>
             <a:r>
-              <a:rPr lang="en-US" sz="2000" dirty="0"/>
+              <a:rPr lang="en-US" sz="1600" dirty="0"/>
               <a:t>Find the smallest value of sampling rate such that spectral copies do not overlap. </a:t>
             </a:r>
           </a:p>
@@ -7640,7 +8440,7 @@
         </p:nvCxnSpPr>
         <p:spPr>
           <a:xfrm>
-            <a:off x="3429000" y="2590800"/>
+            <a:off x="3429000" y="2933700"/>
             <a:ext cx="5486400" cy="1588"/>
           </a:xfrm>
           <a:prstGeom prst="straightConnector1">
@@ -7676,7 +8476,7 @@
         </p:nvSpPr>
         <p:spPr>
           <a:xfrm>
-            <a:off x="5638800" y="1752600"/>
+            <a:off x="5638800" y="2095500"/>
             <a:ext cx="914400" cy="838200"/>
           </a:xfrm>
           <a:prstGeom prst="triangle">
@@ -7722,7 +8522,7 @@
         </p:nvCxnSpPr>
         <p:spPr>
           <a:xfrm rot="5400000" flipH="1" flipV="1">
-            <a:off x="5373291" y="2095103"/>
+            <a:off x="5373291" y="2438003"/>
             <a:ext cx="1447006" cy="1588"/>
           </a:xfrm>
           <a:prstGeom prst="straightConnector1">
@@ -7758,7 +8558,7 @@
         </p:nvSpPr>
         <p:spPr>
           <a:xfrm>
-            <a:off x="7467600" y="1752600"/>
+            <a:off x="7467600" y="2095500"/>
             <a:ext cx="914400" cy="838200"/>
           </a:xfrm>
           <a:prstGeom prst="triangle">
@@ -7804,7 +8604,7 @@
         </p:nvSpPr>
         <p:spPr>
           <a:xfrm>
-            <a:off x="3810000" y="1752600"/>
+            <a:off x="3810000" y="2095500"/>
             <a:ext cx="914400" cy="838200"/>
           </a:xfrm>
           <a:prstGeom prst="triangle">
@@ -7850,7 +8650,7 @@
         </p:nvSpPr>
         <p:spPr>
           <a:xfrm>
-            <a:off x="5870514" y="2602468"/>
+            <a:off x="5870514" y="2945368"/>
             <a:ext cx="301686" cy="369332"/>
           </a:xfrm>
           <a:prstGeom prst="rect">
@@ -7879,7 +8679,7 @@
         </p:nvSpPr>
         <p:spPr>
           <a:xfrm>
-            <a:off x="7620000" y="2667000"/>
+            <a:off x="7620000" y="3009900"/>
             <a:ext cx="652743" cy="369332"/>
           </a:xfrm>
           <a:prstGeom prst="rect">
@@ -7908,7 +8708,7 @@
         </p:nvSpPr>
         <p:spPr>
           <a:xfrm>
-            <a:off x="3810000" y="2667000"/>
+            <a:off x="3810000" y="3009900"/>
             <a:ext cx="776175" cy="369332"/>
           </a:xfrm>
           <a:prstGeom prst="rect">
@@ -7937,7 +8737,7 @@
         </p:nvSpPr>
         <p:spPr>
           <a:xfrm>
-            <a:off x="3200400" y="1600200"/>
+            <a:off x="3200400" y="1943100"/>
             <a:ext cx="574196" cy="769441"/>
           </a:xfrm>
           <a:prstGeom prst="rect">
@@ -7952,7 +8752,7 @@
           <a:lstStyle/>
           <a:p>
             <a:r>
-              <a:rPr lang="en-US" sz="4400" dirty="0"/>
+              <a:rPr lang="en-US" sz="3520" dirty="0"/>
               <a:t>…</a:t>
             </a:r>
           </a:p>
@@ -7966,7 +8766,7 @@
         </p:nvSpPr>
         <p:spPr>
           <a:xfrm>
-            <a:off x="8341204" y="1600200"/>
+            <a:off x="8341204" y="1943100"/>
             <a:ext cx="574196" cy="769441"/>
           </a:xfrm>
           <a:prstGeom prst="rect">
@@ -7981,7 +8781,7 @@
           <a:lstStyle/>
           <a:p>
             <a:r>
-              <a:rPr lang="en-US" sz="4400" dirty="0"/>
+              <a:rPr lang="en-US" sz="3520" dirty="0"/>
               <a:t>…</a:t>
             </a:r>
           </a:p>
@@ -7995,7 +8795,7 @@
         </p:nvSpPr>
         <p:spPr>
           <a:xfrm>
-            <a:off x="6205257" y="2602468"/>
+            <a:off x="6205257" y="2945368"/>
             <a:ext cx="652743" cy="369332"/>
           </a:xfrm>
           <a:prstGeom prst="rect">
@@ -8024,7 +8824,7 @@
         </p:nvSpPr>
         <p:spPr>
           <a:xfrm>
-            <a:off x="5105400" y="2602468"/>
+            <a:off x="5105400" y="2945368"/>
             <a:ext cx="776175" cy="369332"/>
           </a:xfrm>
           <a:prstGeom prst="rect">
@@ -8053,7 +8853,7 @@
         </p:nvSpPr>
         <p:spPr>
           <a:xfrm>
-            <a:off x="4092266" y="2049959"/>
+            <a:off x="4092266" y="2392859"/>
             <a:ext cx="327334" cy="769441"/>
           </a:xfrm>
           <a:prstGeom prst="rect">
@@ -8068,7 +8868,7 @@
           <a:lstStyle/>
           <a:p>
             <a:r>
-              <a:rPr lang="en-US" sz="4400" dirty="0"/>
+              <a:rPr lang="en-US" sz="3520" dirty="0"/>
               <a:t>.</a:t>
             </a:r>
           </a:p>
@@ -8082,7 +8882,7 @@
         </p:nvSpPr>
         <p:spPr>
           <a:xfrm>
-            <a:off x="7772400" y="2057400"/>
+            <a:off x="7772400" y="2400300"/>
             <a:ext cx="327334" cy="769441"/>
           </a:xfrm>
           <a:prstGeom prst="rect">
@@ -8097,7 +8897,7 @@
           <a:lstStyle/>
           <a:p>
             <a:r>
-              <a:rPr lang="en-US" sz="4400" dirty="0"/>
+              <a:rPr lang="en-US" sz="3520" dirty="0"/>
               <a:t>.</a:t>
             </a:r>
           </a:p>
@@ -8111,7 +8911,7 @@
         </p:nvSpPr>
         <p:spPr>
           <a:xfrm>
-            <a:off x="8559956" y="2662535"/>
+            <a:off x="8559956" y="3005435"/>
             <a:ext cx="279244" cy="461665"/>
           </a:xfrm>
           <a:prstGeom prst="rect">
@@ -8126,7 +8926,7 @@
           <a:lstStyle/>
           <a:p>
             <a:r>
-              <a:rPr lang="en-US" sz="2400" dirty="0"/>
+              <a:rPr lang="en-US" sz="1920" dirty="0"/>
               <a:t>f</a:t>
             </a:r>
           </a:p>
@@ -8140,7 +8940,7 @@
         </p:nvCxnSpPr>
         <p:spPr>
           <a:xfrm>
-            <a:off x="3429000" y="4190206"/>
+            <a:off x="3429000" y="4533106"/>
             <a:ext cx="5486400" cy="1588"/>
           </a:xfrm>
           <a:prstGeom prst="straightConnector1">
@@ -8176,7 +8976,7 @@
         </p:nvSpPr>
         <p:spPr>
           <a:xfrm>
-            <a:off x="5638800" y="3352006"/>
+            <a:off x="5638800" y="3694906"/>
             <a:ext cx="914400" cy="838200"/>
           </a:xfrm>
           <a:prstGeom prst="triangle">
@@ -8222,7 +9022,7 @@
         </p:nvCxnSpPr>
         <p:spPr>
           <a:xfrm rot="5400000" flipH="1" flipV="1">
-            <a:off x="5373291" y="3694509"/>
+            <a:off x="5373291" y="4037409"/>
             <a:ext cx="1447006" cy="1588"/>
           </a:xfrm>
           <a:prstGeom prst="straightConnector1">
@@ -8258,7 +9058,7 @@
         </p:nvSpPr>
         <p:spPr>
           <a:xfrm>
-            <a:off x="7467600" y="3352006"/>
+            <a:off x="7467600" y="3694906"/>
             <a:ext cx="914400" cy="838200"/>
           </a:xfrm>
           <a:prstGeom prst="triangle">
@@ -8304,7 +9104,7 @@
         </p:nvSpPr>
         <p:spPr>
           <a:xfrm>
-            <a:off x="3810000" y="3352006"/>
+            <a:off x="3810000" y="3694906"/>
             <a:ext cx="914400" cy="838200"/>
           </a:xfrm>
           <a:prstGeom prst="triangle">
@@ -8350,7 +9150,7 @@
         </p:nvSpPr>
         <p:spPr>
           <a:xfrm>
-            <a:off x="5870514" y="4201874"/>
+            <a:off x="5870514" y="4544774"/>
             <a:ext cx="301686" cy="369332"/>
           </a:xfrm>
           <a:prstGeom prst="rect">
@@ -8379,7 +9179,7 @@
         </p:nvSpPr>
         <p:spPr>
           <a:xfrm>
-            <a:off x="6662457" y="4202668"/>
+            <a:off x="6662457" y="4545568"/>
             <a:ext cx="652743" cy="369332"/>
           </a:xfrm>
           <a:prstGeom prst="rect">
@@ -8408,7 +9208,7 @@
         </p:nvSpPr>
         <p:spPr>
           <a:xfrm>
-            <a:off x="4786425" y="4202668"/>
+            <a:off x="4786425" y="4545568"/>
             <a:ext cx="776175" cy="369332"/>
           </a:xfrm>
           <a:prstGeom prst="rect">
@@ -8437,7 +9237,7 @@
         </p:nvSpPr>
         <p:spPr>
           <a:xfrm>
-            <a:off x="3200400" y="3199606"/>
+            <a:off x="3200400" y="3542506"/>
             <a:ext cx="574196" cy="769441"/>
           </a:xfrm>
           <a:prstGeom prst="rect">
@@ -8452,7 +9252,7 @@
           <a:lstStyle/>
           <a:p>
             <a:r>
-              <a:rPr lang="en-US" sz="4400" dirty="0"/>
+              <a:rPr lang="en-US" sz="3520" dirty="0"/>
               <a:t>…</a:t>
             </a:r>
           </a:p>
@@ -8466,7 +9266,7 @@
         </p:nvSpPr>
         <p:spPr>
           <a:xfrm>
-            <a:off x="8341204" y="3199606"/>
+            <a:off x="8341204" y="3542506"/>
             <a:ext cx="574196" cy="769441"/>
           </a:xfrm>
           <a:prstGeom prst="rect">
@@ -8481,7 +9281,7 @@
           <a:lstStyle/>
           <a:p>
             <a:r>
-              <a:rPr lang="en-US" sz="4400" dirty="0"/>
+              <a:rPr lang="en-US" sz="3520" dirty="0"/>
               <a:t>…</a:t>
             </a:r>
           </a:p>
@@ -8495,7 +9295,7 @@
         </p:nvSpPr>
         <p:spPr>
           <a:xfrm>
-            <a:off x="4092266" y="3649365"/>
+            <a:off x="4092266" y="3992265"/>
             <a:ext cx="327334" cy="769441"/>
           </a:xfrm>
           <a:prstGeom prst="rect">
@@ -8510,7 +9310,7 @@
           <a:lstStyle/>
           <a:p>
             <a:r>
-              <a:rPr lang="en-US" sz="4400" dirty="0"/>
+              <a:rPr lang="en-US" sz="3520" dirty="0"/>
               <a:t>.</a:t>
             </a:r>
           </a:p>
@@ -8524,7 +9324,7 @@
         </p:nvSpPr>
         <p:spPr>
           <a:xfrm>
-            <a:off x="7772400" y="3656806"/>
+            <a:off x="7772400" y="3999706"/>
             <a:ext cx="327334" cy="769441"/>
           </a:xfrm>
           <a:prstGeom prst="rect">
@@ -8539,7 +9339,7 @@
           <a:lstStyle/>
           <a:p>
             <a:r>
-              <a:rPr lang="en-US" sz="4400" dirty="0"/>
+              <a:rPr lang="en-US" sz="3520" dirty="0"/>
               <a:t>.</a:t>
             </a:r>
           </a:p>
@@ -8553,7 +9353,7 @@
         </p:nvSpPr>
         <p:spPr>
           <a:xfrm>
-            <a:off x="8559956" y="4261941"/>
+            <a:off x="8559956" y="4604841"/>
             <a:ext cx="279244" cy="461665"/>
           </a:xfrm>
           <a:prstGeom prst="rect">
@@ -8568,7 +9368,7 @@
           <a:lstStyle/>
           <a:p>
             <a:r>
-              <a:rPr lang="en-US" sz="2400" dirty="0"/>
+              <a:rPr lang="en-US" sz="1920" dirty="0"/>
               <a:t>f</a:t>
             </a:r>
           </a:p>
@@ -8582,7 +9382,7 @@
         </p:nvSpPr>
         <p:spPr>
           <a:xfrm>
-            <a:off x="4724400" y="3352800"/>
+            <a:off x="4724400" y="3695700"/>
             <a:ext cx="914400" cy="838200"/>
           </a:xfrm>
           <a:prstGeom prst="triangle">
@@ -8628,7 +9428,7 @@
         </p:nvSpPr>
         <p:spPr>
           <a:xfrm>
-            <a:off x="6553200" y="3352800"/>
+            <a:off x="6553200" y="3695700"/>
             <a:ext cx="914400" cy="838200"/>
           </a:xfrm>
           <a:prstGeom prst="triangle">
@@ -8674,7 +9474,7 @@
         </p:nvSpPr>
         <p:spPr>
           <a:xfrm>
-            <a:off x="5006666" y="3657600"/>
+            <a:off x="5006666" y="4000500"/>
             <a:ext cx="327334" cy="769441"/>
           </a:xfrm>
           <a:prstGeom prst="rect">
@@ -8689,7 +9489,7 @@
           <a:lstStyle/>
           <a:p>
             <a:r>
-              <a:rPr lang="en-US" sz="4400" dirty="0"/>
+              <a:rPr lang="en-US" sz="3520" dirty="0"/>
               <a:t>.</a:t>
             </a:r>
           </a:p>
@@ -8703,7 +9503,7 @@
         </p:nvSpPr>
         <p:spPr>
           <a:xfrm>
-            <a:off x="6835466" y="3657600"/>
+            <a:off x="6835466" y="4000500"/>
             <a:ext cx="327334" cy="769441"/>
           </a:xfrm>
           <a:prstGeom prst="rect">
@@ -8718,7 +9518,7 @@
           <a:lstStyle/>
           <a:p>
             <a:r>
-              <a:rPr lang="en-US" sz="4400" dirty="0"/>
+              <a:rPr lang="en-US" sz="3520" dirty="0"/>
               <a:t>.</a:t>
             </a:r>
           </a:p>
@@ -8732,7 +9532,7 @@
         </p:nvCxnSpPr>
         <p:spPr>
           <a:xfrm>
-            <a:off x="3429000" y="5955268"/>
+            <a:off x="3429000" y="6298168"/>
             <a:ext cx="5486400" cy="1588"/>
           </a:xfrm>
           <a:prstGeom prst="straightConnector1">
@@ -8768,7 +9568,7 @@
         </p:nvSpPr>
         <p:spPr>
           <a:xfrm>
-            <a:off x="5638800" y="5117068"/>
+            <a:off x="5638800" y="5459968"/>
             <a:ext cx="914400" cy="838200"/>
           </a:xfrm>
           <a:prstGeom prst="triangle">
@@ -8814,7 +9614,7 @@
         </p:nvCxnSpPr>
         <p:spPr>
           <a:xfrm rot="5400000" flipH="1" flipV="1">
-            <a:off x="5373291" y="5459571"/>
+            <a:off x="5373291" y="5802471"/>
             <a:ext cx="1447006" cy="1588"/>
           </a:xfrm>
           <a:prstGeom prst="straightConnector1">
@@ -8850,7 +9650,7 @@
         </p:nvSpPr>
         <p:spPr>
           <a:xfrm>
-            <a:off x="7467600" y="5117068"/>
+            <a:off x="7467600" y="5459968"/>
             <a:ext cx="914400" cy="838200"/>
           </a:xfrm>
           <a:prstGeom prst="triangle">
@@ -8896,7 +9696,7 @@
         </p:nvSpPr>
         <p:spPr>
           <a:xfrm>
-            <a:off x="3810000" y="5117068"/>
+            <a:off x="3810000" y="5459968"/>
             <a:ext cx="914400" cy="838200"/>
           </a:xfrm>
           <a:prstGeom prst="triangle">
@@ -8942,7 +9742,7 @@
         </p:nvSpPr>
         <p:spPr>
           <a:xfrm>
-            <a:off x="5870514" y="5966936"/>
+            <a:off x="5870514" y="6309836"/>
             <a:ext cx="301686" cy="369332"/>
           </a:xfrm>
           <a:prstGeom prst="rect">
@@ -8971,7 +9771,7 @@
         </p:nvSpPr>
         <p:spPr>
           <a:xfrm>
-            <a:off x="3200400" y="4964668"/>
+            <a:off x="3200400" y="5307568"/>
             <a:ext cx="574196" cy="769441"/>
           </a:xfrm>
           <a:prstGeom prst="rect">
@@ -8986,7 +9786,7 @@
           <a:lstStyle/>
           <a:p>
             <a:r>
-              <a:rPr lang="en-US" sz="4400" dirty="0"/>
+              <a:rPr lang="en-US" sz="3520" dirty="0"/>
               <a:t>…</a:t>
             </a:r>
           </a:p>
@@ -9000,7 +9800,7 @@
         </p:nvSpPr>
         <p:spPr>
           <a:xfrm>
-            <a:off x="8341204" y="4964668"/>
+            <a:off x="8341204" y="5307568"/>
             <a:ext cx="574196" cy="769441"/>
           </a:xfrm>
           <a:prstGeom prst="rect">
@@ -9015,7 +9815,7 @@
           <a:lstStyle/>
           <a:p>
             <a:r>
-              <a:rPr lang="en-US" sz="4400" dirty="0"/>
+              <a:rPr lang="en-US" sz="3520" dirty="0"/>
               <a:t>…</a:t>
             </a:r>
           </a:p>
@@ -9029,7 +9829,7 @@
         </p:nvSpPr>
         <p:spPr>
           <a:xfrm>
-            <a:off x="6205257" y="5966936"/>
+            <a:off x="6205257" y="6309836"/>
             <a:ext cx="652743" cy="369332"/>
           </a:xfrm>
           <a:prstGeom prst="rect">
@@ -9058,7 +9858,7 @@
         </p:nvSpPr>
         <p:spPr>
           <a:xfrm>
-            <a:off x="5105400" y="5966936"/>
+            <a:off x="5105400" y="6309836"/>
             <a:ext cx="776175" cy="369332"/>
           </a:xfrm>
           <a:prstGeom prst="rect">
@@ -9087,7 +9887,7 @@
         </p:nvSpPr>
         <p:spPr>
           <a:xfrm>
-            <a:off x="4092266" y="5414427"/>
+            <a:off x="4092266" y="5757327"/>
             <a:ext cx="327334" cy="769441"/>
           </a:xfrm>
           <a:prstGeom prst="rect">
@@ -9102,7 +9902,7 @@
           <a:lstStyle/>
           <a:p>
             <a:r>
-              <a:rPr lang="en-US" sz="4400" dirty="0"/>
+              <a:rPr lang="en-US" sz="3520" dirty="0"/>
               <a:t>.</a:t>
             </a:r>
           </a:p>
@@ -9116,7 +9916,7 @@
         </p:nvSpPr>
         <p:spPr>
           <a:xfrm>
-            <a:off x="7772400" y="5421868"/>
+            <a:off x="7772400" y="5764768"/>
             <a:ext cx="327334" cy="769441"/>
           </a:xfrm>
           <a:prstGeom prst="rect">
@@ -9131,7 +9931,7 @@
           <a:lstStyle/>
           <a:p>
             <a:r>
-              <a:rPr lang="en-US" sz="4400" dirty="0"/>
+              <a:rPr lang="en-US" sz="3520" dirty="0"/>
               <a:t>.</a:t>
             </a:r>
           </a:p>
@@ -9145,7 +9945,7 @@
         </p:nvSpPr>
         <p:spPr>
           <a:xfrm>
-            <a:off x="6096000" y="5105400"/>
+            <a:off x="6096000" y="5448300"/>
             <a:ext cx="914400" cy="838200"/>
           </a:xfrm>
           <a:prstGeom prst="triangle">
@@ -9191,7 +9991,7 @@
         </p:nvSpPr>
         <p:spPr>
           <a:xfrm>
-            <a:off x="6553200" y="5105400"/>
+            <a:off x="6553200" y="5448300"/>
             <a:ext cx="914400" cy="838200"/>
           </a:xfrm>
           <a:prstGeom prst="triangle">
@@ -9237,7 +10037,7 @@
         </p:nvSpPr>
         <p:spPr>
           <a:xfrm>
-            <a:off x="7010400" y="5105400"/>
+            <a:off x="7010400" y="5448300"/>
             <a:ext cx="914400" cy="838200"/>
           </a:xfrm>
           <a:prstGeom prst="triangle">
@@ -9283,7 +10083,7 @@
         </p:nvSpPr>
         <p:spPr>
           <a:xfrm>
-            <a:off x="5181600" y="5105400"/>
+            <a:off x="5181600" y="5448300"/>
             <a:ext cx="914400" cy="838200"/>
           </a:xfrm>
           <a:prstGeom prst="triangle">
@@ -9329,7 +10129,7 @@
         </p:nvSpPr>
         <p:spPr>
           <a:xfrm>
-            <a:off x="4724400" y="5105400"/>
+            <a:off x="4724400" y="5448300"/>
             <a:ext cx="914400" cy="838200"/>
           </a:xfrm>
           <a:prstGeom prst="triangle">
@@ -9375,7 +10175,7 @@
         </p:nvSpPr>
         <p:spPr>
           <a:xfrm>
-            <a:off x="4267200" y="5105400"/>
+            <a:off x="4267200" y="5448300"/>
             <a:ext cx="914400" cy="838200"/>
           </a:xfrm>
           <a:prstGeom prst="triangle">
@@ -9424,7 +10224,7 @@
         </p:nvCxnSpPr>
         <p:spPr>
           <a:xfrm rot="16200000" flipH="1">
-            <a:off x="6504696" y="4087867"/>
+            <a:off x="6504696" y="4430767"/>
             <a:ext cx="794" cy="967472"/>
           </a:xfrm>
           <a:prstGeom prst="straightConnector1">
@@ -9461,7 +10261,7 @@
         </p:nvSpPr>
         <p:spPr>
           <a:xfrm>
-            <a:off x="6172200" y="4572000"/>
+            <a:off x="6172200" y="4914900"/>
             <a:ext cx="686406" cy="523220"/>
           </a:xfrm>
           <a:prstGeom prst="rect">
@@ -9479,7 +10279,7 @@
           <a:lstStyle/>
           <a:p>
             <a:r>
-              <a:rPr lang="en-US" sz="2800" b="1" dirty="0">
+              <a:rPr lang="en-US" sz="2240" b="1" dirty="0">
                 <a:solidFill>
                   <a:srgbClr val="FF0000"/>
                 </a:solidFill>
@@ -9491,25 +10291,202 @@
       </p:sp>
       <p:sp>
         <p:nvSpPr>
-          <p:cNvPr id="93" name="Slide Number Placeholder 92"/>
+          <p:cNvPr id="92" name="DSPIRA 1"/>
           <p:cNvSpPr>
             <a:spLocks noGrp="1"/>
           </p:cNvSpPr>
-          <p:nvPr>
-            <p:ph type="sldNum" sz="quarter" idx="12"/>
-          </p:nvPr>
-        </p:nvSpPr>
-        <p:spPr/>
-        <p:txBody>
-          <a:bodyPr/>
-          <a:lstStyle/>
-          <a:p>
-            <a:fld id="{B6F15528-21DE-4FAA-801E-634DDDAF4B2B}" type="slidenum">
-              <a:rPr lang="en-US" smtClean="0"/>
-              <a:pPr/>
-              <a:t>6</a:t>
-            </a:fld>
-            <a:endParaRPr lang="en-US"/>
+          <p:nvPr/>
+        </p:nvSpPr>
+        <p:spPr>
+          <a:xfrm>
+            <a:off x="0" y="0"/>
+            <a:ext cx="9144000" cy="342900"/>
+          </a:xfrm>
+          <a:prstGeom prst="rect">
+            <a:avLst/>
+          </a:prstGeom>
+          <a:solidFill>
+            <a:srgbClr val="FFFFFF"/>
+          </a:solidFill>
+          <a:ln w="0">
+            <a:noFill/>
+          </a:ln>
+        </p:spPr>
+      </p:sp>
+      <p:sp>
+        <p:nvSpPr>
+          <p:cNvPr id="93" name="DSPIRA 2"/>
+          <p:cNvSpPr>
+            <a:spLocks noGrp="1"/>
+          </p:cNvSpPr>
+          <p:nvPr/>
+        </p:nvSpPr>
+        <p:spPr>
+          <a:xfrm>
+            <a:off x="0" y="7200900"/>
+            <a:ext cx="9144000" cy="342900"/>
+          </a:xfrm>
+          <a:prstGeom prst="rect">
+            <a:avLst/>
+          </a:prstGeom>
+          <a:solidFill>
+            <a:srgbClr val="FFFFFF"/>
+          </a:solidFill>
+          <a:ln w="0">
+            <a:noFill/>
+          </a:ln>
+        </p:spPr>
+      </p:sp>
+      <p:sp>
+        <p:nvSpPr>
+          <p:cNvPr id="94" name="DSPIRA 3"/>
+          <p:cNvSpPr>
+            <a:spLocks noGrp="1"/>
+          </p:cNvSpPr>
+          <p:nvPr/>
+        </p:nvSpPr>
+        <p:spPr>
+          <a:xfrm>
+            <a:off x="228600" y="76200"/>
+            <a:ext cx="4762500" cy="228600"/>
+          </a:xfrm>
+          <a:prstGeom prst="rect">
+            <a:avLst/>
+          </a:prstGeom>
+          <a:noFill/>
+          <a:ln w="0">
+            <a:noFill/>
+          </a:ln>
+        </p:spPr>
+        <p:txBody>
+          <a:bodyPr>
+            <a:noAutofit/>
+          </a:bodyPr>
+          <a:lstStyle/>
+          <a:p>
+            <a:pPr>
+              <a:defRPr sz="1200" b="1">
+                <a:solidFill>
+                  <a:srgbClr val="002855"/>
+                </a:solidFill>
+                <a:latin typeface="Arial"/>
+                <a:ea typeface="Arial"/>
+                <a:cs typeface="Arial"/>
+              </a:defRPr>
+            </a:pPr>
+            <a:r>
+              <a:rPr sz="1200" b="1">
+                <a:solidFill>
+                  <a:srgbClr val="002855"/>
+                </a:solidFill>
+                <a:latin typeface="Arial"/>
+                <a:ea typeface="Arial"/>
+                <a:cs typeface="Arial"/>
+              </a:rPr>
+              <a:t>WVU DSPIRA</a:t>
+            </a:r>
+          </a:p>
+        </p:txBody>
+      </p:sp>
+      <p:sp>
+        <p:nvSpPr>
+          <p:cNvPr id="95" name="DSPIRA 4"/>
+          <p:cNvSpPr>
+            <a:spLocks noGrp="1"/>
+          </p:cNvSpPr>
+          <p:nvPr/>
+        </p:nvSpPr>
+        <p:spPr>
+          <a:xfrm>
+            <a:off x="228600" y="7277100"/>
+            <a:ext cx="6667500" cy="228600"/>
+          </a:xfrm>
+          <a:prstGeom prst="rect">
+            <a:avLst/>
+          </a:prstGeom>
+          <a:noFill/>
+          <a:ln w="0">
+            <a:noFill/>
+          </a:ln>
+        </p:spPr>
+        <p:txBody>
+          <a:bodyPr>
+            <a:noAutofit/>
+          </a:bodyPr>
+          <a:lstStyle/>
+          <a:p>
+            <a:pPr>
+              <a:defRPr sz="900" b="0">
+                <a:solidFill>
+                  <a:srgbClr val="002855"/>
+                </a:solidFill>
+                <a:latin typeface="Arial"/>
+                <a:ea typeface="Arial"/>
+                <a:cs typeface="Arial"/>
+              </a:defRPr>
+            </a:pPr>
+            <a:r>
+              <a:rPr sz="900" b="0">
+                <a:solidFill>
+                  <a:srgbClr val="002855"/>
+                </a:solidFill>
+                <a:latin typeface="Arial"/>
+                <a:ea typeface="Arial"/>
+                <a:cs typeface="Arial"/>
+              </a:rPr>
+              <a:t>wvurail.org/dspira</a:t>
+            </a:r>
+          </a:p>
+        </p:txBody>
+      </p:sp>
+      <p:sp>
+        <p:nvSpPr>
+          <p:cNvPr id="96" name="DSPIRA 5"/>
+          <p:cNvSpPr>
+            <a:spLocks noGrp="1"/>
+          </p:cNvSpPr>
+          <p:nvPr/>
+        </p:nvSpPr>
+        <p:spPr>
+          <a:xfrm>
+            <a:off x="8143875" y="7277100"/>
+            <a:ext cx="762000" cy="228600"/>
+          </a:xfrm>
+          <a:prstGeom prst="rect">
+            <a:avLst/>
+          </a:prstGeom>
+          <a:noFill/>
+          <a:ln w="0">
+            <a:noFill/>
+          </a:ln>
+        </p:spPr>
+        <p:txBody>
+          <a:bodyPr>
+            <a:noAutofit/>
+          </a:bodyPr>
+          <a:lstStyle/>
+          <a:p>
+            <a:pPr>
+              <a:defRPr sz="900" b="0">
+                <a:solidFill>
+                  <a:srgbClr val="002855"/>
+                </a:solidFill>
+                <a:latin typeface="Arial"/>
+                <a:ea typeface="Arial"/>
+                <a:cs typeface="Arial"/>
+              </a:defRPr>
+            </a:pPr>
+            <a:r>
+              <a:rPr sz="900" b="0">
+                <a:solidFill>
+                  <a:srgbClr val="002855"/>
+                </a:solidFill>
+                <a:latin typeface="Arial"/>
+                <a:ea typeface="Arial"/>
+                <a:cs typeface="Arial"/>
+              </a:rPr>
+              <a:t>6 of 10</a:t>
+            </a:r>
           </a:p>
         </p:txBody>
       </p:sp>
@@ -9747,7 +10724,7 @@
         </p:nvSpPr>
         <p:spPr>
           <a:xfrm>
-            <a:off x="457200" y="76200"/>
+            <a:off x="457200" y="419100"/>
             <a:ext cx="8229600" cy="1143000"/>
           </a:xfrm>
         </p:spPr>
@@ -9786,7 +10763,7 @@
         </p:nvSpPr>
         <p:spPr>
           <a:xfrm>
-            <a:off x="228600" y="1600200"/>
+            <a:off x="228600" y="1943100"/>
             <a:ext cx="2819400" cy="4525963"/>
           </a:xfrm>
         </p:spPr>
@@ -9797,13 +10774,13 @@
           <a:lstStyle/>
           <a:p>
             <a:r>
-              <a:rPr lang="en-US" sz="2000" dirty="0"/>
+              <a:rPr lang="en-US" sz="1600" dirty="0"/>
               <a:t>Assume that sampling frequency is high (spectral copies do not overlap)  </a:t>
             </a:r>
           </a:p>
           <a:p>
             <a:r>
-              <a:rPr lang="en-US" sz="2000" dirty="0"/>
+              <a:rPr lang="en-US" sz="1600" dirty="0"/>
               <a:t>How to recover the original spectrum?  </a:t>
             </a:r>
           </a:p>
@@ -9817,7 +10794,7 @@
         </p:nvCxnSpPr>
         <p:spPr>
           <a:xfrm>
-            <a:off x="3276600" y="2819400"/>
+            <a:off x="3276600" y="3162300"/>
             <a:ext cx="5486400" cy="1588"/>
           </a:xfrm>
           <a:prstGeom prst="straightConnector1">
@@ -9853,7 +10830,7 @@
         </p:nvSpPr>
         <p:spPr>
           <a:xfrm>
-            <a:off x="5486400" y="1981200"/>
+            <a:off x="5486400" y="2324100"/>
             <a:ext cx="914400" cy="838200"/>
           </a:xfrm>
           <a:prstGeom prst="triangle">
@@ -9899,7 +10876,7 @@
         </p:nvCxnSpPr>
         <p:spPr>
           <a:xfrm rot="5400000" flipH="1" flipV="1">
-            <a:off x="5220891" y="2323703"/>
+            <a:off x="5220891" y="2666603"/>
             <a:ext cx="1447006" cy="1588"/>
           </a:xfrm>
           <a:prstGeom prst="straightConnector1">
@@ -9935,7 +10912,7 @@
         </p:nvSpPr>
         <p:spPr>
           <a:xfrm>
-            <a:off x="7315200" y="1981200"/>
+            <a:off x="7315200" y="2324100"/>
             <a:ext cx="914400" cy="838200"/>
           </a:xfrm>
           <a:prstGeom prst="triangle">
@@ -9981,7 +10958,7 @@
         </p:nvSpPr>
         <p:spPr>
           <a:xfrm>
-            <a:off x="3657600" y="1981200"/>
+            <a:off x="3657600" y="2324100"/>
             <a:ext cx="914400" cy="838200"/>
           </a:xfrm>
           <a:prstGeom prst="triangle">
@@ -10027,7 +11004,7 @@
         </p:nvSpPr>
         <p:spPr>
           <a:xfrm>
-            <a:off x="5718114" y="2831068"/>
+            <a:off x="5718114" y="3173968"/>
             <a:ext cx="301686" cy="369332"/>
           </a:xfrm>
           <a:prstGeom prst="rect">
@@ -10056,7 +11033,7 @@
         </p:nvSpPr>
         <p:spPr>
           <a:xfrm>
-            <a:off x="7467600" y="2895600"/>
+            <a:off x="7467600" y="3238500"/>
             <a:ext cx="652743" cy="369332"/>
           </a:xfrm>
           <a:prstGeom prst="rect">
@@ -10085,7 +11062,7 @@
         </p:nvSpPr>
         <p:spPr>
           <a:xfrm>
-            <a:off x="3657600" y="2895600"/>
+            <a:off x="3657600" y="3238500"/>
             <a:ext cx="776175" cy="369332"/>
           </a:xfrm>
           <a:prstGeom prst="rect">
@@ -10114,7 +11091,7 @@
         </p:nvSpPr>
         <p:spPr>
           <a:xfrm>
-            <a:off x="3048000" y="1828800"/>
+            <a:off x="3048000" y="2171700"/>
             <a:ext cx="574196" cy="769441"/>
           </a:xfrm>
           <a:prstGeom prst="rect">
@@ -10129,7 +11106,7 @@
           <a:lstStyle/>
           <a:p>
             <a:r>
-              <a:rPr lang="en-US" sz="4400" dirty="0"/>
+              <a:rPr lang="en-US" sz="3520" dirty="0"/>
               <a:t>…</a:t>
             </a:r>
           </a:p>
@@ -10143,7 +11120,7 @@
         </p:nvSpPr>
         <p:spPr>
           <a:xfrm>
-            <a:off x="8188804" y="1828800"/>
+            <a:off x="8188804" y="2171700"/>
             <a:ext cx="574196" cy="769441"/>
           </a:xfrm>
           <a:prstGeom prst="rect">
@@ -10158,7 +11135,7 @@
           <a:lstStyle/>
           <a:p>
             <a:r>
-              <a:rPr lang="en-US" sz="4400" dirty="0"/>
+              <a:rPr lang="en-US" sz="3520" dirty="0"/>
               <a:t>…</a:t>
             </a:r>
           </a:p>
@@ -10172,7 +11149,7 @@
         </p:nvSpPr>
         <p:spPr>
           <a:xfrm>
-            <a:off x="6052857" y="2831068"/>
+            <a:off x="6052857" y="3173968"/>
             <a:ext cx="652743" cy="369332"/>
           </a:xfrm>
           <a:prstGeom prst="rect">
@@ -10201,7 +11178,7 @@
         </p:nvSpPr>
         <p:spPr>
           <a:xfrm>
-            <a:off x="4953000" y="2831068"/>
+            <a:off x="4953000" y="3173968"/>
             <a:ext cx="776175" cy="369332"/>
           </a:xfrm>
           <a:prstGeom prst="rect">
@@ -10230,7 +11207,7 @@
         </p:nvSpPr>
         <p:spPr>
           <a:xfrm>
-            <a:off x="3939866" y="2278559"/>
+            <a:off x="3939866" y="2621459"/>
             <a:ext cx="327334" cy="769441"/>
           </a:xfrm>
           <a:prstGeom prst="rect">
@@ -10245,7 +11222,7 @@
           <a:lstStyle/>
           <a:p>
             <a:r>
-              <a:rPr lang="en-US" sz="4400" dirty="0"/>
+              <a:rPr lang="en-US" sz="3520" dirty="0"/>
               <a:t>.</a:t>
             </a:r>
           </a:p>
@@ -10259,7 +11236,7 @@
         </p:nvSpPr>
         <p:spPr>
           <a:xfrm>
-            <a:off x="7620000" y="2286000"/>
+            <a:off x="7620000" y="2628900"/>
             <a:ext cx="327334" cy="769441"/>
           </a:xfrm>
           <a:prstGeom prst="rect">
@@ -10274,7 +11251,7 @@
           <a:lstStyle/>
           <a:p>
             <a:r>
-              <a:rPr lang="en-US" sz="4400" dirty="0"/>
+              <a:rPr lang="en-US" sz="3520" dirty="0"/>
               <a:t>.</a:t>
             </a:r>
           </a:p>
@@ -10288,7 +11265,7 @@
         </p:nvSpPr>
         <p:spPr>
           <a:xfrm>
-            <a:off x="8407556" y="2891135"/>
+            <a:off x="8407556" y="3234035"/>
             <a:ext cx="279244" cy="461665"/>
           </a:xfrm>
           <a:prstGeom prst="rect">
@@ -10303,7 +11280,7 @@
           <a:lstStyle/>
           <a:p>
             <a:r>
-              <a:rPr lang="en-US" sz="2400" dirty="0"/>
+              <a:rPr lang="en-US" sz="1920" dirty="0"/>
               <a:t>f</a:t>
             </a:r>
           </a:p>
@@ -10317,7 +11294,7 @@
         </p:nvCxnSpPr>
         <p:spPr>
           <a:xfrm>
-            <a:off x="3276600" y="5333206"/>
+            <a:off x="3276600" y="5676106"/>
             <a:ext cx="5486400" cy="1588"/>
           </a:xfrm>
           <a:prstGeom prst="straightConnector1">
@@ -10353,7 +11330,7 @@
         </p:nvSpPr>
         <p:spPr>
           <a:xfrm>
-            <a:off x="5486400" y="4495006"/>
+            <a:off x="5486400" y="4837906"/>
             <a:ext cx="914400" cy="838200"/>
           </a:xfrm>
           <a:prstGeom prst="triangle">
@@ -10399,7 +11376,7 @@
         </p:nvCxnSpPr>
         <p:spPr>
           <a:xfrm rot="5400000" flipH="1" flipV="1">
-            <a:off x="5220891" y="4837509"/>
+            <a:off x="5220891" y="5180409"/>
             <a:ext cx="1447006" cy="1588"/>
           </a:xfrm>
           <a:prstGeom prst="straightConnector1">
@@ -10435,7 +11412,7 @@
         </p:nvSpPr>
         <p:spPr>
           <a:xfrm>
-            <a:off x="7315200" y="4495006"/>
+            <a:off x="7315200" y="4837906"/>
             <a:ext cx="914400" cy="838200"/>
           </a:xfrm>
           <a:prstGeom prst="triangle">
@@ -10481,7 +11458,7 @@
         </p:nvSpPr>
         <p:spPr>
           <a:xfrm>
-            <a:off x="3657600" y="4495006"/>
+            <a:off x="3657600" y="4837906"/>
             <a:ext cx="914400" cy="838200"/>
           </a:xfrm>
           <a:prstGeom prst="triangle">
@@ -10527,7 +11504,7 @@
         </p:nvSpPr>
         <p:spPr>
           <a:xfrm>
-            <a:off x="5718114" y="5344874"/>
+            <a:off x="5718114" y="5687774"/>
             <a:ext cx="301686" cy="369332"/>
           </a:xfrm>
           <a:prstGeom prst="rect">
@@ -10556,7 +11533,7 @@
         </p:nvSpPr>
         <p:spPr>
           <a:xfrm>
-            <a:off x="6510057" y="5345668"/>
+            <a:off x="6510057" y="5688568"/>
             <a:ext cx="652743" cy="369332"/>
           </a:xfrm>
           <a:prstGeom prst="rect">
@@ -10585,7 +11562,7 @@
         </p:nvSpPr>
         <p:spPr>
           <a:xfrm>
-            <a:off x="4634025" y="5345668"/>
+            <a:off x="4634025" y="5688568"/>
             <a:ext cx="776175" cy="369332"/>
           </a:xfrm>
           <a:prstGeom prst="rect">
@@ -10614,7 +11591,7 @@
         </p:nvSpPr>
         <p:spPr>
           <a:xfrm>
-            <a:off x="3048000" y="4342606"/>
+            <a:off x="3048000" y="4685506"/>
             <a:ext cx="574196" cy="769441"/>
           </a:xfrm>
           <a:prstGeom prst="rect">
@@ -10629,7 +11606,7 @@
           <a:lstStyle/>
           <a:p>
             <a:r>
-              <a:rPr lang="en-US" sz="4400" dirty="0"/>
+              <a:rPr lang="en-US" sz="3520" dirty="0"/>
               <a:t>…</a:t>
             </a:r>
           </a:p>
@@ -10643,7 +11620,7 @@
         </p:nvSpPr>
         <p:spPr>
           <a:xfrm>
-            <a:off x="8188804" y="4342606"/>
+            <a:off x="8188804" y="4685506"/>
             <a:ext cx="574196" cy="769441"/>
           </a:xfrm>
           <a:prstGeom prst="rect">
@@ -10658,7 +11635,7 @@
           <a:lstStyle/>
           <a:p>
             <a:r>
-              <a:rPr lang="en-US" sz="4400" dirty="0"/>
+              <a:rPr lang="en-US" sz="3520" dirty="0"/>
               <a:t>…</a:t>
             </a:r>
           </a:p>
@@ -10672,7 +11649,7 @@
         </p:nvSpPr>
         <p:spPr>
           <a:xfrm>
-            <a:off x="3939866" y="4792365"/>
+            <a:off x="3939866" y="5135265"/>
             <a:ext cx="327334" cy="769441"/>
           </a:xfrm>
           <a:prstGeom prst="rect">
@@ -10687,7 +11664,7 @@
           <a:lstStyle/>
           <a:p>
             <a:r>
-              <a:rPr lang="en-US" sz="4400" dirty="0"/>
+              <a:rPr lang="en-US" sz="3520" dirty="0"/>
               <a:t>.</a:t>
             </a:r>
           </a:p>
@@ -10701,7 +11678,7 @@
         </p:nvSpPr>
         <p:spPr>
           <a:xfrm>
-            <a:off x="7620000" y="4799806"/>
+            <a:off x="7620000" y="5142706"/>
             <a:ext cx="327334" cy="769441"/>
           </a:xfrm>
           <a:prstGeom prst="rect">
@@ -10716,7 +11693,7 @@
           <a:lstStyle/>
           <a:p>
             <a:r>
-              <a:rPr lang="en-US" sz="4400" dirty="0"/>
+              <a:rPr lang="en-US" sz="3520" dirty="0"/>
               <a:t>.</a:t>
             </a:r>
           </a:p>
@@ -10730,7 +11707,7 @@
         </p:nvSpPr>
         <p:spPr>
           <a:xfrm>
-            <a:off x="4572000" y="4495800"/>
+            <a:off x="4572000" y="4838700"/>
             <a:ext cx="914400" cy="838200"/>
           </a:xfrm>
           <a:prstGeom prst="triangle">
@@ -10776,7 +11753,7 @@
         </p:nvSpPr>
         <p:spPr>
           <a:xfrm>
-            <a:off x="6400800" y="4495800"/>
+            <a:off x="6400800" y="4838700"/>
             <a:ext cx="914400" cy="838200"/>
           </a:xfrm>
           <a:prstGeom prst="triangle">
@@ -10822,7 +11799,7 @@
         </p:nvSpPr>
         <p:spPr>
           <a:xfrm>
-            <a:off x="4854266" y="4800600"/>
+            <a:off x="4854266" y="5143500"/>
             <a:ext cx="327334" cy="769441"/>
           </a:xfrm>
           <a:prstGeom prst="rect">
@@ -10837,7 +11814,7 @@
           <a:lstStyle/>
           <a:p>
             <a:r>
-              <a:rPr lang="en-US" sz="4400" dirty="0"/>
+              <a:rPr lang="en-US" sz="3520" dirty="0"/>
               <a:t>.</a:t>
             </a:r>
           </a:p>
@@ -10851,7 +11828,7 @@
         </p:nvSpPr>
         <p:spPr>
           <a:xfrm>
-            <a:off x="6683066" y="4800600"/>
+            <a:off x="6683066" y="5143500"/>
             <a:ext cx="327334" cy="769441"/>
           </a:xfrm>
           <a:prstGeom prst="rect">
@@ -10866,7 +11843,7 @@
           <a:lstStyle/>
           <a:p>
             <a:r>
-              <a:rPr lang="en-US" sz="4400" dirty="0"/>
+              <a:rPr lang="en-US" sz="3520" dirty="0"/>
               <a:t>.</a:t>
             </a:r>
           </a:p>
@@ -10880,7 +11857,7 @@
         </p:nvCxnSpPr>
         <p:spPr>
           <a:xfrm rot="5400000" flipH="1" flipV="1">
-            <a:off x="4876800" y="2667000"/>
+            <a:off x="4876800" y="3009900"/>
             <a:ext cx="304800" cy="0"/>
           </a:xfrm>
           <a:prstGeom prst="line">
@@ -10915,7 +11892,7 @@
         </p:nvCxnSpPr>
         <p:spPr>
           <a:xfrm>
-            <a:off x="5029200" y="2514600"/>
+            <a:off x="5029200" y="2857500"/>
             <a:ext cx="1828800" cy="0"/>
           </a:xfrm>
           <a:prstGeom prst="line">
@@ -10950,7 +11927,7 @@
         </p:nvCxnSpPr>
         <p:spPr>
           <a:xfrm rot="5400000" flipH="1" flipV="1">
-            <a:off x="6705600" y="2667000"/>
+            <a:off x="6705600" y="3009900"/>
             <a:ext cx="304800" cy="0"/>
           </a:xfrm>
           <a:prstGeom prst="line">
@@ -10985,7 +11962,7 @@
         </p:nvSpPr>
         <p:spPr>
           <a:xfrm>
-            <a:off x="4800600" y="1981200"/>
+            <a:off x="4800600" y="2324100"/>
             <a:ext cx="724878" cy="369332"/>
           </a:xfrm>
           <a:prstGeom prst="rect">
@@ -11018,7 +11995,7 @@
         </p:nvGrpSpPr>
         <p:grpSpPr>
           <a:xfrm>
-            <a:off x="6031906" y="3212068"/>
+            <a:off x="6031906" y="3554968"/>
             <a:ext cx="2654894" cy="597932"/>
             <a:chOff x="6260506" y="2907268"/>
             <a:chExt cx="2654894" cy="597932"/>
@@ -11047,14 +12024,14 @@
             <a:lstStyle/>
             <a:p>
               <a:r>
-                <a:rPr lang="en-US" sz="2800">
+                <a:rPr lang="en-US" sz="2240">
                   <a:solidFill>
                     <a:srgbClr val="FF0000"/>
                   </a:solidFill>
                 </a:rPr>
                 <a:t>W &lt; f        &lt; f - W</a:t>
               </a:r>
-              <a:endParaRPr lang="en-US" sz="2800" dirty="0">
+              <a:endParaRPr lang="en-US" sz="2240" dirty="0">
                 <a:solidFill>
                   <a:srgbClr val="FF0000"/>
                 </a:solidFill>
@@ -11137,7 +12114,7 @@
         </p:nvSpPr>
         <p:spPr>
           <a:xfrm>
-            <a:off x="8458200" y="5405735"/>
+            <a:off x="8458200" y="5748635"/>
             <a:ext cx="279244" cy="461665"/>
           </a:xfrm>
           <a:prstGeom prst="rect">
@@ -11152,33 +12129,9 @@
           <a:lstStyle/>
           <a:p>
             <a:r>
-              <a:rPr lang="en-US" sz="2400" dirty="0"/>
+              <a:rPr lang="en-US" sz="1920" dirty="0"/>
               <a:t>f</a:t>
             </a:r>
-          </a:p>
-        </p:txBody>
-      </p:sp>
-      <p:sp>
-        <p:nvSpPr>
-          <p:cNvPr id="62" name="Slide Number Placeholder 61"/>
-          <p:cNvSpPr>
-            <a:spLocks noGrp="1"/>
-          </p:cNvSpPr>
-          <p:nvPr>
-            <p:ph type="sldNum" sz="quarter" idx="12"/>
-          </p:nvPr>
-        </p:nvSpPr>
-        <p:spPr/>
-        <p:txBody>
-          <a:bodyPr/>
-          <a:lstStyle/>
-          <a:p>
-            <a:fld id="{B6F15528-21DE-4FAA-801E-634DDDAF4B2B}" type="slidenum">
-              <a:rPr lang="en-US" smtClean="0"/>
-              <a:pPr/>
-              <a:t>7</a:t>
-            </a:fld>
-            <a:endParaRPr lang="en-US"/>
           </a:p>
         </p:txBody>
       </p:sp>
@@ -11190,7 +12143,7 @@
         </p:nvSpPr>
         <p:spPr>
           <a:xfrm>
-            <a:off x="5148644" y="2057400"/>
+            <a:off x="5148644" y="2400300"/>
             <a:ext cx="274434" cy="369332"/>
           </a:xfrm>
           <a:prstGeom prst="rect">
@@ -11211,6 +12164,207 @@
                 </a:solidFill>
               </a:rPr>
               <a:t>s</a:t>
+            </a:r>
+          </a:p>
+        </p:txBody>
+      </p:sp>
+      <p:sp>
+        <p:nvSpPr>
+          <p:cNvPr id="60" name="DSPIRA 1"/>
+          <p:cNvSpPr>
+            <a:spLocks noGrp="1"/>
+          </p:cNvSpPr>
+          <p:nvPr/>
+        </p:nvSpPr>
+        <p:spPr>
+          <a:xfrm>
+            <a:off x="0" y="0"/>
+            <a:ext cx="9144000" cy="342900"/>
+          </a:xfrm>
+          <a:prstGeom prst="rect">
+            <a:avLst/>
+          </a:prstGeom>
+          <a:solidFill>
+            <a:srgbClr val="FFFFFF"/>
+          </a:solidFill>
+          <a:ln w="0">
+            <a:noFill/>
+          </a:ln>
+        </p:spPr>
+      </p:sp>
+      <p:sp>
+        <p:nvSpPr>
+          <p:cNvPr id="61" name="DSPIRA 2"/>
+          <p:cNvSpPr>
+            <a:spLocks noGrp="1"/>
+          </p:cNvSpPr>
+          <p:nvPr/>
+        </p:nvSpPr>
+        <p:spPr>
+          <a:xfrm>
+            <a:off x="0" y="7200900"/>
+            <a:ext cx="9144000" cy="342900"/>
+          </a:xfrm>
+          <a:prstGeom prst="rect">
+            <a:avLst/>
+          </a:prstGeom>
+          <a:solidFill>
+            <a:srgbClr val="FFFFFF"/>
+          </a:solidFill>
+          <a:ln w="0">
+            <a:noFill/>
+          </a:ln>
+        </p:spPr>
+      </p:sp>
+      <p:sp>
+        <p:nvSpPr>
+          <p:cNvPr id="62" name="DSPIRA 3"/>
+          <p:cNvSpPr>
+            <a:spLocks noGrp="1"/>
+          </p:cNvSpPr>
+          <p:nvPr/>
+        </p:nvSpPr>
+        <p:spPr>
+          <a:xfrm>
+            <a:off x="228600" y="76200"/>
+            <a:ext cx="4762500" cy="228600"/>
+          </a:xfrm>
+          <a:prstGeom prst="rect">
+            <a:avLst/>
+          </a:prstGeom>
+          <a:noFill/>
+          <a:ln w="0">
+            <a:noFill/>
+          </a:ln>
+        </p:spPr>
+        <p:txBody>
+          <a:bodyPr>
+            <a:noAutofit/>
+          </a:bodyPr>
+          <a:lstStyle/>
+          <a:p>
+            <a:pPr>
+              <a:defRPr sz="1200" b="1">
+                <a:solidFill>
+                  <a:srgbClr val="002855"/>
+                </a:solidFill>
+                <a:latin typeface="Arial"/>
+                <a:ea typeface="Arial"/>
+                <a:cs typeface="Arial"/>
+              </a:defRPr>
+            </a:pPr>
+            <a:r>
+              <a:rPr sz="1200" b="1">
+                <a:solidFill>
+                  <a:srgbClr val="002855"/>
+                </a:solidFill>
+                <a:latin typeface="Arial"/>
+                <a:ea typeface="Arial"/>
+                <a:cs typeface="Arial"/>
+              </a:rPr>
+              <a:t>WVU DSPIRA</a:t>
+            </a:r>
+          </a:p>
+        </p:txBody>
+      </p:sp>
+      <p:sp>
+        <p:nvSpPr>
+          <p:cNvPr id="63" name="DSPIRA 4"/>
+          <p:cNvSpPr>
+            <a:spLocks noGrp="1"/>
+          </p:cNvSpPr>
+          <p:nvPr/>
+        </p:nvSpPr>
+        <p:spPr>
+          <a:xfrm>
+            <a:off x="228600" y="7277100"/>
+            <a:ext cx="6667500" cy="228600"/>
+          </a:xfrm>
+          <a:prstGeom prst="rect">
+            <a:avLst/>
+          </a:prstGeom>
+          <a:noFill/>
+          <a:ln w="0">
+            <a:noFill/>
+          </a:ln>
+        </p:spPr>
+        <p:txBody>
+          <a:bodyPr>
+            <a:noAutofit/>
+          </a:bodyPr>
+          <a:lstStyle/>
+          <a:p>
+            <a:pPr>
+              <a:defRPr sz="900" b="0">
+                <a:solidFill>
+                  <a:srgbClr val="002855"/>
+                </a:solidFill>
+                <a:latin typeface="Arial"/>
+                <a:ea typeface="Arial"/>
+                <a:cs typeface="Arial"/>
+              </a:defRPr>
+            </a:pPr>
+            <a:r>
+              <a:rPr sz="900" b="0">
+                <a:solidFill>
+                  <a:srgbClr val="002855"/>
+                </a:solidFill>
+                <a:latin typeface="Arial"/>
+                <a:ea typeface="Arial"/>
+                <a:cs typeface="Arial"/>
+              </a:rPr>
+              <a:t>wvurail.org/dspira</a:t>
+            </a:r>
+          </a:p>
+        </p:txBody>
+      </p:sp>
+      <p:sp>
+        <p:nvSpPr>
+          <p:cNvPr id="64" name="DSPIRA 5"/>
+          <p:cNvSpPr>
+            <a:spLocks noGrp="1"/>
+          </p:cNvSpPr>
+          <p:nvPr/>
+        </p:nvSpPr>
+        <p:spPr>
+          <a:xfrm>
+            <a:off x="8143875" y="7277100"/>
+            <a:ext cx="762000" cy="228600"/>
+          </a:xfrm>
+          <a:prstGeom prst="rect">
+            <a:avLst/>
+          </a:prstGeom>
+          <a:noFill/>
+          <a:ln w="0">
+            <a:noFill/>
+          </a:ln>
+        </p:spPr>
+        <p:txBody>
+          <a:bodyPr>
+            <a:noAutofit/>
+          </a:bodyPr>
+          <a:lstStyle/>
+          <a:p>
+            <a:pPr>
+              <a:defRPr sz="900" b="0">
+                <a:solidFill>
+                  <a:srgbClr val="002855"/>
+                </a:solidFill>
+                <a:latin typeface="Arial"/>
+                <a:ea typeface="Arial"/>
+                <a:cs typeface="Arial"/>
+              </a:defRPr>
+            </a:pPr>
+            <a:r>
+              <a:rPr sz="900" b="0">
+                <a:solidFill>
+                  <a:srgbClr val="002855"/>
+                </a:solidFill>
+                <a:latin typeface="Arial"/>
+                <a:ea typeface="Arial"/>
+                <a:cs typeface="Arial"/>
+              </a:rPr>
+              <a:t>7 of 10</a:t>
             </a:r>
           </a:p>
         </p:txBody>
@@ -11700,30 +12854,6 @@
           </a:p>
         </p:txBody>
       </p:sp>
-      <p:sp>
-        <p:nvSpPr>
-          <p:cNvPr id="7" name="Slide Number Placeholder 6"/>
-          <p:cNvSpPr>
-            <a:spLocks noGrp="1"/>
-          </p:cNvSpPr>
-          <p:nvPr>
-            <p:ph type="sldNum" sz="quarter" idx="12"/>
-          </p:nvPr>
-        </p:nvSpPr>
-        <p:spPr/>
-        <p:txBody>
-          <a:bodyPr/>
-          <a:lstStyle/>
-          <a:p>
-            <a:fld id="{B6F15528-21DE-4FAA-801E-634DDDAF4B2B}" type="slidenum">
-              <a:rPr lang="en-US" smtClean="0"/>
-              <a:pPr/>
-              <a:t>8</a:t>
-            </a:fld>
-            <a:endParaRPr lang="en-US"/>
-          </a:p>
-        </p:txBody>
-      </p:sp>
       <p:cxnSp>
         <p:nvCxnSpPr>
           <p:cNvPr id="13" name="Straight Connector 12"/>
@@ -11732,7 +12862,7 @@
         </p:nvCxnSpPr>
         <p:spPr>
           <a:xfrm>
-            <a:off x="533400" y="2895600"/>
+            <a:off x="533400" y="3238500"/>
             <a:ext cx="2895600" cy="0"/>
           </a:xfrm>
           <a:prstGeom prst="line">
@@ -11767,7 +12897,7 @@
         </p:nvSpPr>
         <p:spPr>
           <a:xfrm>
-            <a:off x="552450" y="1349375"/>
+            <a:off x="552450" y="1692275"/>
             <a:ext cx="2762250" cy="1393825"/>
           </a:xfrm>
           <a:custGeom>
@@ -11988,7 +13118,7 @@
         </p:nvSpPr>
         <p:spPr>
           <a:xfrm>
-            <a:off x="3810000" y="1828800"/>
+            <a:off x="3810000" y="2171700"/>
             <a:ext cx="1524000" cy="914400"/>
           </a:xfrm>
           <a:prstGeom prst="rect">
@@ -12034,7 +13164,7 @@
         </p:nvSpPr>
         <p:spPr>
           <a:xfrm>
-            <a:off x="3839687" y="1905000"/>
+            <a:off x="3839687" y="2247900"/>
             <a:ext cx="1594283" cy="830997"/>
           </a:xfrm>
           <a:prstGeom prst="rect">
@@ -12050,14 +13180,14 @@
           <a:p>
             <a:pPr algn="ctr"/>
             <a:r>
-              <a:rPr lang="en-US" sz="2400" dirty="0"/>
+              <a:rPr lang="en-US" sz="1920" dirty="0"/>
               <a:t>Zero-order </a:t>
             </a:r>
           </a:p>
           <a:p>
             <a:pPr algn="ctr"/>
             <a:r>
-              <a:rPr lang="en-US" sz="2400" dirty="0"/>
+              <a:rPr lang="en-US" sz="1920" dirty="0"/>
               <a:t>hold</a:t>
             </a:r>
           </a:p>
@@ -12071,7 +13201,7 @@
         </p:nvSpPr>
         <p:spPr>
           <a:xfrm>
-            <a:off x="1828800" y="3124200"/>
+            <a:off x="1828800" y="3467100"/>
             <a:ext cx="675185" cy="461665"/>
           </a:xfrm>
           <a:prstGeom prst="rect">
@@ -12086,7 +13216,7 @@
           <a:lstStyle/>
           <a:p>
             <a:r>
-              <a:rPr lang="en-US" sz="2400" dirty="0"/>
+              <a:rPr lang="en-US" sz="1920" dirty="0"/>
               <a:t>x(t) </a:t>
             </a:r>
           </a:p>
@@ -12100,7 +13230,7 @@
         </p:nvCxnSpPr>
         <p:spPr>
           <a:xfrm>
-            <a:off x="5715000" y="2895600"/>
+            <a:off x="5715000" y="3238500"/>
             <a:ext cx="2895600" cy="0"/>
           </a:xfrm>
           <a:prstGeom prst="line">
@@ -12135,7 +13265,7 @@
         </p:nvSpPr>
         <p:spPr>
           <a:xfrm>
-            <a:off x="5734050" y="1349375"/>
+            <a:off x="5734050" y="1692275"/>
             <a:ext cx="2762250" cy="1393825"/>
           </a:xfrm>
           <a:custGeom>
@@ -12356,7 +13486,7 @@
         </p:nvCxnSpPr>
         <p:spPr>
           <a:xfrm rot="5400000">
-            <a:off x="5105400" y="2362200"/>
+            <a:off x="5105400" y="2705100"/>
             <a:ext cx="1828800" cy="0"/>
           </a:xfrm>
           <a:prstGeom prst="line">
@@ -12389,7 +13519,7 @@
         </p:nvCxnSpPr>
         <p:spPr>
           <a:xfrm rot="5400000">
-            <a:off x="5486400" y="2362200"/>
+            <a:off x="5486400" y="2705100"/>
             <a:ext cx="1828800" cy="0"/>
           </a:xfrm>
           <a:prstGeom prst="line">
@@ -12422,7 +13552,7 @@
         </p:nvCxnSpPr>
         <p:spPr>
           <a:xfrm rot="5400000">
-            <a:off x="5867400" y="2362200"/>
+            <a:off x="5867400" y="2705100"/>
             <a:ext cx="1828800" cy="0"/>
           </a:xfrm>
           <a:prstGeom prst="line">
@@ -12455,7 +13585,7 @@
         </p:nvCxnSpPr>
         <p:spPr>
           <a:xfrm rot="5400000">
-            <a:off x="6096000" y="2286000"/>
+            <a:off x="6096000" y="2628900"/>
             <a:ext cx="2133600" cy="0"/>
           </a:xfrm>
           <a:prstGeom prst="line">
@@ -12488,7 +13618,7 @@
         </p:nvCxnSpPr>
         <p:spPr>
           <a:xfrm rot="5400000">
-            <a:off x="6477000" y="2209800"/>
+            <a:off x="6477000" y="2552700"/>
             <a:ext cx="2133600" cy="0"/>
           </a:xfrm>
           <a:prstGeom prst="line">
@@ -12521,7 +13651,7 @@
         </p:nvCxnSpPr>
         <p:spPr>
           <a:xfrm rot="5400000">
-            <a:off x="6858000" y="2209800"/>
+            <a:off x="6858000" y="2552700"/>
             <a:ext cx="2133600" cy="0"/>
           </a:xfrm>
           <a:prstGeom prst="line">
@@ -12554,7 +13684,7 @@
         </p:nvCxnSpPr>
         <p:spPr>
           <a:xfrm rot="5400000">
-            <a:off x="7391400" y="2362200"/>
+            <a:off x="7391400" y="2705100"/>
             <a:ext cx="1828800" cy="0"/>
           </a:xfrm>
           <a:prstGeom prst="line">
@@ -12587,7 +13717,7 @@
         </p:nvCxnSpPr>
         <p:spPr>
           <a:xfrm>
-            <a:off x="6019800" y="2209800"/>
+            <a:off x="6019800" y="2552700"/>
             <a:ext cx="381000" cy="0"/>
           </a:xfrm>
           <a:prstGeom prst="line">
@@ -12622,7 +13752,7 @@
         </p:nvCxnSpPr>
         <p:spPr>
           <a:xfrm>
-            <a:off x="6400800" y="1981200"/>
+            <a:off x="6400800" y="2324100"/>
             <a:ext cx="381000" cy="0"/>
           </a:xfrm>
           <a:prstGeom prst="line">
@@ -12657,7 +13787,7 @@
         </p:nvCxnSpPr>
         <p:spPr>
           <a:xfrm>
-            <a:off x="6781800" y="2209800"/>
+            <a:off x="6781800" y="2552700"/>
             <a:ext cx="381000" cy="0"/>
           </a:xfrm>
           <a:prstGeom prst="line">
@@ -12692,7 +13822,7 @@
         </p:nvCxnSpPr>
         <p:spPr>
           <a:xfrm>
-            <a:off x="7162800" y="1600200"/>
+            <a:off x="7162800" y="1943100"/>
             <a:ext cx="381000" cy="0"/>
           </a:xfrm>
           <a:prstGeom prst="line">
@@ -12727,7 +13857,7 @@
         </p:nvCxnSpPr>
         <p:spPr>
           <a:xfrm>
-            <a:off x="7543800" y="1371600"/>
+            <a:off x="7543800" y="1714500"/>
             <a:ext cx="381000" cy="0"/>
           </a:xfrm>
           <a:prstGeom prst="line">
@@ -12762,7 +13892,7 @@
         </p:nvCxnSpPr>
         <p:spPr>
           <a:xfrm>
-            <a:off x="7924800" y="1981200"/>
+            <a:off x="7924800" y="2324100"/>
             <a:ext cx="381000" cy="0"/>
           </a:xfrm>
           <a:prstGeom prst="line">
@@ -12797,7 +13927,7 @@
         </p:nvCxnSpPr>
         <p:spPr>
           <a:xfrm>
-            <a:off x="8305800" y="2438400"/>
+            <a:off x="8305800" y="2781300"/>
             <a:ext cx="381000" cy="0"/>
           </a:xfrm>
           <a:prstGeom prst="line">
@@ -12832,7 +13962,7 @@
         </p:nvCxnSpPr>
         <p:spPr>
           <a:xfrm rot="5400000">
-            <a:off x="6286500" y="2095500"/>
+            <a:off x="6286500" y="2438400"/>
             <a:ext cx="228600" cy="0"/>
           </a:xfrm>
           <a:prstGeom prst="line">
@@ -12867,7 +13997,7 @@
         </p:nvCxnSpPr>
         <p:spPr>
           <a:xfrm rot="5400000">
-            <a:off x="6667500" y="2095500"/>
+            <a:off x="6667500" y="2438400"/>
             <a:ext cx="228600" cy="0"/>
           </a:xfrm>
           <a:prstGeom prst="line">
@@ -12902,7 +14032,7 @@
         </p:nvCxnSpPr>
         <p:spPr>
           <a:xfrm rot="5400000">
-            <a:off x="6819900" y="1866900"/>
+            <a:off x="6819900" y="2209800"/>
             <a:ext cx="685800" cy="0"/>
           </a:xfrm>
           <a:prstGeom prst="line">
@@ -12937,7 +14067,7 @@
         </p:nvCxnSpPr>
         <p:spPr>
           <a:xfrm rot="5400000">
-            <a:off x="7429500" y="1485900"/>
+            <a:off x="7429500" y="1828800"/>
             <a:ext cx="228600" cy="0"/>
           </a:xfrm>
           <a:prstGeom prst="line">
@@ -12974,7 +14104,7 @@
         </p:nvCxnSpPr>
         <p:spPr>
           <a:xfrm rot="5400000">
-            <a:off x="7581900" y="1714500"/>
+            <a:off x="7581900" y="2057400"/>
             <a:ext cx="685800" cy="0"/>
           </a:xfrm>
           <a:prstGeom prst="line">
@@ -13011,7 +14141,7 @@
         </p:nvCxnSpPr>
         <p:spPr>
           <a:xfrm>
-            <a:off x="8305800" y="1981200"/>
+            <a:off x="8305800" y="2324100"/>
             <a:ext cx="0" cy="457200"/>
           </a:xfrm>
           <a:prstGeom prst="line">
@@ -13046,7 +14176,7 @@
         </p:nvSpPr>
         <p:spPr>
           <a:xfrm>
-            <a:off x="7021015" y="3276600"/>
+            <a:off x="7021015" y="3619500"/>
             <a:ext cx="881973" cy="461665"/>
           </a:xfrm>
           <a:prstGeom prst="rect">
@@ -13061,7 +14191,7 @@
           <a:lstStyle/>
           <a:p>
             <a:r>
-              <a:rPr lang="en-US" sz="2400" dirty="0"/>
+              <a:rPr lang="en-US" sz="1920" dirty="0"/>
               <a:t>x   (t) </a:t>
             </a:r>
           </a:p>
@@ -13075,7 +14205,7 @@
         </p:nvSpPr>
         <p:spPr>
           <a:xfrm>
-            <a:off x="7162800" y="3505200"/>
+            <a:off x="7162800" y="3848100"/>
             <a:ext cx="301686" cy="369332"/>
           </a:xfrm>
           <a:prstGeom prst="rect">
@@ -13104,7 +14234,7 @@
         </p:nvSpPr>
         <p:spPr>
           <a:xfrm>
-            <a:off x="2362200" y="4572000"/>
+            <a:off x="2362200" y="4914900"/>
             <a:ext cx="685800" cy="685800"/>
           </a:xfrm>
           <a:prstGeom prst="ellipse">
@@ -13150,7 +14280,7 @@
         </p:nvSpPr>
         <p:spPr>
           <a:xfrm>
-            <a:off x="2590708" y="4724400"/>
+            <a:off x="2590708" y="5067300"/>
             <a:ext cx="304892" cy="369332"/>
           </a:xfrm>
           <a:prstGeom prst="rect">
@@ -13179,7 +14309,7 @@
         </p:nvCxnSpPr>
         <p:spPr>
           <a:xfrm>
-            <a:off x="1447800" y="4876800"/>
+            <a:off x="1447800" y="5219700"/>
             <a:ext cx="914400" cy="1588"/>
           </a:xfrm>
           <a:prstGeom prst="straightConnector1">
@@ -13215,7 +14345,7 @@
         </p:nvCxnSpPr>
         <p:spPr>
           <a:xfrm rot="5400000">
-            <a:off x="2399506" y="4228306"/>
+            <a:off x="2399506" y="4571206"/>
             <a:ext cx="685800" cy="1588"/>
           </a:xfrm>
           <a:prstGeom prst="straightConnector1">
@@ -13251,7 +14381,7 @@
         </p:nvSpPr>
         <p:spPr>
           <a:xfrm>
-            <a:off x="1447800" y="4338935"/>
+            <a:off x="1447800" y="4681835"/>
             <a:ext cx="675185" cy="461665"/>
           </a:xfrm>
           <a:prstGeom prst="rect">
@@ -13266,7 +14396,7 @@
           <a:lstStyle/>
           <a:p>
             <a:r>
-              <a:rPr lang="en-US" sz="2400" dirty="0"/>
+              <a:rPr lang="en-US" sz="1920" dirty="0"/>
               <a:t>x(t) </a:t>
             </a:r>
           </a:p>
@@ -13280,7 +14410,7 @@
         </p:nvSpPr>
         <p:spPr>
           <a:xfrm>
-            <a:off x="2870090" y="3657600"/>
+            <a:off x="2870090" y="4000500"/>
             <a:ext cx="603050" cy="461665"/>
           </a:xfrm>
           <a:prstGeom prst="rect">
@@ -13295,7 +14425,7 @@
           <a:lstStyle/>
           <a:p>
             <a:r>
-              <a:rPr lang="en-US" sz="2400" dirty="0"/>
+              <a:rPr lang="en-US" sz="1920" dirty="0"/>
               <a:t>c(t)</a:t>
             </a:r>
           </a:p>
@@ -13309,7 +14439,7 @@
         </p:nvSpPr>
         <p:spPr>
           <a:xfrm>
-            <a:off x="3962400" y="4419600"/>
+            <a:off x="3962400" y="4762500"/>
             <a:ext cx="2514600" cy="914400"/>
           </a:xfrm>
           <a:prstGeom prst="rect">
@@ -13355,7 +14485,7 @@
         </p:nvSpPr>
         <p:spPr>
           <a:xfrm>
-            <a:off x="3962400" y="4648200"/>
+            <a:off x="3962400" y="4991100"/>
             <a:ext cx="2590800" cy="461665"/>
           </a:xfrm>
           <a:prstGeom prst="rect">
@@ -13370,7 +14500,7 @@
           <a:lstStyle/>
           <a:p>
             <a:r>
-              <a:rPr lang="en-US" sz="2400" dirty="0"/>
+              <a:rPr lang="en-US" sz="1920" dirty="0"/>
               <a:t>Hold for T seconds</a:t>
             </a:r>
           </a:p>
@@ -13384,7 +14514,7 @@
         </p:nvCxnSpPr>
         <p:spPr>
           <a:xfrm>
-            <a:off x="3048000" y="4876800"/>
+            <a:off x="3048000" y="5219700"/>
             <a:ext cx="914400" cy="1588"/>
           </a:xfrm>
           <a:prstGeom prst="straightConnector1">
@@ -13420,7 +14550,7 @@
         </p:nvCxnSpPr>
         <p:spPr>
           <a:xfrm>
-            <a:off x="6477000" y="4876800"/>
+            <a:off x="6477000" y="5219700"/>
             <a:ext cx="914400" cy="1588"/>
           </a:xfrm>
           <a:prstGeom prst="straightConnector1">
@@ -13456,7 +14586,7 @@
         </p:nvSpPr>
         <p:spPr>
           <a:xfrm>
-            <a:off x="6553200" y="4267200"/>
+            <a:off x="6553200" y="4610100"/>
             <a:ext cx="881973" cy="461665"/>
           </a:xfrm>
           <a:prstGeom prst="rect">
@@ -13471,7 +14601,7 @@
           <a:lstStyle/>
           <a:p>
             <a:r>
-              <a:rPr lang="en-US" sz="2400" dirty="0"/>
+              <a:rPr lang="en-US" sz="1920" dirty="0"/>
               <a:t>x   (t) </a:t>
             </a:r>
           </a:p>
@@ -13485,7 +14615,7 @@
         </p:nvSpPr>
         <p:spPr>
           <a:xfrm>
-            <a:off x="6708714" y="4495800"/>
+            <a:off x="6708714" y="4838700"/>
             <a:ext cx="301686" cy="369332"/>
           </a:xfrm>
           <a:prstGeom prst="rect">
@@ -13502,6 +14632,207 @@
             <a:r>
               <a:rPr lang="en-US" dirty="0"/>
               <a:t>0</a:t>
+            </a:r>
+          </a:p>
+        </p:txBody>
+      </p:sp>
+      <p:sp>
+        <p:nvSpPr>
+          <p:cNvPr id="94" name="DSPIRA 1"/>
+          <p:cNvSpPr>
+            <a:spLocks noGrp="1"/>
+          </p:cNvSpPr>
+          <p:nvPr/>
+        </p:nvSpPr>
+        <p:spPr>
+          <a:xfrm>
+            <a:off x="0" y="0"/>
+            <a:ext cx="9144000" cy="342900"/>
+          </a:xfrm>
+          <a:prstGeom prst="rect">
+            <a:avLst/>
+          </a:prstGeom>
+          <a:solidFill>
+            <a:srgbClr val="FFFFFF"/>
+          </a:solidFill>
+          <a:ln w="0">
+            <a:noFill/>
+          </a:ln>
+        </p:spPr>
+      </p:sp>
+      <p:sp>
+        <p:nvSpPr>
+          <p:cNvPr id="95" name="DSPIRA 2"/>
+          <p:cNvSpPr>
+            <a:spLocks noGrp="1"/>
+          </p:cNvSpPr>
+          <p:nvPr/>
+        </p:nvSpPr>
+        <p:spPr>
+          <a:xfrm>
+            <a:off x="0" y="7200900"/>
+            <a:ext cx="9144000" cy="342900"/>
+          </a:xfrm>
+          <a:prstGeom prst="rect">
+            <a:avLst/>
+          </a:prstGeom>
+          <a:solidFill>
+            <a:srgbClr val="FFFFFF"/>
+          </a:solidFill>
+          <a:ln w="0">
+            <a:noFill/>
+          </a:ln>
+        </p:spPr>
+      </p:sp>
+      <p:sp>
+        <p:nvSpPr>
+          <p:cNvPr id="96" name="DSPIRA 3"/>
+          <p:cNvSpPr>
+            <a:spLocks noGrp="1"/>
+          </p:cNvSpPr>
+          <p:nvPr/>
+        </p:nvSpPr>
+        <p:spPr>
+          <a:xfrm>
+            <a:off x="228600" y="76200"/>
+            <a:ext cx="4762500" cy="228600"/>
+          </a:xfrm>
+          <a:prstGeom prst="rect">
+            <a:avLst/>
+          </a:prstGeom>
+          <a:noFill/>
+          <a:ln w="0">
+            <a:noFill/>
+          </a:ln>
+        </p:spPr>
+        <p:txBody>
+          <a:bodyPr>
+            <a:noAutofit/>
+          </a:bodyPr>
+          <a:lstStyle/>
+          <a:p>
+            <a:pPr>
+              <a:defRPr sz="1200" b="1">
+                <a:solidFill>
+                  <a:srgbClr val="002855"/>
+                </a:solidFill>
+                <a:latin typeface="Arial"/>
+                <a:ea typeface="Arial"/>
+                <a:cs typeface="Arial"/>
+              </a:defRPr>
+            </a:pPr>
+            <a:r>
+              <a:rPr sz="1200" b="1">
+                <a:solidFill>
+                  <a:srgbClr val="002855"/>
+                </a:solidFill>
+                <a:latin typeface="Arial"/>
+                <a:ea typeface="Arial"/>
+                <a:cs typeface="Arial"/>
+              </a:rPr>
+              <a:t>WVU DSPIRA</a:t>
+            </a:r>
+          </a:p>
+        </p:txBody>
+      </p:sp>
+      <p:sp>
+        <p:nvSpPr>
+          <p:cNvPr id="97" name="DSPIRA 4"/>
+          <p:cNvSpPr>
+            <a:spLocks noGrp="1"/>
+          </p:cNvSpPr>
+          <p:nvPr/>
+        </p:nvSpPr>
+        <p:spPr>
+          <a:xfrm>
+            <a:off x="228600" y="7277100"/>
+            <a:ext cx="6667500" cy="228600"/>
+          </a:xfrm>
+          <a:prstGeom prst="rect">
+            <a:avLst/>
+          </a:prstGeom>
+          <a:noFill/>
+          <a:ln w="0">
+            <a:noFill/>
+          </a:ln>
+        </p:spPr>
+        <p:txBody>
+          <a:bodyPr>
+            <a:noAutofit/>
+          </a:bodyPr>
+          <a:lstStyle/>
+          <a:p>
+            <a:pPr>
+              <a:defRPr sz="900" b="0">
+                <a:solidFill>
+                  <a:srgbClr val="002855"/>
+                </a:solidFill>
+                <a:latin typeface="Arial"/>
+                <a:ea typeface="Arial"/>
+                <a:cs typeface="Arial"/>
+              </a:defRPr>
+            </a:pPr>
+            <a:r>
+              <a:rPr sz="900" b="0">
+                <a:solidFill>
+                  <a:srgbClr val="002855"/>
+                </a:solidFill>
+                <a:latin typeface="Arial"/>
+                <a:ea typeface="Arial"/>
+                <a:cs typeface="Arial"/>
+              </a:rPr>
+              <a:t>wvurail.org/dspira</a:t>
+            </a:r>
+          </a:p>
+        </p:txBody>
+      </p:sp>
+      <p:sp>
+        <p:nvSpPr>
+          <p:cNvPr id="98" name="DSPIRA 5"/>
+          <p:cNvSpPr>
+            <a:spLocks noGrp="1"/>
+          </p:cNvSpPr>
+          <p:nvPr/>
+        </p:nvSpPr>
+        <p:spPr>
+          <a:xfrm>
+            <a:off x="8143875" y="7277100"/>
+            <a:ext cx="762000" cy="228600"/>
+          </a:xfrm>
+          <a:prstGeom prst="rect">
+            <a:avLst/>
+          </a:prstGeom>
+          <a:noFill/>
+          <a:ln w="0">
+            <a:noFill/>
+          </a:ln>
+        </p:spPr>
+        <p:txBody>
+          <a:bodyPr>
+            <a:noAutofit/>
+          </a:bodyPr>
+          <a:lstStyle/>
+          <a:p>
+            <a:pPr>
+              <a:defRPr sz="900" b="0">
+                <a:solidFill>
+                  <a:srgbClr val="002855"/>
+                </a:solidFill>
+                <a:latin typeface="Arial"/>
+                <a:ea typeface="Arial"/>
+                <a:cs typeface="Arial"/>
+              </a:defRPr>
+            </a:pPr>
+            <a:r>
+              <a:rPr sz="900" b="0">
+                <a:solidFill>
+                  <a:srgbClr val="002855"/>
+                </a:solidFill>
+                <a:latin typeface="Arial"/>
+                <a:ea typeface="Arial"/>
+                <a:cs typeface="Arial"/>
+              </a:rPr>
+              <a:t>8 of 10</a:t>
             </a:r>
           </a:p>
         </p:txBody>
@@ -13564,7 +14895,7 @@
         </p:nvSpPr>
         <p:spPr bwMode="ltGray">
           <a:xfrm>
-            <a:off x="252662" y="321176"/>
+            <a:off x="252662" y="664076"/>
             <a:ext cx="5380685" cy="5896743"/>
           </a:xfrm>
           <a:prstGeom prst="rect">
@@ -13618,7 +14949,7 @@
         </p:nvSpPr>
         <p:spPr>
           <a:xfrm>
-            <a:off x="616137" y="640263"/>
+            <a:off x="616137" y="983163"/>
             <a:ext cx="4653738" cy="1344975"/>
           </a:xfrm>
           <a:prstGeom prst="rect">
@@ -13647,14 +14978,14 @@
               <a:defRPr/>
             </a:pPr>
             <a:r>
-              <a:rPr kumimoji="0" lang="en-US" sz="3500" b="0" i="0" u="none" strike="noStrike" cap="none" spc="0" normalizeH="0" baseline="0" noProof="0">
+              <a:rPr kumimoji="0" lang="en-US" sz="2800" b="0" i="0" u="none" strike="noStrike" cap="none" spc="0" normalizeH="0" baseline="0" noProof="0">
                 <a:ln>
                   <a:noFill/>
                 </a:ln>
                 <a:effectLst/>
                 <a:uLnTx/>
                 <a:uFillTx/>
-                <a:latin typeface="+mj-lt"/>
+                <a:latin typeface="Arial"/>
                 <a:ea typeface="+mj-ea"/>
                 <a:cs typeface="+mj-cs"/>
               </a:rPr>
@@ -13677,14 +15008,14 @@
               <a:tabLst/>
               <a:defRPr/>
             </a:pPr>
-            <a:endParaRPr kumimoji="0" lang="en-US" sz="3500" b="0" i="0" u="none" strike="noStrike" cap="none" spc="0" normalizeH="0" baseline="0" noProof="0">
+            <a:endParaRPr kumimoji="0" lang="en-US" sz="2800" b="0" i="0" u="none" strike="noStrike" cap="none" spc="0" normalizeH="0" baseline="0" noProof="0">
               <a:ln>
                 <a:noFill/>
               </a:ln>
               <a:effectLst/>
               <a:uLnTx/>
               <a:uFillTx/>
-              <a:latin typeface="+mj-lt"/>
+              <a:latin typeface="Arial"/>
               <a:ea typeface="+mj-ea"/>
               <a:cs typeface="+mj-cs"/>
             </a:endParaRPr>
@@ -13705,14 +15036,14 @@
               <a:tabLst/>
               <a:defRPr/>
             </a:pPr>
-            <a:endParaRPr kumimoji="0" lang="en-US" sz="3500" b="0" i="0" u="none" strike="noStrike" cap="none" spc="0" normalizeH="0" baseline="0" noProof="0">
+            <a:endParaRPr kumimoji="0" lang="en-US" sz="2800" b="0" i="0" u="none" strike="noStrike" cap="none" spc="0" normalizeH="0" baseline="0" noProof="0">
               <a:ln>
                 <a:noFill/>
               </a:ln>
               <a:effectLst/>
               <a:uLnTx/>
               <a:uFillTx/>
-              <a:latin typeface="+mj-lt"/>
+              <a:latin typeface="Arial"/>
               <a:ea typeface="+mj-ea"/>
               <a:cs typeface="+mj-cs"/>
             </a:endParaRPr>
@@ -13731,7 +15062,7 @@
         </p:nvSpPr>
         <p:spPr>
           <a:xfrm>
-            <a:off x="616136" y="2121762"/>
+            <a:off x="616136" y="2464662"/>
             <a:ext cx="4653738" cy="3626917"/>
           </a:xfrm>
         </p:spPr>
@@ -13749,7 +15080,7 @@
               <a:buChar char="•"/>
             </a:pPr>
             <a:r>
-              <a:rPr lang="en-US" sz="2100"/>
+              <a:rPr lang="en-US" sz="1680"/>
               <a:t>Left panel: Properly Sampled image of brick wall (493-by-599)  </a:t>
             </a:r>
           </a:p>
@@ -13761,7 +15092,7 @@
               <a:buFont typeface="Arial" panose="020B0604020202020204" pitchFamily="34" charset="0"/>
               <a:buChar char="•"/>
             </a:pPr>
-            <a:endParaRPr lang="en-US" sz="2100"/>
+            <a:endParaRPr lang="en-US" sz="1680"/>
           </a:p>
           <a:p>
             <a:pPr indent="-228600">
@@ -13772,17 +15103,17 @@
               <a:buChar char="•"/>
             </a:pPr>
             <a:r>
-              <a:rPr lang="en-US" sz="2100"/>
+              <a:rPr lang="en-US" sz="1680"/>
               <a:t>Right panel: Spatial aliasing in the form of a </a:t>
             </a:r>
             <a:r>
-              <a:rPr lang="en-US" sz="2100">
+              <a:rPr lang="en-US" sz="1680">
                 <a:hlinkClick r:id="rId2" action="ppaction://hlinkfile" tooltip="Moiré pattern"/>
               </a:rPr>
               <a:t>Moiré pattern</a:t>
             </a:r>
             <a:r>
-              <a:rPr lang="en-US" sz="2100"/>
+              <a:rPr lang="en-US" sz="1680"/>
               <a:t> (205-by-250) </a:t>
             </a:r>
           </a:p>
@@ -13794,7 +15125,7 @@
               <a:buFont typeface="Arial" panose="020B0604020202020204" pitchFamily="34" charset="0"/>
               <a:buChar char="•"/>
             </a:pPr>
-            <a:endParaRPr lang="en-US" sz="2100"/>
+            <a:endParaRPr lang="en-US" sz="1680"/>
           </a:p>
           <a:p>
             <a:pPr indent="-228600">
@@ -13805,7 +15136,7 @@
               <a:buChar char="•"/>
             </a:pPr>
             <a:r>
-              <a:rPr lang="en-US" sz="2100"/>
+              <a:rPr lang="en-US" sz="1680"/>
               <a:t>http://en.wikipedia.org/wiki/Aliasing</a:t>
             </a:r>
           </a:p>
@@ -13817,7 +15148,7 @@
               <a:buFont typeface="Arial" panose="020B0604020202020204" pitchFamily="34" charset="0"/>
               <a:buChar char="•"/>
             </a:pPr>
-            <a:endParaRPr lang="en-US" sz="2100"/>
+            <a:endParaRPr lang="en-US" sz="1680"/>
           </a:p>
           <a:p>
             <a:pPr indent="-228600">
@@ -13827,7 +15158,7 @@
               <a:buFont typeface="Arial" panose="020B0604020202020204" pitchFamily="34" charset="0"/>
               <a:buChar char="•"/>
             </a:pPr>
-            <a:endParaRPr lang="en-US" sz="2100"/>
+            <a:endParaRPr lang="en-US" sz="1680"/>
           </a:p>
         </p:txBody>
       </p:sp>
@@ -13847,7 +15178,7 @@
         </p:blipFill>
         <p:spPr>
           <a:xfrm>
-            <a:off x="6096000" y="321940"/>
+            <a:off x="6096000" y="664840"/>
             <a:ext cx="2679172" cy="3257352"/>
           </a:xfrm>
           <a:prstGeom prst="rect">
@@ -13871,7 +15202,7 @@
         </p:blipFill>
         <p:spPr>
           <a:xfrm>
-            <a:off x="6774073" y="4126898"/>
+            <a:off x="6774073" y="4469798"/>
             <a:ext cx="1425154" cy="1737993"/>
           </a:xfrm>
           <a:prstGeom prst="rect">
@@ -13881,41 +15212,202 @@
       </p:pic>
       <p:sp>
         <p:nvSpPr>
-          <p:cNvPr id="14" name="Slide Number Placeholder 13"/>
+          <p:cNvPr id="27" name="DSPIRA 1"/>
           <p:cNvSpPr>
             <a:spLocks noGrp="1"/>
           </p:cNvSpPr>
-          <p:nvPr>
-            <p:ph type="sldNum" sz="quarter" idx="12"/>
-          </p:nvPr>
-        </p:nvSpPr>
-        <p:spPr>
-          <a:xfrm>
-            <a:off x="6457950" y="6356350"/>
-            <a:ext cx="2057400" cy="365125"/>
-          </a:xfrm>
-        </p:spPr>
-        <p:txBody>
-          <a:bodyPr vert="horz" lIns="91440" tIns="45720" rIns="91440" bIns="45720" rtlCol="0" anchor="ctr">
-            <a:normAutofit/>
+          <p:nvPr/>
+        </p:nvSpPr>
+        <p:spPr>
+          <a:xfrm>
+            <a:off x="0" y="0"/>
+            <a:ext cx="9144000" cy="342900"/>
+          </a:xfrm>
+          <a:prstGeom prst="rect">
+            <a:avLst/>
+          </a:prstGeom>
+          <a:solidFill>
+            <a:srgbClr val="FFFFFF"/>
+          </a:solidFill>
+          <a:ln w="0">
+            <a:noFill/>
+          </a:ln>
+        </p:spPr>
+      </p:sp>
+      <p:sp>
+        <p:nvSpPr>
+          <p:cNvPr id="28" name="DSPIRA 2"/>
+          <p:cNvSpPr>
+            <a:spLocks noGrp="1"/>
+          </p:cNvSpPr>
+          <p:nvPr/>
+        </p:nvSpPr>
+        <p:spPr>
+          <a:xfrm>
+            <a:off x="0" y="7200900"/>
+            <a:ext cx="9144000" cy="342900"/>
+          </a:xfrm>
+          <a:prstGeom prst="rect">
+            <a:avLst/>
+          </a:prstGeom>
+          <a:solidFill>
+            <a:srgbClr val="FFFFFF"/>
+          </a:solidFill>
+          <a:ln w="0">
+            <a:noFill/>
+          </a:ln>
+        </p:spPr>
+      </p:sp>
+      <p:sp>
+        <p:nvSpPr>
+          <p:cNvPr id="29" name="DSPIRA 3"/>
+          <p:cNvSpPr>
+            <a:spLocks noGrp="1"/>
+          </p:cNvSpPr>
+          <p:nvPr/>
+        </p:nvSpPr>
+        <p:spPr>
+          <a:xfrm>
+            <a:off x="228600" y="76200"/>
+            <a:ext cx="4762500" cy="228600"/>
+          </a:xfrm>
+          <a:prstGeom prst="rect">
+            <a:avLst/>
+          </a:prstGeom>
+          <a:noFill/>
+          <a:ln w="0">
+            <a:noFill/>
+          </a:ln>
+        </p:spPr>
+        <p:txBody>
+          <a:bodyPr>
+            <a:noAutofit/>
           </a:bodyPr>
           <a:lstStyle/>
           <a:p>
             <a:pPr>
-              <a:spcAft>
-                <a:spcPts val="600"/>
-              </a:spcAft>
+              <a:defRPr sz="1200" b="1">
+                <a:solidFill>
+                  <a:srgbClr val="002855"/>
+                </a:solidFill>
+                <a:latin typeface="Arial"/>
+                <a:ea typeface="Arial"/>
+                <a:cs typeface="Arial"/>
+              </a:defRPr>
             </a:pPr>
-            <a:fld id="{B6F15528-21DE-4FAA-801E-634DDDAF4B2B}" type="slidenum">
-              <a:rPr lang="en-US" smtClean="0"/>
-              <a:pPr>
-                <a:spcAft>
-                  <a:spcPts val="600"/>
-                </a:spcAft>
-              </a:pPr>
-              <a:t>9</a:t>
-            </a:fld>
-            <a:endParaRPr lang="en-US"/>
+            <a:r>
+              <a:rPr sz="1200" b="1">
+                <a:solidFill>
+                  <a:srgbClr val="002855"/>
+                </a:solidFill>
+                <a:latin typeface="Arial"/>
+                <a:ea typeface="Arial"/>
+                <a:cs typeface="Arial"/>
+              </a:rPr>
+              <a:t>WVU DSPIRA</a:t>
+            </a:r>
+          </a:p>
+        </p:txBody>
+      </p:sp>
+      <p:sp>
+        <p:nvSpPr>
+          <p:cNvPr id="30" name="DSPIRA 4"/>
+          <p:cNvSpPr>
+            <a:spLocks noGrp="1"/>
+          </p:cNvSpPr>
+          <p:nvPr/>
+        </p:nvSpPr>
+        <p:spPr>
+          <a:xfrm>
+            <a:off x="228600" y="7277100"/>
+            <a:ext cx="6667500" cy="228600"/>
+          </a:xfrm>
+          <a:prstGeom prst="rect">
+            <a:avLst/>
+          </a:prstGeom>
+          <a:noFill/>
+          <a:ln w="0">
+            <a:noFill/>
+          </a:ln>
+        </p:spPr>
+        <p:txBody>
+          <a:bodyPr>
+            <a:noAutofit/>
+          </a:bodyPr>
+          <a:lstStyle/>
+          <a:p>
+            <a:pPr>
+              <a:defRPr sz="900" b="0">
+                <a:solidFill>
+                  <a:srgbClr val="002855"/>
+                </a:solidFill>
+                <a:latin typeface="Arial"/>
+                <a:ea typeface="Arial"/>
+                <a:cs typeface="Arial"/>
+              </a:defRPr>
+            </a:pPr>
+            <a:r>
+              <a:rPr sz="900" b="0">
+                <a:solidFill>
+                  <a:srgbClr val="002855"/>
+                </a:solidFill>
+                <a:latin typeface="Arial"/>
+                <a:ea typeface="Arial"/>
+                <a:cs typeface="Arial"/>
+              </a:rPr>
+              <a:t>wvurail.org/dspira</a:t>
+            </a:r>
+          </a:p>
+        </p:txBody>
+      </p:sp>
+      <p:sp>
+        <p:nvSpPr>
+          <p:cNvPr id="31" name="DSPIRA 5"/>
+          <p:cNvSpPr>
+            <a:spLocks noGrp="1"/>
+          </p:cNvSpPr>
+          <p:nvPr/>
+        </p:nvSpPr>
+        <p:spPr>
+          <a:xfrm>
+            <a:off x="8143875" y="7277100"/>
+            <a:ext cx="762000" cy="228600"/>
+          </a:xfrm>
+          <a:prstGeom prst="rect">
+            <a:avLst/>
+          </a:prstGeom>
+          <a:noFill/>
+          <a:ln w="0">
+            <a:noFill/>
+          </a:ln>
+        </p:spPr>
+        <p:txBody>
+          <a:bodyPr>
+            <a:noAutofit/>
+          </a:bodyPr>
+          <a:lstStyle/>
+          <a:p>
+            <a:pPr>
+              <a:defRPr sz="900" b="0">
+                <a:solidFill>
+                  <a:srgbClr val="002855"/>
+                </a:solidFill>
+                <a:latin typeface="Arial"/>
+                <a:ea typeface="Arial"/>
+                <a:cs typeface="Arial"/>
+              </a:defRPr>
+            </a:pPr>
+            <a:r>
+              <a:rPr sz="900" b="0">
+                <a:solidFill>
+                  <a:srgbClr val="002855"/>
+                </a:solidFill>
+                <a:latin typeface="Arial"/>
+                <a:ea typeface="Arial"/>
+                <a:cs typeface="Arial"/>
+              </a:rPr>
+              <a:t>9 of 10</a:t>
+            </a:r>
           </a:p>
         </p:txBody>
       </p:sp>
@@ -13970,7 +15462,7 @@
     </a:clrScheme>
     <a:fontScheme name="Office">
       <a:majorFont>
-        <a:latin typeface="Calibri"/>
+        <a:latin typeface="Arial"/>
         <a:ea typeface=""/>
         <a:cs typeface=""/>
         <a:font script="Jpan" typeface="ＭＳ Ｐゴシック"/>
@@ -14004,7 +15496,7 @@
         <a:font script="Uigh" typeface="Microsoft Uighur"/>
       </a:majorFont>
       <a:minorFont>
-        <a:latin typeface="Calibri"/>
+        <a:latin typeface="Arial"/>
         <a:ea typeface=""/>
         <a:cs typeface=""/>
         <a:font script="Jpan" typeface="ＭＳ Ｐゴシック"/>
@@ -14253,7 +15745,7 @@
     </a:clrScheme>
     <a:fontScheme name="Office">
       <a:majorFont>
-        <a:latin typeface="Calibri"/>
+        <a:latin typeface="Arial"/>
         <a:ea typeface=""/>
         <a:cs typeface=""/>
         <a:font script="Jpan" typeface="ＭＳ Ｐゴシック"/>
@@ -14287,7 +15779,7 @@
         <a:font script="Uigh" typeface="Microsoft Uighur"/>
       </a:majorFont>
       <a:minorFont>
-        <a:latin typeface="Calibri"/>
+        <a:latin typeface="Arial"/>
         <a:ea typeface=""/>
         <a:cs typeface=""/>
         <a:font script="Jpan" typeface="ＭＳ Ｐゴシック"/>
@@ -14536,7 +16028,7 @@
     </a:clrScheme>
     <a:fontScheme name="Office">
       <a:majorFont>
-        <a:latin typeface="Calibri"/>
+        <a:latin typeface="Arial"/>
         <a:ea typeface=""/>
         <a:cs typeface=""/>
         <a:font script="Jpan" typeface="ＭＳ Ｐゴシック"/>
@@ -14570,7 +16062,7 @@
         <a:font script="Uigh" typeface="Microsoft Uighur"/>
       </a:majorFont>
       <a:minorFont>
-        <a:latin typeface="Calibri"/>
+        <a:latin typeface="Arial"/>
         <a:ea typeface=""/>
         <a:cs typeface=""/>
         <a:font script="Jpan" typeface="ＭＳ Ｐゴシック"/>
@@ -14774,183 +16266,4 @@
   <a:objectDefaults/>
   <a:extraClrSchemeLst/>
 </a:theme>
-</file>
-
-<file path=customXml/item1.xml><?xml version="1.0" encoding="utf-8"?>
-<ct:contentTypeSchema xmlns:ct="http://schemas.microsoft.com/office/2006/metadata/contentType" xmlns:ma="http://schemas.microsoft.com/office/2006/metadata/properties/metaAttributes" ct:_="" ma:_="" ma:contentTypeName="Document" ma:contentTypeID="0x01010016C36F108F9F92488C988DDF36346911" ma:contentTypeVersion="5" ma:contentTypeDescription="Create a new document." ma:contentTypeScope="" ma:versionID="c417924321fef32731141cd966ef6f94">
-  <xsd:schema xmlns:xsd="http://www.w3.org/2001/XMLSchema" xmlns:xs="http://www.w3.org/2001/XMLSchema" xmlns:p="http://schemas.microsoft.com/office/2006/metadata/properties" xmlns:ns2="1bb24863-89de-455f-aabf-4424925aa312" targetNamespace="http://schemas.microsoft.com/office/2006/metadata/properties" ma:root="true" ma:fieldsID="a7d3b2212d350eb904df17fc79fef4f4" ns2:_="">
-    <xsd:import namespace="1bb24863-89de-455f-aabf-4424925aa312"/>
-    <xsd:element name="properties">
-      <xsd:complexType>
-        <xsd:sequence>
-          <xsd:element name="documentManagement">
-            <xsd:complexType>
-              <xsd:all>
-                <xsd:element ref="ns2:MediaServiceMetadata" minOccurs="0"/>
-                <xsd:element ref="ns2:MediaServiceFastMetadata" minOccurs="0"/>
-                <xsd:element ref="ns2:MediaServiceAutoTags" minOccurs="0"/>
-                <xsd:element ref="ns2:MediaServiceOCR" minOccurs="0"/>
-                <xsd:element ref="ns2:MediaServiceDateTaken" minOccurs="0"/>
-              </xsd:all>
-            </xsd:complexType>
-          </xsd:element>
-        </xsd:sequence>
-      </xsd:complexType>
-    </xsd:element>
-  </xsd:schema>
-  <xsd:schema xmlns:xsd="http://www.w3.org/2001/XMLSchema" xmlns:xs="http://www.w3.org/2001/XMLSchema" xmlns:dms="http://schemas.microsoft.com/office/2006/documentManagement/types" xmlns:pc="http://schemas.microsoft.com/office/infopath/2007/PartnerControls" targetNamespace="1bb24863-89de-455f-aabf-4424925aa312" elementFormDefault="qualified">
-    <xsd:import namespace="http://schemas.microsoft.com/office/2006/documentManagement/types"/>
-    <xsd:import namespace="http://schemas.microsoft.com/office/infopath/2007/PartnerControls"/>
-    <xsd:element name="MediaServiceMetadata" ma:index="8" nillable="true" ma:displayName="MediaServiceMetadata" ma:hidden="true" ma:internalName="MediaServiceMetadata" ma:readOnly="true">
-      <xsd:simpleType>
-        <xsd:restriction base="dms:Note"/>
-      </xsd:simpleType>
-    </xsd:element>
-    <xsd:element name="MediaServiceFastMetadata" ma:index="9" nillable="true" ma:displayName="MediaServiceFastMetadata" ma:hidden="true" ma:internalName="MediaServiceFastMetadata" ma:readOnly="true">
-      <xsd:simpleType>
-        <xsd:restriction base="dms:Note"/>
-      </xsd:simpleType>
-    </xsd:element>
-    <xsd:element name="MediaServiceAutoTags" ma:index="10" nillable="true" ma:displayName="MediaServiceAutoTags" ma:internalName="MediaServiceAutoTags" ma:readOnly="true">
-      <xsd:simpleType>
-        <xsd:restriction base="dms:Text"/>
-      </xsd:simpleType>
-    </xsd:element>
-    <xsd:element name="MediaServiceOCR" ma:index="11" nillable="true" ma:displayName="MediaServiceOCR" ma:internalName="MediaServiceOCR" ma:readOnly="true">
-      <xsd:simpleType>
-        <xsd:restriction base="dms:Note">
-          <xsd:maxLength value="255"/>
-        </xsd:restriction>
-      </xsd:simpleType>
-    </xsd:element>
-    <xsd:element name="MediaServiceDateTaken" ma:index="12" nillable="true" ma:displayName="MediaServiceDateTaken" ma:hidden="true" ma:internalName="MediaServiceDateTaken" ma:readOnly="true">
-      <xsd:simpleType>
-        <xsd:restriction base="dms:Text"/>
-      </xsd:simpleType>
-    </xsd:element>
-  </xsd:schema>
-  <xsd:schema xmlns="http://schemas.openxmlformats.org/package/2006/metadata/core-properties" xmlns:xsd="http://www.w3.org/2001/XMLSchema" xmlns:xsi="http://www.w3.org/2001/XMLSchema-instance" xmlns:dc="http://purl.org/dc/elements/1.1/" xmlns:dcterms="http://purl.org/dc/terms/" xmlns:odoc="http://schemas.microsoft.com/internal/obd" targetNamespace="http://schemas.openxmlformats.org/package/2006/metadata/core-properties" elementFormDefault="qualified" attributeFormDefault="unqualified" blockDefault="#all">
-    <xsd:import namespace="http://purl.org/dc/elements/1.1/" schemaLocation="http://dublincore.org/schemas/xmls/qdc/2003/04/02/dc.xsd"/>
-    <xsd:import namespace="http://purl.org/dc/terms/" schemaLocation="http://dublincore.org/schemas/xmls/qdc/2003/04/02/dcterms.xsd"/>
-    <xsd:element name="coreProperties" type="CT_coreProperties"/>
-    <xsd:complexType name="CT_coreProperties">
-      <xsd:all>
-        <xsd:element ref="dc:creator" minOccurs="0" maxOccurs="1"/>
-        <xsd:element ref="dcterms:created" minOccurs="0" maxOccurs="1"/>
-        <xsd:element ref="dc:identifier" minOccurs="0" maxOccurs="1"/>
-        <xsd:element name="contentType" minOccurs="0" maxOccurs="1" type="xsd:string" ma:index="0" ma:displayName="Content Type"/>
-        <xsd:element ref="dc:title" minOccurs="0" maxOccurs="1" ma:index="4" ma:displayName="Title"/>
-        <xsd:element ref="dc:subject" minOccurs="0" maxOccurs="1"/>
-        <xsd:element ref="dc:description" minOccurs="0" maxOccurs="1"/>
-        <xsd:element name="keywords" minOccurs="0" maxOccurs="1" type="xsd:string"/>
-        <xsd:element ref="dc:language" minOccurs="0" maxOccurs="1"/>
-        <xsd:element name="category" minOccurs="0" maxOccurs="1" type="xsd:string"/>
-        <xsd:element name="version" minOccurs="0" maxOccurs="1" type="xsd:string"/>
-        <xsd:element name="revision" minOccurs="0" maxOccurs="1" type="xsd:string">
-          <xsd:annotation>
-            <xsd:documentation>
-                        This value indicates the number of saves or revisions. The application is responsible for updating this value after each revision.
-                    </xsd:documentation>
-          </xsd:annotation>
-        </xsd:element>
-        <xsd:element name="lastModifiedBy" minOccurs="0" maxOccurs="1" type="xsd:string"/>
-        <xsd:element ref="dcterms:modified" minOccurs="0" maxOccurs="1"/>
-        <xsd:element name="contentStatus" minOccurs="0" maxOccurs="1" type="xsd:string"/>
-      </xsd:all>
-    </xsd:complexType>
-  </xsd:schema>
-  <xs:schema xmlns:pc="http://schemas.microsoft.com/office/infopath/2007/PartnerControls" xmlns:xs="http://www.w3.org/2001/XMLSchema" targetNamespace="http://schemas.microsoft.com/office/infopath/2007/PartnerControls" elementFormDefault="qualified" attributeFormDefault="unqualified">
-    <xs:element name="Person">
-      <xs:complexType>
-        <xs:sequence>
-          <xs:element ref="pc:DisplayName" minOccurs="0"/>
-          <xs:element ref="pc:AccountId" minOccurs="0"/>
-          <xs:element ref="pc:AccountType" minOccurs="0"/>
-        </xs:sequence>
-      </xs:complexType>
-    </xs:element>
-    <xs:element name="DisplayName" type="xs:string"/>
-    <xs:element name="AccountId" type="xs:string"/>
-    <xs:element name="AccountType" type="xs:string"/>
-    <xs:element name="BDCAssociatedEntity">
-      <xs:complexType>
-        <xs:sequence>
-          <xs:element ref="pc:BDCEntity" minOccurs="0" maxOccurs="unbounded"/>
-        </xs:sequence>
-        <xs:attribute ref="pc:EntityNamespace"/>
-        <xs:attribute ref="pc:EntityName"/>
-        <xs:attribute ref="pc:SystemInstanceName"/>
-        <xs:attribute ref="pc:AssociationName"/>
-      </xs:complexType>
-    </xs:element>
-    <xs:attribute name="EntityNamespace" type="xs:string"/>
-    <xs:attribute name="EntityName" type="xs:string"/>
-    <xs:attribute name="SystemInstanceName" type="xs:string"/>
-    <xs:attribute name="AssociationName" type="xs:string"/>
-    <xs:element name="BDCEntity">
-      <xs:complexType>
-        <xs:sequence>
-          <xs:element ref="pc:EntityDisplayName" minOccurs="0"/>
-          <xs:element ref="pc:EntityInstanceReference" minOccurs="0"/>
-          <xs:element ref="pc:EntityId1" minOccurs="0"/>
-          <xs:element ref="pc:EntityId2" minOccurs="0"/>
-          <xs:element ref="pc:EntityId3" minOccurs="0"/>
-          <xs:element ref="pc:EntityId4" minOccurs="0"/>
-          <xs:element ref="pc:EntityId5" minOccurs="0"/>
-        </xs:sequence>
-      </xs:complexType>
-    </xs:element>
-    <xs:element name="EntityDisplayName" type="xs:string"/>
-    <xs:element name="EntityInstanceReference" type="xs:string"/>
-    <xs:element name="EntityId1" type="xs:string"/>
-    <xs:element name="EntityId2" type="xs:string"/>
-    <xs:element name="EntityId3" type="xs:string"/>
-    <xs:element name="EntityId4" type="xs:string"/>
-    <xs:element name="EntityId5" type="xs:string"/>
-    <xs:element name="Terms">
-      <xs:complexType>
-        <xs:sequence>
-          <xs:element ref="pc:TermInfo" minOccurs="0" maxOccurs="unbounded"/>
-        </xs:sequence>
-      </xs:complexType>
-    </xs:element>
-    <xs:element name="TermInfo">
-      <xs:complexType>
-        <xs:sequence>
-          <xs:element ref="pc:TermName" minOccurs="0"/>
-          <xs:element ref="pc:TermId" minOccurs="0"/>
-        </xs:sequence>
-      </xs:complexType>
-    </xs:element>
-    <xs:element name="TermName" type="xs:string"/>
-    <xs:element name="TermId" type="xs:string"/>
-  </xs:schema>
-</ct:contentTypeSchema>
-</file>
-
-<file path=customXml/item2.xml><?xml version="1.0" encoding="utf-8"?>
-<?mso-contentType ?>
-<FormTemplates xmlns="http://schemas.microsoft.com/sharepoint/v3/contenttype/forms">
-  <Display>DocumentLibraryForm</Display>
-  <Edit>DocumentLibraryForm</Edit>
-  <New>DocumentLibraryForm</New>
-</FormTemplates>
-</file>
-
-<file path=customXml/item3.xml><?xml version="1.0" encoding="utf-8"?>
-<p:properties xmlns:p="http://schemas.microsoft.com/office/2006/metadata/properties" xmlns:xsi="http://www.w3.org/2001/XMLSchema-instance" xmlns:pc="http://schemas.microsoft.com/office/infopath/2007/PartnerControls">
-  <documentManagement/>
-</p:properties>
-</file>
-
-<file path=customXml/itemProps1.xml><?xml version="1.0" encoding="utf-8"?>
-<ds:datastoreItem xmlns:ds="http://schemas.openxmlformats.org/officeDocument/2006/customXml" ds:itemID="{05919B30-49AC-47DE-A348-34F7E817606E}"/>
-</file>
-
-<file path=customXml/itemProps2.xml><?xml version="1.0" encoding="utf-8"?>
-<ds:datastoreItem xmlns:ds="http://schemas.openxmlformats.org/officeDocument/2006/customXml" ds:itemID="{A217FCB8-3C21-47EA-BD28-F986766CF26D}"/>
-</file>
-
-<file path=customXml/itemProps3.xml><?xml version="1.0" encoding="utf-8"?>
-<ds:datastoreItem xmlns:ds="http://schemas.openxmlformats.org/officeDocument/2006/customXml" ds:itemID="{8DCA140A-81BB-40DD-957A-904D2F637921}"/>
 </file>
--- a/assets/lessons/lectures/digital-signal-processing/sampling-2018.pptx
+++ b/assets/lessons/lectures/digital-signal-processing/sampling-2018.pptx
@@ -4273,7 +4273,7 @@
       </mc:AlternateContent>
       <p:sp>
         <p:nvSpPr>
-          <p:cNvPr id="15" name="DSPIRA 1"/>
+          <p:cNvPr id="16" name="DSPIRA 2"/>
           <p:cNvSpPr>
             <a:spLocks noGrp="1"/>
           </p:cNvSpPr>
@@ -4281,7 +4281,7 @@
         </p:nvSpPr>
         <p:spPr>
           <a:xfrm>
-            <a:off x="0" y="0"/>
+            <a:off x="0" y="7200900"/>
             <a:ext cx="9144000" cy="342900"/>
           </a:xfrm>
           <a:prstGeom prst="rect">
@@ -4294,81 +4294,6 @@
             <a:noFill/>
           </a:ln>
         </p:spPr>
-      </p:sp>
-      <p:sp>
-        <p:nvSpPr>
-          <p:cNvPr id="16" name="DSPIRA 2"/>
-          <p:cNvSpPr>
-            <a:spLocks noGrp="1"/>
-          </p:cNvSpPr>
-          <p:nvPr/>
-        </p:nvSpPr>
-        <p:spPr>
-          <a:xfrm>
-            <a:off x="0" y="7200900"/>
-            <a:ext cx="9144000" cy="342900"/>
-          </a:xfrm>
-          <a:prstGeom prst="rect">
-            <a:avLst/>
-          </a:prstGeom>
-          <a:solidFill>
-            <a:srgbClr val="FFFFFF"/>
-          </a:solidFill>
-          <a:ln w="0">
-            <a:noFill/>
-          </a:ln>
-        </p:spPr>
-      </p:sp>
-      <p:sp>
-        <p:nvSpPr>
-          <p:cNvPr id="17" name="DSPIRA 3"/>
-          <p:cNvSpPr>
-            <a:spLocks noGrp="1"/>
-          </p:cNvSpPr>
-          <p:nvPr/>
-        </p:nvSpPr>
-        <p:spPr>
-          <a:xfrm>
-            <a:off x="228600" y="76200"/>
-            <a:ext cx="4762500" cy="228600"/>
-          </a:xfrm>
-          <a:prstGeom prst="rect">
-            <a:avLst/>
-          </a:prstGeom>
-          <a:noFill/>
-          <a:ln w="0">
-            <a:noFill/>
-          </a:ln>
-        </p:spPr>
-        <p:txBody>
-          <a:bodyPr>
-            <a:noAutofit/>
-          </a:bodyPr>
-          <a:lstStyle/>
-          <a:p>
-            <a:pPr>
-              <a:defRPr sz="1200" b="1">
-                <a:solidFill>
-                  <a:srgbClr val="002855"/>
-                </a:solidFill>
-                <a:latin typeface="Arial"/>
-                <a:ea typeface="Arial"/>
-                <a:cs typeface="Arial"/>
-              </a:defRPr>
-            </a:pPr>
-            <a:r>
-              <a:rPr sz="1200" b="1">
-                <a:solidFill>
-                  <a:srgbClr val="002855"/>
-                </a:solidFill>
-                <a:latin typeface="Arial"/>
-                <a:ea typeface="Arial"/>
-                <a:cs typeface="Arial"/>
-              </a:rPr>
-              <a:t>WVU DSPIRA</a:t>
-            </a:r>
-          </a:p>
-        </p:txBody>
       </p:sp>
       <p:sp>
         <p:nvSpPr>
@@ -4468,6 +4393,156 @@
                 <a:cs typeface="Arial"/>
               </a:rPr>
               <a:t>1 of 10</a:t>
+            </a:r>
+          </a:p>
+        </p:txBody>
+      </p:sp>
+      <p:sp>
+        <p:nvSpPr>
+          <p:cNvPr id="20" name="WVU DSPIRA navy band"/>
+          <p:cNvSpPr>
+            <a:spLocks noGrp="1"/>
+          </p:cNvSpPr>
+          <p:nvPr/>
+        </p:nvSpPr>
+        <p:spPr>
+          <a:xfrm>
+            <a:off x="0" y="0"/>
+            <a:ext cx="9144000" cy="323850"/>
+          </a:xfrm>
+          <a:prstGeom prst="rect">
+            <a:avLst/>
+          </a:prstGeom>
+          <a:solidFill>
+            <a:srgbClr val="002855"/>
+          </a:solidFill>
+          <a:ln w="0">
+            <a:noFill/>
+          </a:ln>
+        </p:spPr>
+      </p:sp>
+      <p:sp>
+        <p:nvSpPr>
+          <p:cNvPr id="21" name="WVU DSPIRA gold rule"/>
+          <p:cNvSpPr>
+            <a:spLocks noGrp="1"/>
+          </p:cNvSpPr>
+          <p:nvPr/>
+        </p:nvSpPr>
+        <p:spPr>
+          <a:xfrm>
+            <a:off x="0" y="323850"/>
+            <a:ext cx="9144000" cy="19050"/>
+          </a:xfrm>
+          <a:prstGeom prst="rect">
+            <a:avLst/>
+          </a:prstGeom>
+          <a:solidFill>
+            <a:srgbClr val="EEAA00"/>
+          </a:solidFill>
+          <a:ln w="0">
+            <a:noFill/>
+          </a:ln>
+        </p:spPr>
+      </p:sp>
+      <p:sp>
+        <p:nvSpPr>
+          <p:cNvPr id="22" name="WVU DSPIRA name"/>
+          <p:cNvSpPr>
+            <a:spLocks noGrp="1"/>
+          </p:cNvSpPr>
+          <p:nvPr/>
+        </p:nvSpPr>
+        <p:spPr>
+          <a:xfrm>
+            <a:off x="228600" y="19050"/>
+            <a:ext cx="2857500" cy="257175"/>
+          </a:xfrm>
+          <a:prstGeom prst="rect">
+            <a:avLst/>
+          </a:prstGeom>
+          <a:noFill/>
+          <a:ln w="0">
+            <a:noFill/>
+          </a:ln>
+        </p:spPr>
+        <p:txBody>
+          <a:bodyPr>
+            <a:noAutofit/>
+          </a:bodyPr>
+          <a:lstStyle/>
+          <a:p>
+            <a:pPr>
+              <a:defRPr sz="1600" b="1">
+                <a:solidFill>
+                  <a:srgbClr val="FFFFFF"/>
+                </a:solidFill>
+                <a:latin typeface="Arial"/>
+                <a:ea typeface="Arial"/>
+                <a:cs typeface="Arial"/>
+              </a:defRPr>
+            </a:pPr>
+            <a:r>
+              <a:rPr sz="1600" b="1">
+                <a:solidFill>
+                  <a:srgbClr val="FFFFFF"/>
+                </a:solidFill>
+                <a:latin typeface="Arial"/>
+                <a:ea typeface="Arial"/>
+                <a:cs typeface="Arial"/>
+              </a:rPr>
+              <a:t>WVU DSPIRA</a:t>
+            </a:r>
+          </a:p>
+        </p:txBody>
+      </p:sp>
+      <p:sp>
+        <p:nvSpPr>
+          <p:cNvPr id="23" name="WVU DSPIRA university"/>
+          <p:cNvSpPr>
+            <a:spLocks noGrp="1"/>
+          </p:cNvSpPr>
+          <p:nvPr/>
+        </p:nvSpPr>
+        <p:spPr>
+          <a:xfrm>
+            <a:off x="6286500" y="114300"/>
+            <a:ext cx="2628900" cy="171450"/>
+          </a:xfrm>
+          <a:prstGeom prst="rect">
+            <a:avLst/>
+          </a:prstGeom>
+          <a:noFill/>
+          <a:ln w="0">
+            <a:noFill/>
+          </a:ln>
+        </p:spPr>
+        <p:txBody>
+          <a:bodyPr>
+            <a:noAutofit/>
+          </a:bodyPr>
+          <a:lstStyle/>
+          <a:p>
+            <a:pPr algn="r">
+              <a:defRPr sz="900">
+                <a:solidFill>
+                  <a:srgbClr val="FFFFFF"/>
+                </a:solidFill>
+                <a:latin typeface="Arial"/>
+                <a:ea typeface="Arial"/>
+                <a:cs typeface="Arial"/>
+              </a:defRPr>
+            </a:pPr>
+            <a:r>
+              <a:rPr sz="900">
+                <a:solidFill>
+                  <a:srgbClr val="FFFFFF"/>
+                </a:solidFill>
+                <a:latin typeface="Arial"/>
+                <a:ea typeface="Arial"/>
+                <a:cs typeface="Arial"/>
+              </a:rPr>
+              <a:t>WEST VIRGINIA UNIVERSITY</a:t>
             </a:r>
           </a:p>
         </p:txBody>
@@ -4658,7 +4733,7 @@
       </p:sp>
       <p:sp>
         <p:nvSpPr>
-          <p:cNvPr id="13" name="DSPIRA 1"/>
+          <p:cNvPr id="14" name="DSPIRA 2"/>
           <p:cNvSpPr>
             <a:spLocks noGrp="1"/>
           </p:cNvSpPr>
@@ -4666,7 +4741,7 @@
         </p:nvSpPr>
         <p:spPr>
           <a:xfrm>
-            <a:off x="0" y="0"/>
+            <a:off x="0" y="7200900"/>
             <a:ext cx="9144000" cy="342900"/>
           </a:xfrm>
           <a:prstGeom prst="rect">
@@ -4679,81 +4754,6 @@
             <a:noFill/>
           </a:ln>
         </p:spPr>
-      </p:sp>
-      <p:sp>
-        <p:nvSpPr>
-          <p:cNvPr id="14" name="DSPIRA 2"/>
-          <p:cNvSpPr>
-            <a:spLocks noGrp="1"/>
-          </p:cNvSpPr>
-          <p:nvPr/>
-        </p:nvSpPr>
-        <p:spPr>
-          <a:xfrm>
-            <a:off x="0" y="7200900"/>
-            <a:ext cx="9144000" cy="342900"/>
-          </a:xfrm>
-          <a:prstGeom prst="rect">
-            <a:avLst/>
-          </a:prstGeom>
-          <a:solidFill>
-            <a:srgbClr val="FFFFFF"/>
-          </a:solidFill>
-          <a:ln w="0">
-            <a:noFill/>
-          </a:ln>
-        </p:spPr>
-      </p:sp>
-      <p:sp>
-        <p:nvSpPr>
-          <p:cNvPr id="15" name="DSPIRA 3"/>
-          <p:cNvSpPr>
-            <a:spLocks noGrp="1"/>
-          </p:cNvSpPr>
-          <p:nvPr/>
-        </p:nvSpPr>
-        <p:spPr>
-          <a:xfrm>
-            <a:off x="228600" y="76200"/>
-            <a:ext cx="4762500" cy="228600"/>
-          </a:xfrm>
-          <a:prstGeom prst="rect">
-            <a:avLst/>
-          </a:prstGeom>
-          <a:noFill/>
-          <a:ln w="0">
-            <a:noFill/>
-          </a:ln>
-        </p:spPr>
-        <p:txBody>
-          <a:bodyPr>
-            <a:noAutofit/>
-          </a:bodyPr>
-          <a:lstStyle/>
-          <a:p>
-            <a:pPr>
-              <a:defRPr sz="1200" b="1">
-                <a:solidFill>
-                  <a:srgbClr val="002855"/>
-                </a:solidFill>
-                <a:latin typeface="Arial"/>
-                <a:ea typeface="Arial"/>
-                <a:cs typeface="Arial"/>
-              </a:defRPr>
-            </a:pPr>
-            <a:r>
-              <a:rPr sz="1200" b="1">
-                <a:solidFill>
-                  <a:srgbClr val="002855"/>
-                </a:solidFill>
-                <a:latin typeface="Arial"/>
-                <a:ea typeface="Arial"/>
-                <a:cs typeface="Arial"/>
-              </a:rPr>
-              <a:t>WVU DSPIRA</a:t>
-            </a:r>
-          </a:p>
-        </p:txBody>
       </p:sp>
       <p:sp>
         <p:nvSpPr>
@@ -4853,6 +4853,156 @@
                 <a:cs typeface="Arial"/>
               </a:rPr>
               <a:t>10 of 10</a:t>
+            </a:r>
+          </a:p>
+        </p:txBody>
+      </p:sp>
+      <p:sp>
+        <p:nvSpPr>
+          <p:cNvPr id="18" name="WVU DSPIRA navy band"/>
+          <p:cNvSpPr>
+            <a:spLocks noGrp="1"/>
+          </p:cNvSpPr>
+          <p:nvPr/>
+        </p:nvSpPr>
+        <p:spPr>
+          <a:xfrm>
+            <a:off x="0" y="0"/>
+            <a:ext cx="9144000" cy="323850"/>
+          </a:xfrm>
+          <a:prstGeom prst="rect">
+            <a:avLst/>
+          </a:prstGeom>
+          <a:solidFill>
+            <a:srgbClr val="002855"/>
+          </a:solidFill>
+          <a:ln w="0">
+            <a:noFill/>
+          </a:ln>
+        </p:spPr>
+      </p:sp>
+      <p:sp>
+        <p:nvSpPr>
+          <p:cNvPr id="19" name="WVU DSPIRA gold rule"/>
+          <p:cNvSpPr>
+            <a:spLocks noGrp="1"/>
+          </p:cNvSpPr>
+          <p:nvPr/>
+        </p:nvSpPr>
+        <p:spPr>
+          <a:xfrm>
+            <a:off x="0" y="323850"/>
+            <a:ext cx="9144000" cy="19050"/>
+          </a:xfrm>
+          <a:prstGeom prst="rect">
+            <a:avLst/>
+          </a:prstGeom>
+          <a:solidFill>
+            <a:srgbClr val="EEAA00"/>
+          </a:solidFill>
+          <a:ln w="0">
+            <a:noFill/>
+          </a:ln>
+        </p:spPr>
+      </p:sp>
+      <p:sp>
+        <p:nvSpPr>
+          <p:cNvPr id="20" name="WVU DSPIRA name"/>
+          <p:cNvSpPr>
+            <a:spLocks noGrp="1"/>
+          </p:cNvSpPr>
+          <p:nvPr/>
+        </p:nvSpPr>
+        <p:spPr>
+          <a:xfrm>
+            <a:off x="228600" y="19050"/>
+            <a:ext cx="2857500" cy="257175"/>
+          </a:xfrm>
+          <a:prstGeom prst="rect">
+            <a:avLst/>
+          </a:prstGeom>
+          <a:noFill/>
+          <a:ln w="0">
+            <a:noFill/>
+          </a:ln>
+        </p:spPr>
+        <p:txBody>
+          <a:bodyPr>
+            <a:noAutofit/>
+          </a:bodyPr>
+          <a:lstStyle/>
+          <a:p>
+            <a:pPr>
+              <a:defRPr sz="1600" b="1">
+                <a:solidFill>
+                  <a:srgbClr val="FFFFFF"/>
+                </a:solidFill>
+                <a:latin typeface="Arial"/>
+                <a:ea typeface="Arial"/>
+                <a:cs typeface="Arial"/>
+              </a:defRPr>
+            </a:pPr>
+            <a:r>
+              <a:rPr sz="1600" b="1">
+                <a:solidFill>
+                  <a:srgbClr val="FFFFFF"/>
+                </a:solidFill>
+                <a:latin typeface="Arial"/>
+                <a:ea typeface="Arial"/>
+                <a:cs typeface="Arial"/>
+              </a:rPr>
+              <a:t>WVU DSPIRA</a:t>
+            </a:r>
+          </a:p>
+        </p:txBody>
+      </p:sp>
+      <p:sp>
+        <p:nvSpPr>
+          <p:cNvPr id="21" name="WVU DSPIRA university"/>
+          <p:cNvSpPr>
+            <a:spLocks noGrp="1"/>
+          </p:cNvSpPr>
+          <p:nvPr/>
+        </p:nvSpPr>
+        <p:spPr>
+          <a:xfrm>
+            <a:off x="6286500" y="114300"/>
+            <a:ext cx="2628900" cy="171450"/>
+          </a:xfrm>
+          <a:prstGeom prst="rect">
+            <a:avLst/>
+          </a:prstGeom>
+          <a:noFill/>
+          <a:ln w="0">
+            <a:noFill/>
+          </a:ln>
+        </p:spPr>
+        <p:txBody>
+          <a:bodyPr>
+            <a:noAutofit/>
+          </a:bodyPr>
+          <a:lstStyle/>
+          <a:p>
+            <a:pPr algn="r">
+              <a:defRPr sz="900">
+                <a:solidFill>
+                  <a:srgbClr val="FFFFFF"/>
+                </a:solidFill>
+                <a:latin typeface="Arial"/>
+                <a:ea typeface="Arial"/>
+                <a:cs typeface="Arial"/>
+              </a:defRPr>
+            </a:pPr>
+            <a:r>
+              <a:rPr sz="900">
+                <a:solidFill>
+                  <a:srgbClr val="FFFFFF"/>
+                </a:solidFill>
+                <a:latin typeface="Arial"/>
+                <a:ea typeface="Arial"/>
+                <a:cs typeface="Arial"/>
+              </a:rPr>
+              <a:t>WEST VIRGINIA UNIVERSITY</a:t>
             </a:r>
           </a:p>
         </p:txBody>
@@ -5613,7 +5763,7 @@
       </p:sp>
       <p:sp>
         <p:nvSpPr>
-          <p:cNvPr id="17" name="DSPIRA 1"/>
+          <p:cNvPr id="18" name="DSPIRA 2"/>
           <p:cNvSpPr>
             <a:spLocks noGrp="1"/>
           </p:cNvSpPr>
@@ -5621,7 +5771,7 @@
         </p:nvSpPr>
         <p:spPr>
           <a:xfrm>
-            <a:off x="0" y="0"/>
+            <a:off x="0" y="7200900"/>
             <a:ext cx="9144000" cy="342900"/>
           </a:xfrm>
           <a:prstGeom prst="rect">
@@ -5634,81 +5784,6 @@
             <a:noFill/>
           </a:ln>
         </p:spPr>
-      </p:sp>
-      <p:sp>
-        <p:nvSpPr>
-          <p:cNvPr id="18" name="DSPIRA 2"/>
-          <p:cNvSpPr>
-            <a:spLocks noGrp="1"/>
-          </p:cNvSpPr>
-          <p:nvPr/>
-        </p:nvSpPr>
-        <p:spPr>
-          <a:xfrm>
-            <a:off x="0" y="7200900"/>
-            <a:ext cx="9144000" cy="342900"/>
-          </a:xfrm>
-          <a:prstGeom prst="rect">
-            <a:avLst/>
-          </a:prstGeom>
-          <a:solidFill>
-            <a:srgbClr val="FFFFFF"/>
-          </a:solidFill>
-          <a:ln w="0">
-            <a:noFill/>
-          </a:ln>
-        </p:spPr>
-      </p:sp>
-      <p:sp>
-        <p:nvSpPr>
-          <p:cNvPr id="19" name="DSPIRA 3"/>
-          <p:cNvSpPr>
-            <a:spLocks noGrp="1"/>
-          </p:cNvSpPr>
-          <p:nvPr/>
-        </p:nvSpPr>
-        <p:spPr>
-          <a:xfrm>
-            <a:off x="228600" y="76200"/>
-            <a:ext cx="4762500" cy="228600"/>
-          </a:xfrm>
-          <a:prstGeom prst="rect">
-            <a:avLst/>
-          </a:prstGeom>
-          <a:noFill/>
-          <a:ln w="0">
-            <a:noFill/>
-          </a:ln>
-        </p:spPr>
-        <p:txBody>
-          <a:bodyPr>
-            <a:noAutofit/>
-          </a:bodyPr>
-          <a:lstStyle/>
-          <a:p>
-            <a:pPr>
-              <a:defRPr sz="1200" b="1">
-                <a:solidFill>
-                  <a:srgbClr val="002855"/>
-                </a:solidFill>
-                <a:latin typeface="Arial"/>
-                <a:ea typeface="Arial"/>
-                <a:cs typeface="Arial"/>
-              </a:defRPr>
-            </a:pPr>
-            <a:r>
-              <a:rPr sz="1200" b="1">
-                <a:solidFill>
-                  <a:srgbClr val="002855"/>
-                </a:solidFill>
-                <a:latin typeface="Arial"/>
-                <a:ea typeface="Arial"/>
-                <a:cs typeface="Arial"/>
-              </a:rPr>
-              <a:t>WVU DSPIRA</a:t>
-            </a:r>
-          </a:p>
-        </p:txBody>
       </p:sp>
       <p:sp>
         <p:nvSpPr>
@@ -5808,6 +5883,156 @@
                 <a:cs typeface="Arial"/>
               </a:rPr>
               <a:t>2 of 10</a:t>
+            </a:r>
+          </a:p>
+        </p:txBody>
+      </p:sp>
+      <p:sp>
+        <p:nvSpPr>
+          <p:cNvPr id="22" name="WVU DSPIRA navy band"/>
+          <p:cNvSpPr>
+            <a:spLocks noGrp="1"/>
+          </p:cNvSpPr>
+          <p:nvPr/>
+        </p:nvSpPr>
+        <p:spPr>
+          <a:xfrm>
+            <a:off x="0" y="0"/>
+            <a:ext cx="9144000" cy="323850"/>
+          </a:xfrm>
+          <a:prstGeom prst="rect">
+            <a:avLst/>
+          </a:prstGeom>
+          <a:solidFill>
+            <a:srgbClr val="002855"/>
+          </a:solidFill>
+          <a:ln w="0">
+            <a:noFill/>
+          </a:ln>
+        </p:spPr>
+      </p:sp>
+      <p:sp>
+        <p:nvSpPr>
+          <p:cNvPr id="23" name="WVU DSPIRA gold rule"/>
+          <p:cNvSpPr>
+            <a:spLocks noGrp="1"/>
+          </p:cNvSpPr>
+          <p:nvPr/>
+        </p:nvSpPr>
+        <p:spPr>
+          <a:xfrm>
+            <a:off x="0" y="323850"/>
+            <a:ext cx="9144000" cy="19050"/>
+          </a:xfrm>
+          <a:prstGeom prst="rect">
+            <a:avLst/>
+          </a:prstGeom>
+          <a:solidFill>
+            <a:srgbClr val="EEAA00"/>
+          </a:solidFill>
+          <a:ln w="0">
+            <a:noFill/>
+          </a:ln>
+        </p:spPr>
+      </p:sp>
+      <p:sp>
+        <p:nvSpPr>
+          <p:cNvPr id="24" name="WVU DSPIRA name"/>
+          <p:cNvSpPr>
+            <a:spLocks noGrp="1"/>
+          </p:cNvSpPr>
+          <p:nvPr/>
+        </p:nvSpPr>
+        <p:spPr>
+          <a:xfrm>
+            <a:off x="228600" y="19050"/>
+            <a:ext cx="2857500" cy="257175"/>
+          </a:xfrm>
+          <a:prstGeom prst="rect">
+            <a:avLst/>
+          </a:prstGeom>
+          <a:noFill/>
+          <a:ln w="0">
+            <a:noFill/>
+          </a:ln>
+        </p:spPr>
+        <p:txBody>
+          <a:bodyPr>
+            <a:noAutofit/>
+          </a:bodyPr>
+          <a:lstStyle/>
+          <a:p>
+            <a:pPr>
+              <a:defRPr sz="1600" b="1">
+                <a:solidFill>
+                  <a:srgbClr val="FFFFFF"/>
+                </a:solidFill>
+                <a:latin typeface="Arial"/>
+                <a:ea typeface="Arial"/>
+                <a:cs typeface="Arial"/>
+              </a:defRPr>
+            </a:pPr>
+            <a:r>
+              <a:rPr sz="1600" b="1">
+                <a:solidFill>
+                  <a:srgbClr val="FFFFFF"/>
+                </a:solidFill>
+                <a:latin typeface="Arial"/>
+                <a:ea typeface="Arial"/>
+                <a:cs typeface="Arial"/>
+              </a:rPr>
+              <a:t>WVU DSPIRA</a:t>
+            </a:r>
+          </a:p>
+        </p:txBody>
+      </p:sp>
+      <p:sp>
+        <p:nvSpPr>
+          <p:cNvPr id="25" name="WVU DSPIRA university"/>
+          <p:cNvSpPr>
+            <a:spLocks noGrp="1"/>
+          </p:cNvSpPr>
+          <p:nvPr/>
+        </p:nvSpPr>
+        <p:spPr>
+          <a:xfrm>
+            <a:off x="6286500" y="114300"/>
+            <a:ext cx="2628900" cy="171450"/>
+          </a:xfrm>
+          <a:prstGeom prst="rect">
+            <a:avLst/>
+          </a:prstGeom>
+          <a:noFill/>
+          <a:ln w="0">
+            <a:noFill/>
+          </a:ln>
+        </p:spPr>
+        <p:txBody>
+          <a:bodyPr>
+            <a:noAutofit/>
+          </a:bodyPr>
+          <a:lstStyle/>
+          <a:p>
+            <a:pPr algn="r">
+              <a:defRPr sz="900">
+                <a:solidFill>
+                  <a:srgbClr val="FFFFFF"/>
+                </a:solidFill>
+                <a:latin typeface="Arial"/>
+                <a:ea typeface="Arial"/>
+                <a:cs typeface="Arial"/>
+              </a:defRPr>
+            </a:pPr>
+            <a:r>
+              <a:rPr sz="900">
+                <a:solidFill>
+                  <a:srgbClr val="FFFFFF"/>
+                </a:solidFill>
+                <a:latin typeface="Arial"/>
+                <a:ea typeface="Arial"/>
+                <a:cs typeface="Arial"/>
+              </a:rPr>
+              <a:t>WEST VIRGINIA UNIVERSITY</a:t>
             </a:r>
           </a:p>
         </p:txBody>
@@ -6089,7 +6314,7 @@
       </p:sp>
       <p:sp>
         <p:nvSpPr>
-          <p:cNvPr id="22" name="DSPIRA 1"/>
+          <p:cNvPr id="23" name="DSPIRA 2"/>
           <p:cNvSpPr>
             <a:spLocks noGrp="1"/>
           </p:cNvSpPr>
@@ -6097,7 +6322,7 @@
         </p:nvSpPr>
         <p:spPr>
           <a:xfrm>
-            <a:off x="0" y="0"/>
+            <a:off x="0" y="7200900"/>
             <a:ext cx="9144000" cy="342900"/>
           </a:xfrm>
           <a:prstGeom prst="rect">
@@ -6110,81 +6335,6 @@
             <a:noFill/>
           </a:ln>
         </p:spPr>
-      </p:sp>
-      <p:sp>
-        <p:nvSpPr>
-          <p:cNvPr id="23" name="DSPIRA 2"/>
-          <p:cNvSpPr>
-            <a:spLocks noGrp="1"/>
-          </p:cNvSpPr>
-          <p:nvPr/>
-        </p:nvSpPr>
-        <p:spPr>
-          <a:xfrm>
-            <a:off x="0" y="7200900"/>
-            <a:ext cx="9144000" cy="342900"/>
-          </a:xfrm>
-          <a:prstGeom prst="rect">
-            <a:avLst/>
-          </a:prstGeom>
-          <a:solidFill>
-            <a:srgbClr val="FFFFFF"/>
-          </a:solidFill>
-          <a:ln w="0">
-            <a:noFill/>
-          </a:ln>
-        </p:spPr>
-      </p:sp>
-      <p:sp>
-        <p:nvSpPr>
-          <p:cNvPr id="24" name="DSPIRA 3"/>
-          <p:cNvSpPr>
-            <a:spLocks noGrp="1"/>
-          </p:cNvSpPr>
-          <p:nvPr/>
-        </p:nvSpPr>
-        <p:spPr>
-          <a:xfrm>
-            <a:off x="228600" y="76200"/>
-            <a:ext cx="4762500" cy="228600"/>
-          </a:xfrm>
-          <a:prstGeom prst="rect">
-            <a:avLst/>
-          </a:prstGeom>
-          <a:noFill/>
-          <a:ln w="0">
-            <a:noFill/>
-          </a:ln>
-        </p:spPr>
-        <p:txBody>
-          <a:bodyPr>
-            <a:noAutofit/>
-          </a:bodyPr>
-          <a:lstStyle/>
-          <a:p>
-            <a:pPr>
-              <a:defRPr sz="1200" b="1">
-                <a:solidFill>
-                  <a:srgbClr val="002855"/>
-                </a:solidFill>
-                <a:latin typeface="Arial"/>
-                <a:ea typeface="Arial"/>
-                <a:cs typeface="Arial"/>
-              </a:defRPr>
-            </a:pPr>
-            <a:r>
-              <a:rPr sz="1200" b="1">
-                <a:solidFill>
-                  <a:srgbClr val="002855"/>
-                </a:solidFill>
-                <a:latin typeface="Arial"/>
-                <a:ea typeface="Arial"/>
-                <a:cs typeface="Arial"/>
-              </a:rPr>
-              <a:t>WVU DSPIRA</a:t>
-            </a:r>
-          </a:p>
-        </p:txBody>
       </p:sp>
       <p:sp>
         <p:nvSpPr>
@@ -6284,6 +6434,156 @@
                 <a:cs typeface="Arial"/>
               </a:rPr>
               <a:t>3 of 10</a:t>
+            </a:r>
+          </a:p>
+        </p:txBody>
+      </p:sp>
+      <p:sp>
+        <p:nvSpPr>
+          <p:cNvPr id="27" name="WVU DSPIRA navy band"/>
+          <p:cNvSpPr>
+            <a:spLocks noGrp="1"/>
+          </p:cNvSpPr>
+          <p:nvPr/>
+        </p:nvSpPr>
+        <p:spPr>
+          <a:xfrm>
+            <a:off x="0" y="0"/>
+            <a:ext cx="9144000" cy="323850"/>
+          </a:xfrm>
+          <a:prstGeom prst="rect">
+            <a:avLst/>
+          </a:prstGeom>
+          <a:solidFill>
+            <a:srgbClr val="002855"/>
+          </a:solidFill>
+          <a:ln w="0">
+            <a:noFill/>
+          </a:ln>
+        </p:spPr>
+      </p:sp>
+      <p:sp>
+        <p:nvSpPr>
+          <p:cNvPr id="28" name="WVU DSPIRA gold rule"/>
+          <p:cNvSpPr>
+            <a:spLocks noGrp="1"/>
+          </p:cNvSpPr>
+          <p:nvPr/>
+        </p:nvSpPr>
+        <p:spPr>
+          <a:xfrm>
+            <a:off x="0" y="323850"/>
+            <a:ext cx="9144000" cy="19050"/>
+          </a:xfrm>
+          <a:prstGeom prst="rect">
+            <a:avLst/>
+          </a:prstGeom>
+          <a:solidFill>
+            <a:srgbClr val="EEAA00"/>
+          </a:solidFill>
+          <a:ln w="0">
+            <a:noFill/>
+          </a:ln>
+        </p:spPr>
+      </p:sp>
+      <p:sp>
+        <p:nvSpPr>
+          <p:cNvPr id="29" name="WVU DSPIRA name"/>
+          <p:cNvSpPr>
+            <a:spLocks noGrp="1"/>
+          </p:cNvSpPr>
+          <p:nvPr/>
+        </p:nvSpPr>
+        <p:spPr>
+          <a:xfrm>
+            <a:off x="228600" y="19050"/>
+            <a:ext cx="2857500" cy="257175"/>
+          </a:xfrm>
+          <a:prstGeom prst="rect">
+            <a:avLst/>
+          </a:prstGeom>
+          <a:noFill/>
+          <a:ln w="0">
+            <a:noFill/>
+          </a:ln>
+        </p:spPr>
+        <p:txBody>
+          <a:bodyPr>
+            <a:noAutofit/>
+          </a:bodyPr>
+          <a:lstStyle/>
+          <a:p>
+            <a:pPr>
+              <a:defRPr sz="1600" b="1">
+                <a:solidFill>
+                  <a:srgbClr val="FFFFFF"/>
+                </a:solidFill>
+                <a:latin typeface="Arial"/>
+                <a:ea typeface="Arial"/>
+                <a:cs typeface="Arial"/>
+              </a:defRPr>
+            </a:pPr>
+            <a:r>
+              <a:rPr sz="1600" b="1">
+                <a:solidFill>
+                  <a:srgbClr val="FFFFFF"/>
+                </a:solidFill>
+                <a:latin typeface="Arial"/>
+                <a:ea typeface="Arial"/>
+                <a:cs typeface="Arial"/>
+              </a:rPr>
+              <a:t>WVU DSPIRA</a:t>
+            </a:r>
+          </a:p>
+        </p:txBody>
+      </p:sp>
+      <p:sp>
+        <p:nvSpPr>
+          <p:cNvPr id="30" name="WVU DSPIRA university"/>
+          <p:cNvSpPr>
+            <a:spLocks noGrp="1"/>
+          </p:cNvSpPr>
+          <p:nvPr/>
+        </p:nvSpPr>
+        <p:spPr>
+          <a:xfrm>
+            <a:off x="6286500" y="114300"/>
+            <a:ext cx="2628900" cy="171450"/>
+          </a:xfrm>
+          <a:prstGeom prst="rect">
+            <a:avLst/>
+          </a:prstGeom>
+          <a:noFill/>
+          <a:ln w="0">
+            <a:noFill/>
+          </a:ln>
+        </p:spPr>
+        <p:txBody>
+          <a:bodyPr>
+            <a:noAutofit/>
+          </a:bodyPr>
+          <a:lstStyle/>
+          <a:p>
+            <a:pPr algn="r">
+              <a:defRPr sz="900">
+                <a:solidFill>
+                  <a:srgbClr val="FFFFFF"/>
+                </a:solidFill>
+                <a:latin typeface="Arial"/>
+                <a:ea typeface="Arial"/>
+                <a:cs typeface="Arial"/>
+              </a:defRPr>
+            </a:pPr>
+            <a:r>
+              <a:rPr sz="900">
+                <a:solidFill>
+                  <a:srgbClr val="FFFFFF"/>
+                </a:solidFill>
+                <a:latin typeface="Arial"/>
+                <a:ea typeface="Arial"/>
+                <a:cs typeface="Arial"/>
+              </a:rPr>
+              <a:t>WEST VIRGINIA UNIVERSITY</a:t>
             </a:r>
           </a:p>
         </p:txBody>
@@ -7179,7 +7479,7 @@
       </p:sp>
       <p:sp>
         <p:nvSpPr>
-          <p:cNvPr id="13" name="DSPIRA 1"/>
+          <p:cNvPr id="14" name="DSPIRA 2"/>
           <p:cNvSpPr>
             <a:spLocks noGrp="1"/>
           </p:cNvSpPr>
@@ -7187,7 +7487,7 @@
         </p:nvSpPr>
         <p:spPr>
           <a:xfrm>
-            <a:off x="0" y="0"/>
+            <a:off x="0" y="7200900"/>
             <a:ext cx="9144000" cy="342900"/>
           </a:xfrm>
           <a:prstGeom prst="rect">
@@ -7200,81 +7500,6 @@
             <a:noFill/>
           </a:ln>
         </p:spPr>
-      </p:sp>
-      <p:sp>
-        <p:nvSpPr>
-          <p:cNvPr id="14" name="DSPIRA 2"/>
-          <p:cNvSpPr>
-            <a:spLocks noGrp="1"/>
-          </p:cNvSpPr>
-          <p:nvPr/>
-        </p:nvSpPr>
-        <p:spPr>
-          <a:xfrm>
-            <a:off x="0" y="7200900"/>
-            <a:ext cx="9144000" cy="342900"/>
-          </a:xfrm>
-          <a:prstGeom prst="rect">
-            <a:avLst/>
-          </a:prstGeom>
-          <a:solidFill>
-            <a:srgbClr val="FFFFFF"/>
-          </a:solidFill>
-          <a:ln w="0">
-            <a:noFill/>
-          </a:ln>
-        </p:spPr>
-      </p:sp>
-      <p:sp>
-        <p:nvSpPr>
-          <p:cNvPr id="15" name="DSPIRA 3"/>
-          <p:cNvSpPr>
-            <a:spLocks noGrp="1"/>
-          </p:cNvSpPr>
-          <p:nvPr/>
-        </p:nvSpPr>
-        <p:spPr>
-          <a:xfrm>
-            <a:off x="228600" y="76200"/>
-            <a:ext cx="4762500" cy="228600"/>
-          </a:xfrm>
-          <a:prstGeom prst="rect">
-            <a:avLst/>
-          </a:prstGeom>
-          <a:noFill/>
-          <a:ln w="0">
-            <a:noFill/>
-          </a:ln>
-        </p:spPr>
-        <p:txBody>
-          <a:bodyPr>
-            <a:noAutofit/>
-          </a:bodyPr>
-          <a:lstStyle/>
-          <a:p>
-            <a:pPr>
-              <a:defRPr sz="1200" b="1">
-                <a:solidFill>
-                  <a:srgbClr val="002855"/>
-                </a:solidFill>
-                <a:latin typeface="Arial"/>
-                <a:ea typeface="Arial"/>
-                <a:cs typeface="Arial"/>
-              </a:defRPr>
-            </a:pPr>
-            <a:r>
-              <a:rPr sz="1200" b="1">
-                <a:solidFill>
-                  <a:srgbClr val="002855"/>
-                </a:solidFill>
-                <a:latin typeface="Arial"/>
-                <a:ea typeface="Arial"/>
-                <a:cs typeface="Arial"/>
-              </a:rPr>
-              <a:t>WVU DSPIRA</a:t>
-            </a:r>
-          </a:p>
-        </p:txBody>
       </p:sp>
       <p:sp>
         <p:nvSpPr>
@@ -7374,6 +7599,156 @@
                 <a:cs typeface="Arial"/>
               </a:rPr>
               <a:t>4 of 10</a:t>
+            </a:r>
+          </a:p>
+        </p:txBody>
+      </p:sp>
+      <p:sp>
+        <p:nvSpPr>
+          <p:cNvPr id="18" name="WVU DSPIRA navy band"/>
+          <p:cNvSpPr>
+            <a:spLocks noGrp="1"/>
+          </p:cNvSpPr>
+          <p:nvPr/>
+        </p:nvSpPr>
+        <p:spPr>
+          <a:xfrm>
+            <a:off x="0" y="0"/>
+            <a:ext cx="9144000" cy="323850"/>
+          </a:xfrm>
+          <a:prstGeom prst="rect">
+            <a:avLst/>
+          </a:prstGeom>
+          <a:solidFill>
+            <a:srgbClr val="002855"/>
+          </a:solidFill>
+          <a:ln w="0">
+            <a:noFill/>
+          </a:ln>
+        </p:spPr>
+      </p:sp>
+      <p:sp>
+        <p:nvSpPr>
+          <p:cNvPr id="19" name="WVU DSPIRA gold rule"/>
+          <p:cNvSpPr>
+            <a:spLocks noGrp="1"/>
+          </p:cNvSpPr>
+          <p:nvPr/>
+        </p:nvSpPr>
+        <p:spPr>
+          <a:xfrm>
+            <a:off x="0" y="323850"/>
+            <a:ext cx="9144000" cy="19050"/>
+          </a:xfrm>
+          <a:prstGeom prst="rect">
+            <a:avLst/>
+          </a:prstGeom>
+          <a:solidFill>
+            <a:srgbClr val="EEAA00"/>
+          </a:solidFill>
+          <a:ln w="0">
+            <a:noFill/>
+          </a:ln>
+        </p:spPr>
+      </p:sp>
+      <p:sp>
+        <p:nvSpPr>
+          <p:cNvPr id="20" name="WVU DSPIRA name"/>
+          <p:cNvSpPr>
+            <a:spLocks noGrp="1"/>
+          </p:cNvSpPr>
+          <p:nvPr/>
+        </p:nvSpPr>
+        <p:spPr>
+          <a:xfrm>
+            <a:off x="228600" y="19050"/>
+            <a:ext cx="2857500" cy="257175"/>
+          </a:xfrm>
+          <a:prstGeom prst="rect">
+            <a:avLst/>
+          </a:prstGeom>
+          <a:noFill/>
+          <a:ln w="0">
+            <a:noFill/>
+          </a:ln>
+        </p:spPr>
+        <p:txBody>
+          <a:bodyPr>
+            <a:noAutofit/>
+          </a:bodyPr>
+          <a:lstStyle/>
+          <a:p>
+            <a:pPr>
+              <a:defRPr sz="1600" b="1">
+                <a:solidFill>
+                  <a:srgbClr val="FFFFFF"/>
+                </a:solidFill>
+                <a:latin typeface="Arial"/>
+                <a:ea typeface="Arial"/>
+                <a:cs typeface="Arial"/>
+              </a:defRPr>
+            </a:pPr>
+            <a:r>
+              <a:rPr sz="1600" b="1">
+                <a:solidFill>
+                  <a:srgbClr val="FFFFFF"/>
+                </a:solidFill>
+                <a:latin typeface="Arial"/>
+                <a:ea typeface="Arial"/>
+                <a:cs typeface="Arial"/>
+              </a:rPr>
+              <a:t>WVU DSPIRA</a:t>
+            </a:r>
+          </a:p>
+        </p:txBody>
+      </p:sp>
+      <p:sp>
+        <p:nvSpPr>
+          <p:cNvPr id="21" name="WVU DSPIRA university"/>
+          <p:cNvSpPr>
+            <a:spLocks noGrp="1"/>
+          </p:cNvSpPr>
+          <p:nvPr/>
+        </p:nvSpPr>
+        <p:spPr>
+          <a:xfrm>
+            <a:off x="6286500" y="114300"/>
+            <a:ext cx="2628900" cy="171450"/>
+          </a:xfrm>
+          <a:prstGeom prst="rect">
+            <a:avLst/>
+          </a:prstGeom>
+          <a:noFill/>
+          <a:ln w="0">
+            <a:noFill/>
+          </a:ln>
+        </p:spPr>
+        <p:txBody>
+          <a:bodyPr>
+            <a:noAutofit/>
+          </a:bodyPr>
+          <a:lstStyle/>
+          <a:p>
+            <a:pPr algn="r">
+              <a:defRPr sz="900">
+                <a:solidFill>
+                  <a:srgbClr val="FFFFFF"/>
+                </a:solidFill>
+                <a:latin typeface="Arial"/>
+                <a:ea typeface="Arial"/>
+                <a:cs typeface="Arial"/>
+              </a:defRPr>
+            </a:pPr>
+            <a:r>
+              <a:rPr sz="900">
+                <a:solidFill>
+                  <a:srgbClr val="FFFFFF"/>
+                </a:solidFill>
+                <a:latin typeface="Arial"/>
+                <a:ea typeface="Arial"/>
+                <a:cs typeface="Arial"/>
+              </a:rPr>
+              <a:t>WEST VIRGINIA UNIVERSITY</a:t>
             </a:r>
           </a:p>
         </p:txBody>
@@ -8129,7 +8504,7 @@
       </p:sp>
       <p:sp>
         <p:nvSpPr>
-          <p:cNvPr id="25" name="DSPIRA 1"/>
+          <p:cNvPr id="26" name="DSPIRA 2"/>
           <p:cNvSpPr>
             <a:spLocks noGrp="1"/>
           </p:cNvSpPr>
@@ -8137,7 +8512,7 @@
         </p:nvSpPr>
         <p:spPr>
           <a:xfrm>
-            <a:off x="0" y="0"/>
+            <a:off x="0" y="7200900"/>
             <a:ext cx="9144000" cy="342900"/>
           </a:xfrm>
           <a:prstGeom prst="rect">
@@ -8150,81 +8525,6 @@
             <a:noFill/>
           </a:ln>
         </p:spPr>
-      </p:sp>
-      <p:sp>
-        <p:nvSpPr>
-          <p:cNvPr id="26" name="DSPIRA 2"/>
-          <p:cNvSpPr>
-            <a:spLocks noGrp="1"/>
-          </p:cNvSpPr>
-          <p:nvPr/>
-        </p:nvSpPr>
-        <p:spPr>
-          <a:xfrm>
-            <a:off x="0" y="7200900"/>
-            <a:ext cx="9144000" cy="342900"/>
-          </a:xfrm>
-          <a:prstGeom prst="rect">
-            <a:avLst/>
-          </a:prstGeom>
-          <a:solidFill>
-            <a:srgbClr val="FFFFFF"/>
-          </a:solidFill>
-          <a:ln w="0">
-            <a:noFill/>
-          </a:ln>
-        </p:spPr>
-      </p:sp>
-      <p:sp>
-        <p:nvSpPr>
-          <p:cNvPr id="27" name="DSPIRA 3"/>
-          <p:cNvSpPr>
-            <a:spLocks noGrp="1"/>
-          </p:cNvSpPr>
-          <p:nvPr/>
-        </p:nvSpPr>
-        <p:spPr>
-          <a:xfrm>
-            <a:off x="228600" y="76200"/>
-            <a:ext cx="4762500" cy="228600"/>
-          </a:xfrm>
-          <a:prstGeom prst="rect">
-            <a:avLst/>
-          </a:prstGeom>
-          <a:noFill/>
-          <a:ln w="0">
-            <a:noFill/>
-          </a:ln>
-        </p:spPr>
-        <p:txBody>
-          <a:bodyPr>
-            <a:noAutofit/>
-          </a:bodyPr>
-          <a:lstStyle/>
-          <a:p>
-            <a:pPr>
-              <a:defRPr sz="1200" b="1">
-                <a:solidFill>
-                  <a:srgbClr val="002855"/>
-                </a:solidFill>
-                <a:latin typeface="Arial"/>
-                <a:ea typeface="Arial"/>
-                <a:cs typeface="Arial"/>
-              </a:defRPr>
-            </a:pPr>
-            <a:r>
-              <a:rPr sz="1200" b="1">
-                <a:solidFill>
-                  <a:srgbClr val="002855"/>
-                </a:solidFill>
-                <a:latin typeface="Arial"/>
-                <a:ea typeface="Arial"/>
-                <a:cs typeface="Arial"/>
-              </a:rPr>
-              <a:t>WVU DSPIRA</a:t>
-            </a:r>
-          </a:p>
-        </p:txBody>
       </p:sp>
       <p:sp>
         <p:nvSpPr>
@@ -8324,6 +8624,156 @@
                 <a:cs typeface="Arial"/>
               </a:rPr>
               <a:t>5 of 10</a:t>
+            </a:r>
+          </a:p>
+        </p:txBody>
+      </p:sp>
+      <p:sp>
+        <p:nvSpPr>
+          <p:cNvPr id="30" name="WVU DSPIRA navy band"/>
+          <p:cNvSpPr>
+            <a:spLocks noGrp="1"/>
+          </p:cNvSpPr>
+          <p:nvPr/>
+        </p:nvSpPr>
+        <p:spPr>
+          <a:xfrm>
+            <a:off x="0" y="0"/>
+            <a:ext cx="9144000" cy="323850"/>
+          </a:xfrm>
+          <a:prstGeom prst="rect">
+            <a:avLst/>
+          </a:prstGeom>
+          <a:solidFill>
+            <a:srgbClr val="002855"/>
+          </a:solidFill>
+          <a:ln w="0">
+            <a:noFill/>
+          </a:ln>
+        </p:spPr>
+      </p:sp>
+      <p:sp>
+        <p:nvSpPr>
+          <p:cNvPr id="31" name="WVU DSPIRA gold rule"/>
+          <p:cNvSpPr>
+            <a:spLocks noGrp="1"/>
+          </p:cNvSpPr>
+          <p:nvPr/>
+        </p:nvSpPr>
+        <p:spPr>
+          <a:xfrm>
+            <a:off x="0" y="323850"/>
+            <a:ext cx="9144000" cy="19050"/>
+          </a:xfrm>
+          <a:prstGeom prst="rect">
+            <a:avLst/>
+          </a:prstGeom>
+          <a:solidFill>
+            <a:srgbClr val="EEAA00"/>
+          </a:solidFill>
+          <a:ln w="0">
+            <a:noFill/>
+          </a:ln>
+        </p:spPr>
+      </p:sp>
+      <p:sp>
+        <p:nvSpPr>
+          <p:cNvPr id="32" name="WVU DSPIRA name"/>
+          <p:cNvSpPr>
+            <a:spLocks noGrp="1"/>
+          </p:cNvSpPr>
+          <p:nvPr/>
+        </p:nvSpPr>
+        <p:spPr>
+          <a:xfrm>
+            <a:off x="228600" y="19050"/>
+            <a:ext cx="2857500" cy="257175"/>
+          </a:xfrm>
+          <a:prstGeom prst="rect">
+            <a:avLst/>
+          </a:prstGeom>
+          <a:noFill/>
+          <a:ln w="0">
+            <a:noFill/>
+          </a:ln>
+        </p:spPr>
+        <p:txBody>
+          <a:bodyPr>
+            <a:noAutofit/>
+          </a:bodyPr>
+          <a:lstStyle/>
+          <a:p>
+            <a:pPr>
+              <a:defRPr sz="1600" b="1">
+                <a:solidFill>
+                  <a:srgbClr val="FFFFFF"/>
+                </a:solidFill>
+                <a:latin typeface="Arial"/>
+                <a:ea typeface="Arial"/>
+                <a:cs typeface="Arial"/>
+              </a:defRPr>
+            </a:pPr>
+            <a:r>
+              <a:rPr sz="1600" b="1">
+                <a:solidFill>
+                  <a:srgbClr val="FFFFFF"/>
+                </a:solidFill>
+                <a:latin typeface="Arial"/>
+                <a:ea typeface="Arial"/>
+                <a:cs typeface="Arial"/>
+              </a:rPr>
+              <a:t>WVU DSPIRA</a:t>
+            </a:r>
+          </a:p>
+        </p:txBody>
+      </p:sp>
+      <p:sp>
+        <p:nvSpPr>
+          <p:cNvPr id="33" name="WVU DSPIRA university"/>
+          <p:cNvSpPr>
+            <a:spLocks noGrp="1"/>
+          </p:cNvSpPr>
+          <p:nvPr/>
+        </p:nvSpPr>
+        <p:spPr>
+          <a:xfrm>
+            <a:off x="6286500" y="114300"/>
+            <a:ext cx="2628900" cy="171450"/>
+          </a:xfrm>
+          <a:prstGeom prst="rect">
+            <a:avLst/>
+          </a:prstGeom>
+          <a:noFill/>
+          <a:ln w="0">
+            <a:noFill/>
+          </a:ln>
+        </p:spPr>
+        <p:txBody>
+          <a:bodyPr>
+            <a:noAutofit/>
+          </a:bodyPr>
+          <a:lstStyle/>
+          <a:p>
+            <a:pPr algn="r">
+              <a:defRPr sz="900">
+                <a:solidFill>
+                  <a:srgbClr val="FFFFFF"/>
+                </a:solidFill>
+                <a:latin typeface="Arial"/>
+                <a:ea typeface="Arial"/>
+                <a:cs typeface="Arial"/>
+              </a:defRPr>
+            </a:pPr>
+            <a:r>
+              <a:rPr sz="900">
+                <a:solidFill>
+                  <a:srgbClr val="FFFFFF"/>
+                </a:solidFill>
+                <a:latin typeface="Arial"/>
+                <a:ea typeface="Arial"/>
+                <a:cs typeface="Arial"/>
+              </a:rPr>
+              <a:t>WEST VIRGINIA UNIVERSITY</a:t>
             </a:r>
           </a:p>
         </p:txBody>
@@ -10291,7 +10741,7 @@
       </p:sp>
       <p:sp>
         <p:nvSpPr>
-          <p:cNvPr id="92" name="DSPIRA 1"/>
+          <p:cNvPr id="93" name="DSPIRA 2"/>
           <p:cNvSpPr>
             <a:spLocks noGrp="1"/>
           </p:cNvSpPr>
@@ -10299,7 +10749,7 @@
         </p:nvSpPr>
         <p:spPr>
           <a:xfrm>
-            <a:off x="0" y="0"/>
+            <a:off x="0" y="7200900"/>
             <a:ext cx="9144000" cy="342900"/>
           </a:xfrm>
           <a:prstGeom prst="rect">
@@ -10312,81 +10762,6 @@
             <a:noFill/>
           </a:ln>
         </p:spPr>
-      </p:sp>
-      <p:sp>
-        <p:nvSpPr>
-          <p:cNvPr id="93" name="DSPIRA 2"/>
-          <p:cNvSpPr>
-            <a:spLocks noGrp="1"/>
-          </p:cNvSpPr>
-          <p:nvPr/>
-        </p:nvSpPr>
-        <p:spPr>
-          <a:xfrm>
-            <a:off x="0" y="7200900"/>
-            <a:ext cx="9144000" cy="342900"/>
-          </a:xfrm>
-          <a:prstGeom prst="rect">
-            <a:avLst/>
-          </a:prstGeom>
-          <a:solidFill>
-            <a:srgbClr val="FFFFFF"/>
-          </a:solidFill>
-          <a:ln w="0">
-            <a:noFill/>
-          </a:ln>
-        </p:spPr>
-      </p:sp>
-      <p:sp>
-        <p:nvSpPr>
-          <p:cNvPr id="94" name="DSPIRA 3"/>
-          <p:cNvSpPr>
-            <a:spLocks noGrp="1"/>
-          </p:cNvSpPr>
-          <p:nvPr/>
-        </p:nvSpPr>
-        <p:spPr>
-          <a:xfrm>
-            <a:off x="228600" y="76200"/>
-            <a:ext cx="4762500" cy="228600"/>
-          </a:xfrm>
-          <a:prstGeom prst="rect">
-            <a:avLst/>
-          </a:prstGeom>
-          <a:noFill/>
-          <a:ln w="0">
-            <a:noFill/>
-          </a:ln>
-        </p:spPr>
-        <p:txBody>
-          <a:bodyPr>
-            <a:noAutofit/>
-          </a:bodyPr>
-          <a:lstStyle/>
-          <a:p>
-            <a:pPr>
-              <a:defRPr sz="1200" b="1">
-                <a:solidFill>
-                  <a:srgbClr val="002855"/>
-                </a:solidFill>
-                <a:latin typeface="Arial"/>
-                <a:ea typeface="Arial"/>
-                <a:cs typeface="Arial"/>
-              </a:defRPr>
-            </a:pPr>
-            <a:r>
-              <a:rPr sz="1200" b="1">
-                <a:solidFill>
-                  <a:srgbClr val="002855"/>
-                </a:solidFill>
-                <a:latin typeface="Arial"/>
-                <a:ea typeface="Arial"/>
-                <a:cs typeface="Arial"/>
-              </a:rPr>
-              <a:t>WVU DSPIRA</a:t>
-            </a:r>
-          </a:p>
-        </p:txBody>
       </p:sp>
       <p:sp>
         <p:nvSpPr>
@@ -10486,6 +10861,156 @@
                 <a:cs typeface="Arial"/>
               </a:rPr>
               <a:t>6 of 10</a:t>
+            </a:r>
+          </a:p>
+        </p:txBody>
+      </p:sp>
+      <p:sp>
+        <p:nvSpPr>
+          <p:cNvPr id="97" name="WVU DSPIRA navy band"/>
+          <p:cNvSpPr>
+            <a:spLocks noGrp="1"/>
+          </p:cNvSpPr>
+          <p:nvPr/>
+        </p:nvSpPr>
+        <p:spPr>
+          <a:xfrm>
+            <a:off x="0" y="0"/>
+            <a:ext cx="9144000" cy="323850"/>
+          </a:xfrm>
+          <a:prstGeom prst="rect">
+            <a:avLst/>
+          </a:prstGeom>
+          <a:solidFill>
+            <a:srgbClr val="002855"/>
+          </a:solidFill>
+          <a:ln w="0">
+            <a:noFill/>
+          </a:ln>
+        </p:spPr>
+      </p:sp>
+      <p:sp>
+        <p:nvSpPr>
+          <p:cNvPr id="98" name="WVU DSPIRA gold rule"/>
+          <p:cNvSpPr>
+            <a:spLocks noGrp="1"/>
+          </p:cNvSpPr>
+          <p:nvPr/>
+        </p:nvSpPr>
+        <p:spPr>
+          <a:xfrm>
+            <a:off x="0" y="323850"/>
+            <a:ext cx="9144000" cy="19050"/>
+          </a:xfrm>
+          <a:prstGeom prst="rect">
+            <a:avLst/>
+          </a:prstGeom>
+          <a:solidFill>
+            <a:srgbClr val="EEAA00"/>
+          </a:solidFill>
+          <a:ln w="0">
+            <a:noFill/>
+          </a:ln>
+        </p:spPr>
+      </p:sp>
+      <p:sp>
+        <p:nvSpPr>
+          <p:cNvPr id="99" name="WVU DSPIRA name"/>
+          <p:cNvSpPr>
+            <a:spLocks noGrp="1"/>
+          </p:cNvSpPr>
+          <p:nvPr/>
+        </p:nvSpPr>
+        <p:spPr>
+          <a:xfrm>
+            <a:off x="228600" y="19050"/>
+            <a:ext cx="2857500" cy="257175"/>
+          </a:xfrm>
+          <a:prstGeom prst="rect">
+            <a:avLst/>
+          </a:prstGeom>
+          <a:noFill/>
+          <a:ln w="0">
+            <a:noFill/>
+          </a:ln>
+        </p:spPr>
+        <p:txBody>
+          <a:bodyPr>
+            <a:noAutofit/>
+          </a:bodyPr>
+          <a:lstStyle/>
+          <a:p>
+            <a:pPr>
+              <a:defRPr sz="1600" b="1">
+                <a:solidFill>
+                  <a:srgbClr val="FFFFFF"/>
+                </a:solidFill>
+                <a:latin typeface="Arial"/>
+                <a:ea typeface="Arial"/>
+                <a:cs typeface="Arial"/>
+              </a:defRPr>
+            </a:pPr>
+            <a:r>
+              <a:rPr sz="1600" b="1">
+                <a:solidFill>
+                  <a:srgbClr val="FFFFFF"/>
+                </a:solidFill>
+                <a:latin typeface="Arial"/>
+                <a:ea typeface="Arial"/>
+                <a:cs typeface="Arial"/>
+              </a:rPr>
+              <a:t>WVU DSPIRA</a:t>
+            </a:r>
+          </a:p>
+        </p:txBody>
+      </p:sp>
+      <p:sp>
+        <p:nvSpPr>
+          <p:cNvPr id="100" name="WVU DSPIRA university"/>
+          <p:cNvSpPr>
+            <a:spLocks noGrp="1"/>
+          </p:cNvSpPr>
+          <p:nvPr/>
+        </p:nvSpPr>
+        <p:spPr>
+          <a:xfrm>
+            <a:off x="6286500" y="114300"/>
+            <a:ext cx="2628900" cy="171450"/>
+          </a:xfrm>
+          <a:prstGeom prst="rect">
+            <a:avLst/>
+          </a:prstGeom>
+          <a:noFill/>
+          <a:ln w="0">
+            <a:noFill/>
+          </a:ln>
+        </p:spPr>
+        <p:txBody>
+          <a:bodyPr>
+            <a:noAutofit/>
+          </a:bodyPr>
+          <a:lstStyle/>
+          <a:p>
+            <a:pPr algn="r">
+              <a:defRPr sz="900">
+                <a:solidFill>
+                  <a:srgbClr val="FFFFFF"/>
+                </a:solidFill>
+                <a:latin typeface="Arial"/>
+                <a:ea typeface="Arial"/>
+                <a:cs typeface="Arial"/>
+              </a:defRPr>
+            </a:pPr>
+            <a:r>
+              <a:rPr sz="900">
+                <a:solidFill>
+                  <a:srgbClr val="FFFFFF"/>
+                </a:solidFill>
+                <a:latin typeface="Arial"/>
+                <a:ea typeface="Arial"/>
+                <a:cs typeface="Arial"/>
+              </a:rPr>
+              <a:t>WEST VIRGINIA UNIVERSITY</a:t>
             </a:r>
           </a:p>
         </p:txBody>
@@ -12170,7 +12695,7 @@
       </p:sp>
       <p:sp>
         <p:nvSpPr>
-          <p:cNvPr id="60" name="DSPIRA 1"/>
+          <p:cNvPr id="61" name="DSPIRA 2"/>
           <p:cNvSpPr>
             <a:spLocks noGrp="1"/>
           </p:cNvSpPr>
@@ -12178,7 +12703,7 @@
         </p:nvSpPr>
         <p:spPr>
           <a:xfrm>
-            <a:off x="0" y="0"/>
+            <a:off x="0" y="7200900"/>
             <a:ext cx="9144000" cy="342900"/>
           </a:xfrm>
           <a:prstGeom prst="rect">
@@ -12191,81 +12716,6 @@
             <a:noFill/>
           </a:ln>
         </p:spPr>
-      </p:sp>
-      <p:sp>
-        <p:nvSpPr>
-          <p:cNvPr id="61" name="DSPIRA 2"/>
-          <p:cNvSpPr>
-            <a:spLocks noGrp="1"/>
-          </p:cNvSpPr>
-          <p:nvPr/>
-        </p:nvSpPr>
-        <p:spPr>
-          <a:xfrm>
-            <a:off x="0" y="7200900"/>
-            <a:ext cx="9144000" cy="342900"/>
-          </a:xfrm>
-          <a:prstGeom prst="rect">
-            <a:avLst/>
-          </a:prstGeom>
-          <a:solidFill>
-            <a:srgbClr val="FFFFFF"/>
-          </a:solidFill>
-          <a:ln w="0">
-            <a:noFill/>
-          </a:ln>
-        </p:spPr>
-      </p:sp>
-      <p:sp>
-        <p:nvSpPr>
-          <p:cNvPr id="62" name="DSPIRA 3"/>
-          <p:cNvSpPr>
-            <a:spLocks noGrp="1"/>
-          </p:cNvSpPr>
-          <p:nvPr/>
-        </p:nvSpPr>
-        <p:spPr>
-          <a:xfrm>
-            <a:off x="228600" y="76200"/>
-            <a:ext cx="4762500" cy="228600"/>
-          </a:xfrm>
-          <a:prstGeom prst="rect">
-            <a:avLst/>
-          </a:prstGeom>
-          <a:noFill/>
-          <a:ln w="0">
-            <a:noFill/>
-          </a:ln>
-        </p:spPr>
-        <p:txBody>
-          <a:bodyPr>
-            <a:noAutofit/>
-          </a:bodyPr>
-          <a:lstStyle/>
-          <a:p>
-            <a:pPr>
-              <a:defRPr sz="1200" b="1">
-                <a:solidFill>
-                  <a:srgbClr val="002855"/>
-                </a:solidFill>
-                <a:latin typeface="Arial"/>
-                <a:ea typeface="Arial"/>
-                <a:cs typeface="Arial"/>
-              </a:defRPr>
-            </a:pPr>
-            <a:r>
-              <a:rPr sz="1200" b="1">
-                <a:solidFill>
-                  <a:srgbClr val="002855"/>
-                </a:solidFill>
-                <a:latin typeface="Arial"/>
-                <a:ea typeface="Arial"/>
-                <a:cs typeface="Arial"/>
-              </a:rPr>
-              <a:t>WVU DSPIRA</a:t>
-            </a:r>
-          </a:p>
-        </p:txBody>
       </p:sp>
       <p:sp>
         <p:nvSpPr>
@@ -12365,6 +12815,156 @@
                 <a:cs typeface="Arial"/>
               </a:rPr>
               <a:t>7 of 10</a:t>
+            </a:r>
+          </a:p>
+        </p:txBody>
+      </p:sp>
+      <p:sp>
+        <p:nvSpPr>
+          <p:cNvPr id="65" name="WVU DSPIRA navy band"/>
+          <p:cNvSpPr>
+            <a:spLocks noGrp="1"/>
+          </p:cNvSpPr>
+          <p:nvPr/>
+        </p:nvSpPr>
+        <p:spPr>
+          <a:xfrm>
+            <a:off x="0" y="0"/>
+            <a:ext cx="9144000" cy="323850"/>
+          </a:xfrm>
+          <a:prstGeom prst="rect">
+            <a:avLst/>
+          </a:prstGeom>
+          <a:solidFill>
+            <a:srgbClr val="002855"/>
+          </a:solidFill>
+          <a:ln w="0">
+            <a:noFill/>
+          </a:ln>
+        </p:spPr>
+      </p:sp>
+      <p:sp>
+        <p:nvSpPr>
+          <p:cNvPr id="66" name="WVU DSPIRA gold rule"/>
+          <p:cNvSpPr>
+            <a:spLocks noGrp="1"/>
+          </p:cNvSpPr>
+          <p:nvPr/>
+        </p:nvSpPr>
+        <p:spPr>
+          <a:xfrm>
+            <a:off x="0" y="323850"/>
+            <a:ext cx="9144000" cy="19050"/>
+          </a:xfrm>
+          <a:prstGeom prst="rect">
+            <a:avLst/>
+          </a:prstGeom>
+          <a:solidFill>
+            <a:srgbClr val="EEAA00"/>
+          </a:solidFill>
+          <a:ln w="0">
+            <a:noFill/>
+          </a:ln>
+        </p:spPr>
+      </p:sp>
+      <p:sp>
+        <p:nvSpPr>
+          <p:cNvPr id="67" name="WVU DSPIRA name"/>
+          <p:cNvSpPr>
+            <a:spLocks noGrp="1"/>
+          </p:cNvSpPr>
+          <p:nvPr/>
+        </p:nvSpPr>
+        <p:spPr>
+          <a:xfrm>
+            <a:off x="228600" y="19050"/>
+            <a:ext cx="2857500" cy="257175"/>
+          </a:xfrm>
+          <a:prstGeom prst="rect">
+            <a:avLst/>
+          </a:prstGeom>
+          <a:noFill/>
+          <a:ln w="0">
+            <a:noFill/>
+          </a:ln>
+        </p:spPr>
+        <p:txBody>
+          <a:bodyPr>
+            <a:noAutofit/>
+          </a:bodyPr>
+          <a:lstStyle/>
+          <a:p>
+            <a:pPr>
+              <a:defRPr sz="1600" b="1">
+                <a:solidFill>
+                  <a:srgbClr val="FFFFFF"/>
+                </a:solidFill>
+                <a:latin typeface="Arial"/>
+                <a:ea typeface="Arial"/>
+                <a:cs typeface="Arial"/>
+              </a:defRPr>
+            </a:pPr>
+            <a:r>
+              <a:rPr sz="1600" b="1">
+                <a:solidFill>
+                  <a:srgbClr val="FFFFFF"/>
+                </a:solidFill>
+                <a:latin typeface="Arial"/>
+                <a:ea typeface="Arial"/>
+                <a:cs typeface="Arial"/>
+              </a:rPr>
+              <a:t>WVU DSPIRA</a:t>
+            </a:r>
+          </a:p>
+        </p:txBody>
+      </p:sp>
+      <p:sp>
+        <p:nvSpPr>
+          <p:cNvPr id="68" name="WVU DSPIRA university"/>
+          <p:cNvSpPr>
+            <a:spLocks noGrp="1"/>
+          </p:cNvSpPr>
+          <p:nvPr/>
+        </p:nvSpPr>
+        <p:spPr>
+          <a:xfrm>
+            <a:off x="6286500" y="114300"/>
+            <a:ext cx="2628900" cy="171450"/>
+          </a:xfrm>
+          <a:prstGeom prst="rect">
+            <a:avLst/>
+          </a:prstGeom>
+          <a:noFill/>
+          <a:ln w="0">
+            <a:noFill/>
+          </a:ln>
+        </p:spPr>
+        <p:txBody>
+          <a:bodyPr>
+            <a:noAutofit/>
+          </a:bodyPr>
+          <a:lstStyle/>
+          <a:p>
+            <a:pPr algn="r">
+              <a:defRPr sz="900">
+                <a:solidFill>
+                  <a:srgbClr val="FFFFFF"/>
+                </a:solidFill>
+                <a:latin typeface="Arial"/>
+                <a:ea typeface="Arial"/>
+                <a:cs typeface="Arial"/>
+              </a:defRPr>
+            </a:pPr>
+            <a:r>
+              <a:rPr sz="900">
+                <a:solidFill>
+                  <a:srgbClr val="FFFFFF"/>
+                </a:solidFill>
+                <a:latin typeface="Arial"/>
+                <a:ea typeface="Arial"/>
+                <a:cs typeface="Arial"/>
+              </a:rPr>
+              <a:t>WEST VIRGINIA UNIVERSITY</a:t>
             </a:r>
           </a:p>
         </p:txBody>
@@ -14638,7 +15238,7 @@
       </p:sp>
       <p:sp>
         <p:nvSpPr>
-          <p:cNvPr id="94" name="DSPIRA 1"/>
+          <p:cNvPr id="95" name="DSPIRA 2"/>
           <p:cNvSpPr>
             <a:spLocks noGrp="1"/>
           </p:cNvSpPr>
@@ -14646,7 +15246,7 @@
         </p:nvSpPr>
         <p:spPr>
           <a:xfrm>
-            <a:off x="0" y="0"/>
+            <a:off x="0" y="7200900"/>
             <a:ext cx="9144000" cy="342900"/>
           </a:xfrm>
           <a:prstGeom prst="rect">
@@ -14659,81 +15259,6 @@
             <a:noFill/>
           </a:ln>
         </p:spPr>
-      </p:sp>
-      <p:sp>
-        <p:nvSpPr>
-          <p:cNvPr id="95" name="DSPIRA 2"/>
-          <p:cNvSpPr>
-            <a:spLocks noGrp="1"/>
-          </p:cNvSpPr>
-          <p:nvPr/>
-        </p:nvSpPr>
-        <p:spPr>
-          <a:xfrm>
-            <a:off x="0" y="7200900"/>
-            <a:ext cx="9144000" cy="342900"/>
-          </a:xfrm>
-          <a:prstGeom prst="rect">
-            <a:avLst/>
-          </a:prstGeom>
-          <a:solidFill>
-            <a:srgbClr val="FFFFFF"/>
-          </a:solidFill>
-          <a:ln w="0">
-            <a:noFill/>
-          </a:ln>
-        </p:spPr>
-      </p:sp>
-      <p:sp>
-        <p:nvSpPr>
-          <p:cNvPr id="96" name="DSPIRA 3"/>
-          <p:cNvSpPr>
-            <a:spLocks noGrp="1"/>
-          </p:cNvSpPr>
-          <p:nvPr/>
-        </p:nvSpPr>
-        <p:spPr>
-          <a:xfrm>
-            <a:off x="228600" y="76200"/>
-            <a:ext cx="4762500" cy="228600"/>
-          </a:xfrm>
-          <a:prstGeom prst="rect">
-            <a:avLst/>
-          </a:prstGeom>
-          <a:noFill/>
-          <a:ln w="0">
-            <a:noFill/>
-          </a:ln>
-        </p:spPr>
-        <p:txBody>
-          <a:bodyPr>
-            <a:noAutofit/>
-          </a:bodyPr>
-          <a:lstStyle/>
-          <a:p>
-            <a:pPr>
-              <a:defRPr sz="1200" b="1">
-                <a:solidFill>
-                  <a:srgbClr val="002855"/>
-                </a:solidFill>
-                <a:latin typeface="Arial"/>
-                <a:ea typeface="Arial"/>
-                <a:cs typeface="Arial"/>
-              </a:defRPr>
-            </a:pPr>
-            <a:r>
-              <a:rPr sz="1200" b="1">
-                <a:solidFill>
-                  <a:srgbClr val="002855"/>
-                </a:solidFill>
-                <a:latin typeface="Arial"/>
-                <a:ea typeface="Arial"/>
-                <a:cs typeface="Arial"/>
-              </a:rPr>
-              <a:t>WVU DSPIRA</a:t>
-            </a:r>
-          </a:p>
-        </p:txBody>
       </p:sp>
       <p:sp>
         <p:nvSpPr>
@@ -14833,6 +15358,156 @@
                 <a:cs typeface="Arial"/>
               </a:rPr>
               <a:t>8 of 10</a:t>
+            </a:r>
+          </a:p>
+        </p:txBody>
+      </p:sp>
+      <p:sp>
+        <p:nvSpPr>
+          <p:cNvPr id="99" name="WVU DSPIRA navy band"/>
+          <p:cNvSpPr>
+            <a:spLocks noGrp="1"/>
+          </p:cNvSpPr>
+          <p:nvPr/>
+        </p:nvSpPr>
+        <p:spPr>
+          <a:xfrm>
+            <a:off x="0" y="0"/>
+            <a:ext cx="9144000" cy="323850"/>
+          </a:xfrm>
+          <a:prstGeom prst="rect">
+            <a:avLst/>
+          </a:prstGeom>
+          <a:solidFill>
+            <a:srgbClr val="002855"/>
+          </a:solidFill>
+          <a:ln w="0">
+            <a:noFill/>
+          </a:ln>
+        </p:spPr>
+      </p:sp>
+      <p:sp>
+        <p:nvSpPr>
+          <p:cNvPr id="100" name="WVU DSPIRA gold rule"/>
+          <p:cNvSpPr>
+            <a:spLocks noGrp="1"/>
+          </p:cNvSpPr>
+          <p:nvPr/>
+        </p:nvSpPr>
+        <p:spPr>
+          <a:xfrm>
+            <a:off x="0" y="323850"/>
+            <a:ext cx="9144000" cy="19050"/>
+          </a:xfrm>
+          <a:prstGeom prst="rect">
+            <a:avLst/>
+          </a:prstGeom>
+          <a:solidFill>
+            <a:srgbClr val="EEAA00"/>
+          </a:solidFill>
+          <a:ln w="0">
+            <a:noFill/>
+          </a:ln>
+        </p:spPr>
+      </p:sp>
+      <p:sp>
+        <p:nvSpPr>
+          <p:cNvPr id="101" name="WVU DSPIRA name"/>
+          <p:cNvSpPr>
+            <a:spLocks noGrp="1"/>
+          </p:cNvSpPr>
+          <p:nvPr/>
+        </p:nvSpPr>
+        <p:spPr>
+          <a:xfrm>
+            <a:off x="228600" y="19050"/>
+            <a:ext cx="2857500" cy="257175"/>
+          </a:xfrm>
+          <a:prstGeom prst="rect">
+            <a:avLst/>
+          </a:prstGeom>
+          <a:noFill/>
+          <a:ln w="0">
+            <a:noFill/>
+          </a:ln>
+        </p:spPr>
+        <p:txBody>
+          <a:bodyPr>
+            <a:noAutofit/>
+          </a:bodyPr>
+          <a:lstStyle/>
+          <a:p>
+            <a:pPr>
+              <a:defRPr sz="1600" b="1">
+                <a:solidFill>
+                  <a:srgbClr val="FFFFFF"/>
+                </a:solidFill>
+                <a:latin typeface="Arial"/>
+                <a:ea typeface="Arial"/>
+                <a:cs typeface="Arial"/>
+              </a:defRPr>
+            </a:pPr>
+            <a:r>
+              <a:rPr sz="1600" b="1">
+                <a:solidFill>
+                  <a:srgbClr val="FFFFFF"/>
+                </a:solidFill>
+                <a:latin typeface="Arial"/>
+                <a:ea typeface="Arial"/>
+                <a:cs typeface="Arial"/>
+              </a:rPr>
+              <a:t>WVU DSPIRA</a:t>
+            </a:r>
+          </a:p>
+        </p:txBody>
+      </p:sp>
+      <p:sp>
+        <p:nvSpPr>
+          <p:cNvPr id="102" name="WVU DSPIRA university"/>
+          <p:cNvSpPr>
+            <a:spLocks noGrp="1"/>
+          </p:cNvSpPr>
+          <p:nvPr/>
+        </p:nvSpPr>
+        <p:spPr>
+          <a:xfrm>
+            <a:off x="6286500" y="114300"/>
+            <a:ext cx="2628900" cy="171450"/>
+          </a:xfrm>
+          <a:prstGeom prst="rect">
+            <a:avLst/>
+          </a:prstGeom>
+          <a:noFill/>
+          <a:ln w="0">
+            <a:noFill/>
+          </a:ln>
+        </p:spPr>
+        <p:txBody>
+          <a:bodyPr>
+            <a:noAutofit/>
+          </a:bodyPr>
+          <a:lstStyle/>
+          <a:p>
+            <a:pPr algn="r">
+              <a:defRPr sz="900">
+                <a:solidFill>
+                  <a:srgbClr val="FFFFFF"/>
+                </a:solidFill>
+                <a:latin typeface="Arial"/>
+                <a:ea typeface="Arial"/>
+                <a:cs typeface="Arial"/>
+              </a:defRPr>
+            </a:pPr>
+            <a:r>
+              <a:rPr sz="900">
+                <a:solidFill>
+                  <a:srgbClr val="FFFFFF"/>
+                </a:solidFill>
+                <a:latin typeface="Arial"/>
+                <a:ea typeface="Arial"/>
+                <a:cs typeface="Arial"/>
+              </a:rPr>
+              <a:t>WEST VIRGINIA UNIVERSITY</a:t>
             </a:r>
           </a:p>
         </p:txBody>
@@ -15212,7 +15887,7 @@
       </p:pic>
       <p:sp>
         <p:nvSpPr>
-          <p:cNvPr id="27" name="DSPIRA 1"/>
+          <p:cNvPr id="28" name="DSPIRA 2"/>
           <p:cNvSpPr>
             <a:spLocks noGrp="1"/>
           </p:cNvSpPr>
@@ -15220,7 +15895,7 @@
         </p:nvSpPr>
         <p:spPr>
           <a:xfrm>
-            <a:off x="0" y="0"/>
+            <a:off x="0" y="7200900"/>
             <a:ext cx="9144000" cy="342900"/>
           </a:xfrm>
           <a:prstGeom prst="rect">
@@ -15233,81 +15908,6 @@
             <a:noFill/>
           </a:ln>
         </p:spPr>
-      </p:sp>
-      <p:sp>
-        <p:nvSpPr>
-          <p:cNvPr id="28" name="DSPIRA 2"/>
-          <p:cNvSpPr>
-            <a:spLocks noGrp="1"/>
-          </p:cNvSpPr>
-          <p:nvPr/>
-        </p:nvSpPr>
-        <p:spPr>
-          <a:xfrm>
-            <a:off x="0" y="7200900"/>
-            <a:ext cx="9144000" cy="342900"/>
-          </a:xfrm>
-          <a:prstGeom prst="rect">
-            <a:avLst/>
-          </a:prstGeom>
-          <a:solidFill>
-            <a:srgbClr val="FFFFFF"/>
-          </a:solidFill>
-          <a:ln w="0">
-            <a:noFill/>
-          </a:ln>
-        </p:spPr>
-      </p:sp>
-      <p:sp>
-        <p:nvSpPr>
-          <p:cNvPr id="29" name="DSPIRA 3"/>
-          <p:cNvSpPr>
-            <a:spLocks noGrp="1"/>
-          </p:cNvSpPr>
-          <p:nvPr/>
-        </p:nvSpPr>
-        <p:spPr>
-          <a:xfrm>
-            <a:off x="228600" y="76200"/>
-            <a:ext cx="4762500" cy="228600"/>
-          </a:xfrm>
-          <a:prstGeom prst="rect">
-            <a:avLst/>
-          </a:prstGeom>
-          <a:noFill/>
-          <a:ln w="0">
-            <a:noFill/>
-          </a:ln>
-        </p:spPr>
-        <p:txBody>
-          <a:bodyPr>
-            <a:noAutofit/>
-          </a:bodyPr>
-          <a:lstStyle/>
-          <a:p>
-            <a:pPr>
-              <a:defRPr sz="1200" b="1">
-                <a:solidFill>
-                  <a:srgbClr val="002855"/>
-                </a:solidFill>
-                <a:latin typeface="Arial"/>
-                <a:ea typeface="Arial"/>
-                <a:cs typeface="Arial"/>
-              </a:defRPr>
-            </a:pPr>
-            <a:r>
-              <a:rPr sz="1200" b="1">
-                <a:solidFill>
-                  <a:srgbClr val="002855"/>
-                </a:solidFill>
-                <a:latin typeface="Arial"/>
-                <a:ea typeface="Arial"/>
-                <a:cs typeface="Arial"/>
-              </a:rPr>
-              <a:t>WVU DSPIRA</a:t>
-            </a:r>
-          </a:p>
-        </p:txBody>
       </p:sp>
       <p:sp>
         <p:nvSpPr>
@@ -15407,6 +16007,156 @@
                 <a:cs typeface="Arial"/>
               </a:rPr>
               <a:t>9 of 10</a:t>
+            </a:r>
+          </a:p>
+        </p:txBody>
+      </p:sp>
+      <p:sp>
+        <p:nvSpPr>
+          <p:cNvPr id="32" name="WVU DSPIRA navy band"/>
+          <p:cNvSpPr>
+            <a:spLocks noGrp="1"/>
+          </p:cNvSpPr>
+          <p:nvPr/>
+        </p:nvSpPr>
+        <p:spPr>
+          <a:xfrm>
+            <a:off x="0" y="0"/>
+            <a:ext cx="9144000" cy="323850"/>
+          </a:xfrm>
+          <a:prstGeom prst="rect">
+            <a:avLst/>
+          </a:prstGeom>
+          <a:solidFill>
+            <a:srgbClr val="002855"/>
+          </a:solidFill>
+          <a:ln w="0">
+            <a:noFill/>
+          </a:ln>
+        </p:spPr>
+      </p:sp>
+      <p:sp>
+        <p:nvSpPr>
+          <p:cNvPr id="33" name="WVU DSPIRA gold rule"/>
+          <p:cNvSpPr>
+            <a:spLocks noGrp="1"/>
+          </p:cNvSpPr>
+          <p:nvPr/>
+        </p:nvSpPr>
+        <p:spPr>
+          <a:xfrm>
+            <a:off x="0" y="323850"/>
+            <a:ext cx="9144000" cy="19050"/>
+          </a:xfrm>
+          <a:prstGeom prst="rect">
+            <a:avLst/>
+          </a:prstGeom>
+          <a:solidFill>
+            <a:srgbClr val="EEAA00"/>
+          </a:solidFill>
+          <a:ln w="0">
+            <a:noFill/>
+          </a:ln>
+        </p:spPr>
+      </p:sp>
+      <p:sp>
+        <p:nvSpPr>
+          <p:cNvPr id="34" name="WVU DSPIRA name"/>
+          <p:cNvSpPr>
+            <a:spLocks noGrp="1"/>
+          </p:cNvSpPr>
+          <p:nvPr/>
+        </p:nvSpPr>
+        <p:spPr>
+          <a:xfrm>
+            <a:off x="228600" y="19050"/>
+            <a:ext cx="2857500" cy="257175"/>
+          </a:xfrm>
+          <a:prstGeom prst="rect">
+            <a:avLst/>
+          </a:prstGeom>
+          <a:noFill/>
+          <a:ln w="0">
+            <a:noFill/>
+          </a:ln>
+        </p:spPr>
+        <p:txBody>
+          <a:bodyPr>
+            <a:noAutofit/>
+          </a:bodyPr>
+          <a:lstStyle/>
+          <a:p>
+            <a:pPr>
+              <a:defRPr sz="1600" b="1">
+                <a:solidFill>
+                  <a:srgbClr val="FFFFFF"/>
+                </a:solidFill>
+                <a:latin typeface="Arial"/>
+                <a:ea typeface="Arial"/>
+                <a:cs typeface="Arial"/>
+              </a:defRPr>
+            </a:pPr>
+            <a:r>
+              <a:rPr sz="1600" b="1">
+                <a:solidFill>
+                  <a:srgbClr val="FFFFFF"/>
+                </a:solidFill>
+                <a:latin typeface="Arial"/>
+                <a:ea typeface="Arial"/>
+                <a:cs typeface="Arial"/>
+              </a:rPr>
+              <a:t>WVU DSPIRA</a:t>
+            </a:r>
+          </a:p>
+        </p:txBody>
+      </p:sp>
+      <p:sp>
+        <p:nvSpPr>
+          <p:cNvPr id="35" name="WVU DSPIRA university"/>
+          <p:cNvSpPr>
+            <a:spLocks noGrp="1"/>
+          </p:cNvSpPr>
+          <p:nvPr/>
+        </p:nvSpPr>
+        <p:spPr>
+          <a:xfrm>
+            <a:off x="6286500" y="114300"/>
+            <a:ext cx="2628900" cy="171450"/>
+          </a:xfrm>
+          <a:prstGeom prst="rect">
+            <a:avLst/>
+          </a:prstGeom>
+          <a:noFill/>
+          <a:ln w="0">
+            <a:noFill/>
+          </a:ln>
+        </p:spPr>
+        <p:txBody>
+          <a:bodyPr>
+            <a:noAutofit/>
+          </a:bodyPr>
+          <a:lstStyle/>
+          <a:p>
+            <a:pPr algn="r">
+              <a:defRPr sz="900">
+                <a:solidFill>
+                  <a:srgbClr val="FFFFFF"/>
+                </a:solidFill>
+                <a:latin typeface="Arial"/>
+                <a:ea typeface="Arial"/>
+                <a:cs typeface="Arial"/>
+              </a:defRPr>
+            </a:pPr>
+            <a:r>
+              <a:rPr sz="900">
+                <a:solidFill>
+                  <a:srgbClr val="FFFFFF"/>
+                </a:solidFill>
+                <a:latin typeface="Arial"/>
+                <a:ea typeface="Arial"/>
+                <a:cs typeface="Arial"/>
+              </a:rPr>
+              <a:t>WEST VIRGINIA UNIVERSITY</a:t>
             </a:r>
           </a:p>
         </p:txBody>

--- a/assets/lessons/lectures/digital-signal-processing/sampling-2018.pptx
+++ b/assets/lessons/lectures/digital-signal-processing/sampling-2018.pptx
@@ -4362,7 +4362,7 @@
                 <a:ea typeface="Arial"/>
                 <a:cs typeface="Arial"/>
               </a:rPr>
-              <a:t>wvurail.org/dspira</a:t>
+              <a:t>rail.wvu.edu/dspira</a:t>
             </a:r>
           </a:p>
         </p:txBody>
